--- a/lecons/USA/Population Geography/01_USA_POP_L01_Sources_of_Population_Data.pptx
+++ b/lecons/USA/Population Geography/01_USA_POP_L01_Sources_of_Population_Data.pptx
@@ -72,9 +72,12 @@
     <p:sldId id="320" r:id="rId66"/>
     <p:sldId id="321" r:id="rId67"/>
     <p:sldId id="322" r:id="rId68"/>
+    <p:sldId id="323" r:id="rId69"/>
+    <p:sldId id="324" r:id="rId70"/>
+    <p:sldId id="325" r:id="rId71"/>
   </p:sldIdLst>
   <p:notesMasterIdLst>
-    <p:notesMasterId r:id="rId69"/>
+    <p:notesMasterId r:id="rId72"/>
   </p:notesMasterIdLst>
   <p:sldSz cx="12192000" cy="6858000"/>
   <p:notesSz cx="6858000" cy="12192000"/>
@@ -3560,7 +3563,7 @@
           <a:p>
             <a:r>
               <a:rPr lang="en-US" dirty="0"/>
-              <a:t>Let us copy De Facto and De Jure Censuses. People are counted in a census by the following two methods. Copy the point on De facto method on the left, then draw the diagram on the right: de facto and de jure. Give it a title and label it clearly.</a:t>
+              <a:t>Let us copy De Facto and De Jure Censuses. People are counted in a census by the following two methods. Copy the point on De facto method on the left, then draw the diagram on the right: de facto and de jure censuses. Give it a title and label it clearly.</a:t>
             </a:r>
             <a:endParaRPr lang="en-US" dirty="0"/>
           </a:p>
@@ -3736,7 +3739,7 @@
           <a:p>
             <a:r>
               <a:rPr lang="en-US" dirty="0"/>
-              <a:t>We continue with De Facto and De Jure Censuses. Copy the point on Problems: write the key term first, then its explanation.</a:t>
+              <a:t>We continue with De Facto and De Jure Censuses. Copy the point on Weakness of the de facto method: write the key term first, then its explanation.</a:t>
             </a:r>
             <a:endParaRPr lang="en-US" dirty="0"/>
           </a:p>
@@ -3824,7 +3827,7 @@
           <a:p>
             <a:r>
               <a:rPr lang="en-US" dirty="0"/>
-              <a:t>Let us copy Sample Surveys. Sample surveys have the following characteristics. Copy the point on Principle on the left, then draw the diagram on the right: a sample survey. Give it a title and label it clearly.</a:t>
+              <a:t>We continue with De Facto and De Jure Censuses. Copy the point on Weakness of the de jure method: write the key term first, then its explanation.</a:t>
             </a:r>
             <a:endParaRPr lang="en-US" dirty="0"/>
           </a:p>
@@ -3912,7 +3915,7 @@
           <a:p>
             <a:r>
               <a:rPr lang="en-US" dirty="0"/>
-              <a:t>We continue with Sample Surveys. Copy the point on Sampling methods: write the key term first, then its explanation.</a:t>
+              <a:t>Let us copy Principle and Examples. Sample surveys are carried out as follows. Copy the point on Principle on the left, then draw the diagram on the right: a sample survey. Give it a title and label it clearly.</a:t>
             </a:r>
             <a:endParaRPr lang="en-US" dirty="0"/>
           </a:p>
@@ -4000,7 +4003,7 @@
           <a:p>
             <a:r>
               <a:rPr lang="en-US" dirty="0"/>
-              <a:t>We continue with Sample Surveys. Copy the point on Examples: write the key term first, then its explanation.</a:t>
+              <a:t>We continue with Principle and Examples. Copy the point on Sampling methods: write the key term first, then its explanation.</a:t>
             </a:r>
             <a:endParaRPr lang="en-US" dirty="0"/>
           </a:p>
@@ -4088,7 +4091,7 @@
           <a:p>
             <a:r>
               <a:rPr lang="en-US" dirty="0"/>
-              <a:t>We continue with Sample Surveys. Copy the point on Strengths and weaknesses: write the key term first, then its explanation.</a:t>
+              <a:t>We continue with Principle and Examples. Copy the point on Examples in Cameroon: write the key term first, then its explanation.</a:t>
             </a:r>
             <a:endParaRPr lang="en-US" dirty="0"/>
           </a:p>
@@ -4176,7 +4179,7 @@
           <a:p>
             <a:r>
               <a:rPr lang="en-US" dirty="0"/>
-              <a:t>Let us copy Vital Registration and Migration Records. Population changes are recorded continuously by the following sources. Copy the point on Vital registration on the left, then draw the diagram on the right: a newborn baby. Give it a title and label it clearly.</a:t>
+              <a:t>Let us copy Strengths and Weaknesses. Sample surveys have the following strengths and weaknesses. Copy the point on Low cost and speed: write the key term first, then its explanation.</a:t>
             </a:r>
             <a:endParaRPr lang="en-US" dirty="0"/>
           </a:p>
@@ -4264,7 +4267,7 @@
           <a:p>
             <a:r>
               <a:rPr lang="en-US" dirty="0"/>
-              <a:t>We continue with Vital Registration and Migration Records. Copy the point on Reliability of vital registration: write the key term first, then its explanation.</a:t>
+              <a:t>We continue with Strengths and Weaknesses. Copy the point on Detailed questions: write the key term first, then its explanation.</a:t>
             </a:r>
             <a:endParaRPr lang="en-US" dirty="0"/>
           </a:p>
@@ -4352,7 +4355,7 @@
           <a:p>
             <a:r>
               <a:rPr lang="en-US" dirty="0"/>
-              <a:t>Copy the point on Migration records on the left, then draw the diagram on the right: a passport. Give it a title and label it clearly.</a:t>
+              <a:t>We continue with Strengths and Weaknesses. Copy the point on Risk of error: write the key term first, then its explanation.</a:t>
             </a:r>
             <a:endParaRPr lang="en-US" dirty="0"/>
           </a:p>
@@ -4528,7 +4531,7 @@
           <a:p>
             <a:r>
               <a:rPr lang="en-US" dirty="0"/>
-              <a:t>We continue with Vital Registration and Migration Records. Copy the point on Reliability of migration records: write the key term first, then its explanation.</a:t>
+              <a:t>Let us copy Vital Registration and Migration Records. Population changes are recorded continuously by the following sources. Copy the point on Vital registration on the left, then draw the diagram on the right: a newborn baby. Give it a title and label it clearly.</a:t>
             </a:r>
             <a:endParaRPr lang="en-US" dirty="0"/>
           </a:p>
@@ -4616,7 +4619,7 @@
           <a:p>
             <a:r>
               <a:rPr lang="en-US" dirty="0"/>
-              <a:t>Let us copy The Current State of the World Population. The world population today has the following characteristics. Copy the point on Size on the left, then draw the diagram on the right: world population trends. Give it a title and label it clearly.</a:t>
+              <a:t>We continue with Vital Registration and Migration Records. Copy the point on Reliability of vital registration: write the key term first, then its explanation.</a:t>
             </a:r>
             <a:endParaRPr lang="en-US" dirty="0"/>
           </a:p>
@@ -4704,7 +4707,7 @@
           <a:p>
             <a:r>
               <a:rPr lang="en-US" dirty="0"/>
-              <a:t>We continue with The Current State of the World Population. Copy the point on Slower growth: write the key term first, then its explanation.</a:t>
+              <a:t>Copy the point on Migration records on the left, then draw the diagram on the right: a passport. Give it a title and label it clearly.</a:t>
             </a:r>
             <a:endParaRPr lang="en-US" dirty="0"/>
           </a:p>
@@ -4792,7 +4795,7 @@
           <a:p>
             <a:r>
               <a:rPr lang="en-US" dirty="0"/>
-              <a:t>Copy the point on Contrasts on the left, then draw the diagram on the right: world population. Give it a title and label it clearly.</a:t>
+              <a:t>We continue with Vital Registration and Migration Records. Copy the point on Reliability of migration records: write the key term first, then its explanation.</a:t>
             </a:r>
             <a:endParaRPr lang="en-US" dirty="0"/>
           </a:p>
@@ -4880,7 +4883,7 @@
           <a:p>
             <a:r>
               <a:rPr lang="en-US" dirty="0"/>
-              <a:t>We continue with The Current State of the World Population. Copy the point on Urbanisation and migration: write the key term first, then its explanation.</a:t>
+              <a:t>Let us copy The Current State of the World Population. The world population today has the following characteristics. Copy the point on Size on the left, then draw the diagram on the right: world population trends. Give it a title and label it clearly.</a:t>
             </a:r>
             <a:endParaRPr lang="en-US" dirty="0"/>
           </a:p>
@@ -4968,7 +4971,7 @@
           <a:p>
             <a:r>
               <a:rPr lang="en-US" dirty="0"/>
-              <a:t>Now let us check what you have understood. Question 1: Distinguish between the de facto and the de jure methods of census. Answer in your exercise book.</a:t>
+              <a:t>We continue with The Current State of the World Population. Copy the point on Slower growth: write the key term first, then its explanation.</a:t>
             </a:r>
             <a:endParaRPr lang="en-US" dirty="0"/>
           </a:p>
@@ -5056,7 +5059,7 @@
           <a:p>
             <a:r>
               <a:rPr lang="en-US" dirty="0"/>
-              <a:t>The expected answer is: the de facto method counts people where they are on census night; the de jure method counts them at their usual residence. If you got it right, well done.</a:t>
+              <a:t>Copy the point on Contrasts on the left, then draw the diagram on the right: world population. Give it a title and label it clearly.</a:t>
             </a:r>
             <a:endParaRPr lang="en-US" dirty="0"/>
           </a:p>
@@ -5144,7 +5147,7 @@
           <a:p>
             <a:r>
               <a:rPr lang="en-US" dirty="0"/>
-              <a:t>Now let us check what you have understood. Question 2: Give two reasons why vital registration is incomplete in Cameroon. Answer in your exercise book.</a:t>
+              <a:t>We continue with The Current State of the World Population. Copy the point on Urbanisation and migration: write the key term first, then its explanation.</a:t>
             </a:r>
             <a:endParaRPr lang="en-US" dirty="0"/>
           </a:p>
@@ -5232,7 +5235,7 @@
           <a:p>
             <a:r>
               <a:rPr lang="en-US" dirty="0"/>
-              <a:t>The expected answer is: many births take place at home far from civil status offices, and many people do not know the importance of declaring births and deaths. If you got it right, well done.</a:t>
+              <a:t>Now let us check what you have understood. Question 1: Distinguish between the de facto and the de jure methods of census. Answer in your exercise book.</a:t>
             </a:r>
             <a:endParaRPr lang="en-US" dirty="0"/>
           </a:p>
@@ -5320,7 +5323,7 @@
           <a:p>
             <a:r>
               <a:rPr lang="en-US" dirty="0"/>
-              <a:t>Take your time to copy this part; we will continue together.</a:t>
+              <a:t>The expected answer is: the de facto method counts people where they are on census night; the de jure method counts them at their usual residence. If you got it right, well done.</a:t>
             </a:r>
             <a:endParaRPr lang="en-US" dirty="0"/>
           </a:p>
@@ -5496,7 +5499,7 @@
           <a:p>
             <a:r>
               <a:rPr lang="en-US" dirty="0"/>
-              <a:t>For those who need more practice, fill in the blanks in your exercise book. The answers are: number 1, census; number 2, vital; number 3, 2005.</a:t>
+              <a:t>Now let us check what you have understood. Question 2: Give two reasons why vital registration is incomplete in Cameroon. Answer in your exercise book.</a:t>
             </a:r>
             <a:endParaRPr lang="en-US" dirty="0"/>
           </a:p>
@@ -5584,7 +5587,7 @@
           <a:p>
             <a:r>
               <a:rPr lang="en-US" dirty="0"/>
-              <a:t>For your homework: Define population density. We shall correct it at the beginning of our next lesson.</a:t>
+              <a:t>The expected answer is: many births take place at home far from civil status offices, and many people do not know the importance of declaring births and deaths. If you got it right, well done.</a:t>
             </a:r>
             <a:endParaRPr lang="en-US" dirty="0"/>
           </a:p>
@@ -5672,7 +5675,7 @@
           <a:p>
             <a:r>
               <a:rPr lang="en-US" dirty="0"/>
-              <a:t>Our next lesson will be on Lesson 2: Population Distribution and Density. Thank you for your attention, and see you next time.</a:t>
+              <a:t>Take your time to copy this part; we will continue together.</a:t>
             </a:r>
             <a:endParaRPr lang="en-US" dirty="0"/>
           </a:p>
@@ -5760,7 +5763,7 @@
           <a:p>
             <a:r>
               <a:rPr lang="en-US" dirty="0"/>
-              <a:t>Let us play the bilingual game. I say a word in English, and you give me the French word. Then we do the reverse.</a:t>
+              <a:t>For those who need more practice, fill in the blanks in your exercise book. The answers are: number 1, census; number 2, vital; number 3, 2005.</a:t>
             </a:r>
             <a:endParaRPr lang="en-US" dirty="0"/>
           </a:p>
@@ -5848,7 +5851,7 @@
           <a:p>
             <a:r>
               <a:rPr lang="en-US" dirty="0"/>
-              <a:t>I record this information in the official logbook of the class after the lesson.</a:t>
+              <a:t>For your homework: Define population density. We shall correct it at the beginning of our next lesson.</a:t>
             </a:r>
             <a:endParaRPr lang="en-US" dirty="0"/>
           </a:p>
@@ -5936,7 +5939,7 @@
           <a:p>
             <a:r>
               <a:rPr lang="en-US" dirty="0"/>
-              <a:t>I complete the second page of the logbook: the matter taught, the evaluation, the homework and the attendance.</a:t>
+              <a:t>Our next lesson will be on Lesson 2: Population Distribution and Density. Thank you for your attention, and see you next time.</a:t>
             </a:r>
             <a:endParaRPr lang="en-US" dirty="0"/>
           </a:p>
@@ -6024,7 +6027,7 @@
           <a:p>
             <a:r>
               <a:rPr lang="en-US" dirty="0"/>
-              <a:t>This slide is for me, the teacher: it gives the timing of the lesson and what to do if the projector is not available.</a:t>
+              <a:t>Let us play the bilingual game. I say a word in English, and you give me the French word. Then we do the reverse.</a:t>
             </a:r>
             <a:endParaRPr lang="en-US" dirty="0"/>
           </a:p>
@@ -6112,7 +6115,7 @@
           <a:p>
             <a:r>
               <a:rPr lang="en-US" dirty="0"/>
-              <a:t>These are the references and picture credits used to prepare this lesson.</a:t>
+              <a:t>I record this information in the official logbook of the class after the lesson.</a:t>
             </a:r>
             <a:endParaRPr lang="en-US" dirty="0"/>
           </a:p>
@@ -6136,6 +6139,182 @@
             <a:fld id="{F7021451-1387-4CA6-816F-3879F97B5CBC}" type="slidenum">
               <a:rPr lang="en-US"/>
               <a:t>67</a:t>
+            </a:fld>
+            <a:endParaRPr lang="en-US"/>
+          </a:p>
+        </p:txBody>
+      </p:sp>
+    </p:spTree>
+    <p:extLst>
+      <p:ext uri="{BB962C8B-B14F-4D97-AF65-F5344CB8AC3E}">
+        <p14:creationId xmlns:p14="http://schemas.microsoft.com/office/powerpoint/2010/main" val="1024086991"/>
+      </p:ext>
+    </p:extLst>
+  </p:cSld>
+  <p:clrMapOvr>
+    <a:masterClrMapping/>
+  </p:clrMapOvr>
+</p:notes>
+</file>
+
+<file path=ppt/notesSlides/notesSlide68.xml><?xml version="1.0" encoding="utf-8"?>
+<p:notes xmlns:a="http://schemas.openxmlformats.org/drawingml/2006/main" xmlns:r="http://schemas.openxmlformats.org/officeDocument/2006/relationships" xmlns:p="http://schemas.openxmlformats.org/presentationml/2006/main">
+  <p:cSld>
+    <p:spTree>
+      <p:nvGrpSpPr>
+        <p:cNvPr id="1" name=""/>
+        <p:cNvGrpSpPr/>
+        <p:nvPr/>
+      </p:nvGrpSpPr>
+      <p:grpSpPr>
+        <a:xfrm>
+          <a:off x="0" y="0"/>
+          <a:ext cx="0" cy="0"/>
+          <a:chOff x="0" y="0"/>
+          <a:chExt cx="0" cy="0"/>
+        </a:xfrm>
+      </p:grpSpPr>
+      <p:sp>
+        <p:nvSpPr>
+          <p:cNvPr id="2" name="Slide Image Placeholder 1"/>
+          <p:cNvSpPr>
+            <a:spLocks noGrp="1" noRot="1" noChangeAspect="1"/>
+          </p:cNvSpPr>
+          <p:nvPr>
+            <p:ph type="sldImg"/>
+          </p:nvPr>
+        </p:nvSpPr>
+        <p:spPr/>
+      </p:sp>
+      <p:sp>
+        <p:nvSpPr>
+          <p:cNvPr id="3" name="Notes Placeholder 2"/>
+          <p:cNvSpPr>
+            <a:spLocks noGrp="1"/>
+          </p:cNvSpPr>
+          <p:nvPr>
+            <p:ph type="body" idx="1"/>
+          </p:nvPr>
+        </p:nvSpPr>
+        <p:spPr/>
+        <p:txBody>
+          <a:bodyPr/>
+          <a:lstStyle/>
+          <a:p>
+            <a:r>
+              <a:rPr lang="en-US" dirty="0"/>
+              <a:t>I complete the second page of the logbook: the matter taught, the evaluation, the homework and the attendance.</a:t>
+            </a:r>
+            <a:endParaRPr lang="en-US" dirty="0"/>
+          </a:p>
+        </p:txBody>
+      </p:sp>
+      <p:sp>
+        <p:nvSpPr>
+          <p:cNvPr id="4" name="Slide Number Placeholder 3"/>
+          <p:cNvSpPr>
+            <a:spLocks noGrp="1"/>
+          </p:cNvSpPr>
+          <p:nvPr>
+            <p:ph type="sldNum" sz="quarter" idx="10"/>
+          </p:nvPr>
+        </p:nvSpPr>
+        <p:spPr/>
+        <p:txBody>
+          <a:bodyPr/>
+          <a:lstStyle/>
+          <a:p>
+            <a:fld id="{F7021451-1387-4CA6-816F-3879F97B5CBC}" type="slidenum">
+              <a:rPr lang="en-US"/>
+              <a:t>68</a:t>
+            </a:fld>
+            <a:endParaRPr lang="en-US"/>
+          </a:p>
+        </p:txBody>
+      </p:sp>
+    </p:spTree>
+    <p:extLst>
+      <p:ext uri="{BB962C8B-B14F-4D97-AF65-F5344CB8AC3E}">
+        <p14:creationId xmlns:p14="http://schemas.microsoft.com/office/powerpoint/2010/main" val="1024086991"/>
+      </p:ext>
+    </p:extLst>
+  </p:cSld>
+  <p:clrMapOvr>
+    <a:masterClrMapping/>
+  </p:clrMapOvr>
+</p:notes>
+</file>
+
+<file path=ppt/notesSlides/notesSlide69.xml><?xml version="1.0" encoding="utf-8"?>
+<p:notes xmlns:a="http://schemas.openxmlformats.org/drawingml/2006/main" xmlns:r="http://schemas.openxmlformats.org/officeDocument/2006/relationships" xmlns:p="http://schemas.openxmlformats.org/presentationml/2006/main">
+  <p:cSld>
+    <p:spTree>
+      <p:nvGrpSpPr>
+        <p:cNvPr id="1" name=""/>
+        <p:cNvGrpSpPr/>
+        <p:nvPr/>
+      </p:nvGrpSpPr>
+      <p:grpSpPr>
+        <a:xfrm>
+          <a:off x="0" y="0"/>
+          <a:ext cx="0" cy="0"/>
+          <a:chOff x="0" y="0"/>
+          <a:chExt cx="0" cy="0"/>
+        </a:xfrm>
+      </p:grpSpPr>
+      <p:sp>
+        <p:nvSpPr>
+          <p:cNvPr id="2" name="Slide Image Placeholder 1"/>
+          <p:cNvSpPr>
+            <a:spLocks noGrp="1" noRot="1" noChangeAspect="1"/>
+          </p:cNvSpPr>
+          <p:nvPr>
+            <p:ph type="sldImg"/>
+          </p:nvPr>
+        </p:nvSpPr>
+        <p:spPr/>
+      </p:sp>
+      <p:sp>
+        <p:nvSpPr>
+          <p:cNvPr id="3" name="Notes Placeholder 2"/>
+          <p:cNvSpPr>
+            <a:spLocks noGrp="1"/>
+          </p:cNvSpPr>
+          <p:nvPr>
+            <p:ph type="body" idx="1"/>
+          </p:nvPr>
+        </p:nvSpPr>
+        <p:spPr/>
+        <p:txBody>
+          <a:bodyPr/>
+          <a:lstStyle/>
+          <a:p>
+            <a:r>
+              <a:rPr lang="en-US" dirty="0"/>
+              <a:t>This slide is for me, the teacher: it gives the timing of the lesson and what to do if the projector is not available.</a:t>
+            </a:r>
+            <a:endParaRPr lang="en-US" dirty="0"/>
+          </a:p>
+        </p:txBody>
+      </p:sp>
+      <p:sp>
+        <p:nvSpPr>
+          <p:cNvPr id="4" name="Slide Number Placeholder 3"/>
+          <p:cNvSpPr>
+            <a:spLocks noGrp="1"/>
+          </p:cNvSpPr>
+          <p:nvPr>
+            <p:ph type="sldNum" sz="quarter" idx="10"/>
+          </p:nvPr>
+        </p:nvSpPr>
+        <p:spPr/>
+        <p:txBody>
+          <a:bodyPr/>
+          <a:lstStyle/>
+          <a:p>
+            <a:fld id="{F7021451-1387-4CA6-816F-3879F97B5CBC}" type="slidenum">
+              <a:rPr lang="en-US"/>
+              <a:t>69</a:t>
             </a:fld>
             <a:endParaRPr lang="en-US"/>
           </a:p>
@@ -6224,6 +6403,94 @@
             <a:fld id="{F7021451-1387-4CA6-816F-3879F97B5CBC}" type="slidenum">
               <a:rPr lang="en-US"/>
               <a:t>7</a:t>
+            </a:fld>
+            <a:endParaRPr lang="en-US"/>
+          </a:p>
+        </p:txBody>
+      </p:sp>
+    </p:spTree>
+    <p:extLst>
+      <p:ext uri="{BB962C8B-B14F-4D97-AF65-F5344CB8AC3E}">
+        <p14:creationId xmlns:p14="http://schemas.microsoft.com/office/powerpoint/2010/main" val="1024086991"/>
+      </p:ext>
+    </p:extLst>
+  </p:cSld>
+  <p:clrMapOvr>
+    <a:masterClrMapping/>
+  </p:clrMapOvr>
+</p:notes>
+</file>
+
+<file path=ppt/notesSlides/notesSlide70.xml><?xml version="1.0" encoding="utf-8"?>
+<p:notes xmlns:a="http://schemas.openxmlformats.org/drawingml/2006/main" xmlns:r="http://schemas.openxmlformats.org/officeDocument/2006/relationships" xmlns:p="http://schemas.openxmlformats.org/presentationml/2006/main">
+  <p:cSld>
+    <p:spTree>
+      <p:nvGrpSpPr>
+        <p:cNvPr id="1" name=""/>
+        <p:cNvGrpSpPr/>
+        <p:nvPr/>
+      </p:nvGrpSpPr>
+      <p:grpSpPr>
+        <a:xfrm>
+          <a:off x="0" y="0"/>
+          <a:ext cx="0" cy="0"/>
+          <a:chOff x="0" y="0"/>
+          <a:chExt cx="0" cy="0"/>
+        </a:xfrm>
+      </p:grpSpPr>
+      <p:sp>
+        <p:nvSpPr>
+          <p:cNvPr id="2" name="Slide Image Placeholder 1"/>
+          <p:cNvSpPr>
+            <a:spLocks noGrp="1" noRot="1" noChangeAspect="1"/>
+          </p:cNvSpPr>
+          <p:nvPr>
+            <p:ph type="sldImg"/>
+          </p:nvPr>
+        </p:nvSpPr>
+        <p:spPr/>
+      </p:sp>
+      <p:sp>
+        <p:nvSpPr>
+          <p:cNvPr id="3" name="Notes Placeholder 2"/>
+          <p:cNvSpPr>
+            <a:spLocks noGrp="1"/>
+          </p:cNvSpPr>
+          <p:nvPr>
+            <p:ph type="body" idx="1"/>
+          </p:nvPr>
+        </p:nvSpPr>
+        <p:spPr/>
+        <p:txBody>
+          <a:bodyPr/>
+          <a:lstStyle/>
+          <a:p>
+            <a:r>
+              <a:rPr lang="en-US" dirty="0"/>
+              <a:t>These are the references and picture credits used to prepare this lesson.</a:t>
+            </a:r>
+            <a:endParaRPr lang="en-US" dirty="0"/>
+          </a:p>
+        </p:txBody>
+      </p:sp>
+      <p:sp>
+        <p:nvSpPr>
+          <p:cNvPr id="4" name="Slide Number Placeholder 3"/>
+          <p:cNvSpPr>
+            <a:spLocks noGrp="1"/>
+          </p:cNvSpPr>
+          <p:nvPr>
+            <p:ph type="sldNum" sz="quarter" idx="10"/>
+          </p:nvPr>
+        </p:nvSpPr>
+        <p:spPr/>
+        <p:txBody>
+          <a:bodyPr/>
+          <a:lstStyle/>
+          <a:p>
+            <a:fld id="{F7021451-1387-4CA6-816F-3879F97B5CBC}" type="slidenum">
+              <a:rPr lang="en-US"/>
+              <a:t>70</a:t>
             </a:fld>
             <a:endParaRPr lang="en-US"/>
           </a:p>
@@ -16870,7 +17137,7 @@
                 <a:ea typeface="Times New Roman" pitchFamily="34" charset="-122"/>
                 <a:cs typeface="Times New Roman" pitchFamily="34" charset="-120"/>
               </a:rPr>
-              <a:t>Illustration: de facto and de jure</a:t>
+              <a:t>Illustration: de facto and de jure censuses</a:t>
             </a:r>
             <a:endParaRPr lang="en-US" sz="1600" dirty="0"/>
           </a:p>
@@ -17280,7 +17547,7 @@
         <p:spPr>
           <a:xfrm>
             <a:off x="0" y="658368"/>
-            <a:ext cx="3840480" cy="5833872"/>
+            <a:ext cx="2468880" cy="5833872"/>
           </a:xfrm>
           <a:prstGeom prst="rect">
             <a:avLst/>
@@ -17295,8 +17562,8 @@
         </p:nvSpPr>
         <p:spPr>
           <a:xfrm>
-            <a:off x="4069080" y="1005840"/>
-            <a:ext cx="7802575" cy="731520"/>
+            <a:off x="2697480" y="1005840"/>
+            <a:ext cx="9174175" cy="731520"/>
           </a:xfrm>
           <a:prstGeom prst="rect">
             <a:avLst/>
@@ -17336,8 +17603,8 @@
         </p:nvSpPr>
         <p:spPr>
           <a:xfrm>
-            <a:off x="4069080" y="1737360"/>
-            <a:ext cx="7802575" cy="457200"/>
+            <a:off x="2697480" y="1737360"/>
+            <a:ext cx="9174175" cy="457200"/>
           </a:xfrm>
           <a:prstGeom prst="rect">
             <a:avLst/>
@@ -17375,8 +17642,8 @@
         </p:nvSpPr>
         <p:spPr>
           <a:xfrm>
-            <a:off x="4069080" y="2240280"/>
-            <a:ext cx="7802575" cy="4206240"/>
+            <a:off x="2697480" y="2240280"/>
+            <a:ext cx="9174175" cy="4206240"/>
           </a:xfrm>
           <a:prstGeom prst="rect">
             <a:avLst/>
@@ -17403,7 +17670,7 @@
                 <a:ea typeface="Times New Roman" pitchFamily="34" charset="-122"/>
                 <a:cs typeface="Times New Roman" pitchFamily="34" charset="-120"/>
               </a:rPr>
-              <a:t>Problems: </a:t>
+              <a:t>Weakness of the de facto method: </a:t>
             </a:r>
             <a:pPr algn="l" indent="0" marL="0">
               <a:spcAft>
@@ -17420,7 +17687,7 @@
                 <a:ea typeface="Times New Roman" pitchFamily="34" charset="-122"/>
                 <a:cs typeface="Times New Roman" pitchFamily="34" charset="-120"/>
               </a:rPr>
-              <a:t>The de facto method can count travellers in the wrong place and inflate the population of towns. The de jure method has difficulties with homeless people and people who have two homes.</a:t>
+              <a:t>Travellers, traders and visitors are counted in the place where they spend the night, not where they live. As a result, the population of towns and markets can be overestimated.</a:t>
             </a:r>
             <a:endParaRPr lang="en-US" sz="4000" dirty="0"/>
           </a:p>
@@ -17538,129 +17805,9 @@
           </a:p>
         </p:txBody>
       </p:sp>
-      <p:sp>
-        <p:nvSpPr>
-          <p:cNvPr id="3" name="Text 1"/>
-          <p:cNvSpPr/>
-          <p:nvPr/>
-        </p:nvSpPr>
-        <p:spPr>
-          <a:xfrm>
-            <a:off x="365760" y="1005840"/>
-            <a:ext cx="11460175" cy="731520"/>
-          </a:xfrm>
-          <a:prstGeom prst="rect">
-            <a:avLst/>
-          </a:prstGeom>
-          <a:noFill/>
-          <a:ln/>
-        </p:spPr>
-        <p:txBody>
-          <a:bodyPr wrap="square" lIns="0" tIns="0" rIns="0" bIns="0" rtlCol="0" anchor="ctr">
-            <a:normAutofit/>
-          </a:bodyPr>
-          <a:lstStyle/>
-          <a:p>
-            <a:pPr algn="ctr" indent="0" marL="0">
-              <a:buNone/>
-            </a:pPr>
-            <a:r>
-              <a:rPr lang="en-US" sz="3600" b="1" dirty="0">
-                <a:solidFill>
-                  <a:srgbClr val="990011"/>
-                </a:solidFill>
-                <a:latin typeface="Times New Roman" pitchFamily="34" charset="0"/>
-                <a:ea typeface="Times New Roman" pitchFamily="34" charset="-122"/>
-                <a:cs typeface="Times New Roman" pitchFamily="34" charset="-120"/>
-              </a:rPr>
-              <a:t>2. Sample Surveys</a:t>
-            </a:r>
-            <a:endParaRPr lang="en-US" sz="3600" dirty="0"/>
-          </a:p>
-        </p:txBody>
-      </p:sp>
-      <p:sp>
-        <p:nvSpPr>
-          <p:cNvPr id="4" name="Text 2"/>
-          <p:cNvSpPr/>
-          <p:nvPr/>
-        </p:nvSpPr>
-        <p:spPr>
-          <a:xfrm>
-            <a:off x="365760" y="1783080"/>
-            <a:ext cx="6035040" cy="4617720"/>
-          </a:xfrm>
-          <a:prstGeom prst="rect">
-            <a:avLst/>
-          </a:prstGeom>
-          <a:noFill/>
-          <a:ln/>
-        </p:spPr>
-        <p:txBody>
-          <a:bodyPr wrap="square" lIns="0" tIns="0" rIns="0" bIns="0" rtlCol="0" anchor="t"/>
-          <a:lstStyle/>
-          <a:p>
-            <a:pPr algn="l" indent="0" marL="0">
-              <a:spcAft>
-                <a:spcPts val="800"/>
-              </a:spcAft>
-              <a:buNone/>
-            </a:pPr>
-            <a:r>
-              <a:rPr lang="en-US" sz="3000" i="1" dirty="0">
-                <a:solidFill>
-                  <a:srgbClr val="111111"/>
-                </a:solidFill>
-                <a:latin typeface="Times New Roman" pitchFamily="34" charset="0"/>
-                <a:ea typeface="Times New Roman" pitchFamily="34" charset="-122"/>
-                <a:cs typeface="Times New Roman" pitchFamily="34" charset="-120"/>
-              </a:rPr>
-              <a:t>Sample surveys have the following characteristics:</a:t>
-            </a:r>
-            <a:endParaRPr lang="en-US" sz="3000" dirty="0"/>
-          </a:p>
-          <a:p>
-            <a:pPr algn="l" indent="0" marL="0">
-              <a:spcAft>
-                <a:spcPts val="800"/>
-              </a:spcAft>
-              <a:buNone/>
-            </a:pPr>
-            <a:r>
-              <a:rPr lang="en-US" sz="3000" b="1" dirty="0">
-                <a:solidFill>
-                  <a:srgbClr val="111111"/>
-                </a:solidFill>
-                <a:latin typeface="Times New Roman" pitchFamily="34" charset="0"/>
-                <a:ea typeface="Times New Roman" pitchFamily="34" charset="-122"/>
-                <a:cs typeface="Times New Roman" pitchFamily="34" charset="-120"/>
-              </a:rPr>
-              <a:t>Principle: </a:t>
-            </a:r>
-            <a:pPr algn="l" indent="0" marL="0">
-              <a:spcAft>
-                <a:spcPts val="800"/>
-              </a:spcAft>
-              <a:buNone/>
-            </a:pPr>
-            <a:r>
-              <a:rPr lang="en-US" sz="3000" dirty="0">
-                <a:solidFill>
-                  <a:srgbClr val="111111"/>
-                </a:solidFill>
-                <a:latin typeface="Times New Roman" pitchFamily="34" charset="0"/>
-                <a:ea typeface="Times New Roman" pitchFamily="34" charset="-122"/>
-                <a:cs typeface="Times New Roman" pitchFamily="34" charset="-120"/>
-              </a:rPr>
-              <a:t>Data are collected from a representative part of the population, and the results are extended to the whole. For example, if 30 people in a 10 % sample of 300 are married, about 300 of the 3,000 villagers are married.</a:t>
-            </a:r>
-            <a:endParaRPr lang="en-US" sz="3000" dirty="0"/>
-          </a:p>
-        </p:txBody>
-      </p:sp>
       <p:pic>
         <p:nvPicPr>
-          <p:cNvPr id="5" name="Image 0" descr="/home/claude/f4/img/v2/pop2_sample.png">    </p:cNvPr>
+          <p:cNvPr id="3" name="Image 0" descr="/home/claude/f4/img/minesec_sheet.png">    </p:cNvPr>
           <p:cNvPicPr>
             <a:picLocks noChangeAspect="1"/>
           </p:cNvPicPr>
@@ -17674,8 +17821,8 @@
         </p:blipFill>
         <p:spPr>
           <a:xfrm>
-            <a:off x="6537960" y="2849678"/>
-            <a:ext cx="5470855" cy="2137053"/>
+            <a:off x="0" y="658368"/>
+            <a:ext cx="3840480" cy="5833872"/>
           </a:xfrm>
           <a:prstGeom prst="rect">
             <a:avLst/>
@@ -17684,14 +17831,14 @@
       </p:pic>
       <p:sp>
         <p:nvSpPr>
-          <p:cNvPr id="6" name="Text 3"/>
+          <p:cNvPr id="4" name="Text 1"/>
           <p:cNvSpPr/>
           <p:nvPr/>
         </p:nvSpPr>
         <p:spPr>
           <a:xfrm>
-            <a:off x="6537960" y="6089904"/>
-            <a:ext cx="5470855" cy="347472"/>
+            <a:off x="4069080" y="1005840"/>
+            <a:ext cx="7802575" cy="731520"/>
           </a:xfrm>
           <a:prstGeom prst="rect">
             <a:avLst/>
@@ -17700,24 +17847,124 @@
           <a:ln/>
         </p:spPr>
         <p:txBody>
-          <a:bodyPr wrap="square" lIns="0" tIns="0" rIns="0" bIns="0" rtlCol="0" anchor="ctr"/>
+          <a:bodyPr wrap="square" lIns="0" tIns="0" rIns="0" bIns="0" rtlCol="0" anchor="ctr">
+            <a:normAutofit/>
+          </a:bodyPr>
           <a:lstStyle/>
           <a:p>
             <a:pPr algn="ctr" indent="0" marL="0">
               <a:buNone/>
             </a:pPr>
             <a:r>
-              <a:rPr lang="en-US" sz="1600" i="1" dirty="0">
-                <a:solidFill>
-                  <a:srgbClr val="555555"/>
+              <a:rPr lang="en-US" sz="3600" b="1" dirty="0">
+                <a:solidFill>
+                  <a:srgbClr val="990011"/>
                 </a:solidFill>
                 <a:latin typeface="Times New Roman" pitchFamily="34" charset="0"/>
                 <a:ea typeface="Times New Roman" pitchFamily="34" charset="-122"/>
                 <a:cs typeface="Times New Roman" pitchFamily="34" charset="-120"/>
               </a:rPr>
-              <a:t>Illustration: a sample survey</a:t>
-            </a:r>
-            <a:endParaRPr lang="en-US" sz="1600" dirty="0"/>
+              <a:t>1. Censuses</a:t>
+            </a:r>
+            <a:endParaRPr lang="en-US" sz="3600" dirty="0"/>
+          </a:p>
+        </p:txBody>
+      </p:sp>
+      <p:sp>
+        <p:nvSpPr>
+          <p:cNvPr id="5" name="Text 2"/>
+          <p:cNvSpPr/>
+          <p:nvPr/>
+        </p:nvSpPr>
+        <p:spPr>
+          <a:xfrm>
+            <a:off x="4069080" y="1737360"/>
+            <a:ext cx="7802575" cy="457200"/>
+          </a:xfrm>
+          <a:prstGeom prst="rect">
+            <a:avLst/>
+          </a:prstGeom>
+          <a:noFill/>
+          <a:ln/>
+        </p:spPr>
+        <p:txBody>
+          <a:bodyPr wrap="square" lIns="0" tIns="0" rIns="0" bIns="0" rtlCol="0" anchor="ctr"/>
+          <a:lstStyle/>
+          <a:p>
+            <a:pPr algn="l" indent="0" marL="0">
+              <a:buNone/>
+            </a:pPr>
+            <a:r>
+              <a:rPr lang="en-US" sz="3200" b="1" dirty="0">
+                <a:solidFill>
+                  <a:srgbClr val="990011"/>
+                </a:solidFill>
+                <a:latin typeface="Times New Roman" pitchFamily="34" charset="0"/>
+                <a:ea typeface="Times New Roman" pitchFamily="34" charset="-122"/>
+                <a:cs typeface="Times New Roman" pitchFamily="34" charset="-120"/>
+              </a:rPr>
+              <a:t>B) De Facto and De Jure Censuses</a:t>
+            </a:r>
+            <a:endParaRPr lang="en-US" sz="3200" dirty="0"/>
+          </a:p>
+        </p:txBody>
+      </p:sp>
+      <p:sp>
+        <p:nvSpPr>
+          <p:cNvPr id="6" name="Text 3"/>
+          <p:cNvSpPr/>
+          <p:nvPr/>
+        </p:nvSpPr>
+        <p:spPr>
+          <a:xfrm>
+            <a:off x="4069080" y="2240280"/>
+            <a:ext cx="7802575" cy="4206240"/>
+          </a:xfrm>
+          <a:prstGeom prst="rect">
+            <a:avLst/>
+          </a:prstGeom>
+          <a:noFill/>
+          <a:ln/>
+        </p:spPr>
+        <p:txBody>
+          <a:bodyPr wrap="square" lIns="0" tIns="0" rIns="0" bIns="0" rtlCol="0" anchor="t"/>
+          <a:lstStyle/>
+          <a:p>
+            <a:pPr algn="l" indent="0" marL="0">
+              <a:spcAft>
+                <a:spcPts val="800"/>
+              </a:spcAft>
+              <a:buNone/>
+            </a:pPr>
+            <a:r>
+              <a:rPr lang="en-US" sz="4000" b="1" dirty="0">
+                <a:solidFill>
+                  <a:srgbClr val="111111"/>
+                </a:solidFill>
+                <a:latin typeface="Times New Roman" pitchFamily="34" charset="0"/>
+                <a:ea typeface="Times New Roman" pitchFamily="34" charset="-122"/>
+                <a:cs typeface="Times New Roman" pitchFamily="34" charset="-120"/>
+              </a:rPr>
+              <a:t>Weakness of the de jure method: </a:t>
+            </a:r>
+            <a:pPr algn="l" indent="0" marL="0">
+              <a:spcAft>
+                <a:spcPts val="800"/>
+              </a:spcAft>
+              <a:buNone/>
+            </a:pPr>
+            <a:r>
+              <a:rPr lang="en-US" sz="4000" dirty="0">
+                <a:solidFill>
+                  <a:srgbClr val="111111"/>
+                </a:solidFill>
+                <a:latin typeface="Times New Roman" pitchFamily="34" charset="0"/>
+                <a:ea typeface="Times New Roman" pitchFamily="34" charset="-122"/>
+                <a:cs typeface="Times New Roman" pitchFamily="34" charset="-120"/>
+              </a:rPr>
+              <a:t>It is difficult to decide where homeless people and people with two homes usually live. Some of them are therefore counted twice or not at all.</a:t>
+            </a:r>
+            <a:endParaRPr lang="en-US" sz="4000" dirty="0"/>
           </a:p>
         </p:txBody>
       </p:sp>
@@ -17833,9 +18080,170 @@
           </a:p>
         </p:txBody>
       </p:sp>
+      <p:sp>
+        <p:nvSpPr>
+          <p:cNvPr id="3" name="Text 1"/>
+          <p:cNvSpPr/>
+          <p:nvPr/>
+        </p:nvSpPr>
+        <p:spPr>
+          <a:xfrm>
+            <a:off x="365760" y="1005840"/>
+            <a:ext cx="11460175" cy="731520"/>
+          </a:xfrm>
+          <a:prstGeom prst="rect">
+            <a:avLst/>
+          </a:prstGeom>
+          <a:noFill/>
+          <a:ln/>
+        </p:spPr>
+        <p:txBody>
+          <a:bodyPr wrap="square" lIns="0" tIns="0" rIns="0" bIns="0" rtlCol="0" anchor="ctr">
+            <a:normAutofit/>
+          </a:bodyPr>
+          <a:lstStyle/>
+          <a:p>
+            <a:pPr algn="ctr" indent="0" marL="0">
+              <a:buNone/>
+            </a:pPr>
+            <a:r>
+              <a:rPr lang="en-US" sz="3600" b="1" dirty="0">
+                <a:solidFill>
+                  <a:srgbClr val="990011"/>
+                </a:solidFill>
+                <a:latin typeface="Times New Roman" pitchFamily="34" charset="0"/>
+                <a:ea typeface="Times New Roman" pitchFamily="34" charset="-122"/>
+                <a:cs typeface="Times New Roman" pitchFamily="34" charset="-120"/>
+              </a:rPr>
+              <a:t>2. Sample Surveys</a:t>
+            </a:r>
+            <a:endParaRPr lang="en-US" sz="3600" dirty="0"/>
+          </a:p>
+        </p:txBody>
+      </p:sp>
+      <p:sp>
+        <p:nvSpPr>
+          <p:cNvPr id="4" name="Text 2"/>
+          <p:cNvSpPr/>
+          <p:nvPr/>
+        </p:nvSpPr>
+        <p:spPr>
+          <a:xfrm>
+            <a:off x="365760" y="1737360"/>
+            <a:ext cx="6035040" cy="457200"/>
+          </a:xfrm>
+          <a:prstGeom prst="rect">
+            <a:avLst/>
+          </a:prstGeom>
+          <a:noFill/>
+          <a:ln/>
+        </p:spPr>
+        <p:txBody>
+          <a:bodyPr wrap="square" lIns="0" tIns="0" rIns="0" bIns="0" rtlCol="0" anchor="ctr">
+            <a:normAutofit/>
+          </a:bodyPr>
+          <a:lstStyle/>
+          <a:p>
+            <a:pPr algn="l" indent="0" marL="0">
+              <a:buNone/>
+            </a:pPr>
+            <a:r>
+              <a:rPr lang="en-US" sz="3000" b="1" dirty="0">
+                <a:solidFill>
+                  <a:srgbClr val="990011"/>
+                </a:solidFill>
+                <a:latin typeface="Times New Roman" pitchFamily="34" charset="0"/>
+                <a:ea typeface="Times New Roman" pitchFamily="34" charset="-122"/>
+                <a:cs typeface="Times New Roman" pitchFamily="34" charset="-120"/>
+              </a:rPr>
+              <a:t>A) Principle and Examples</a:t>
+            </a:r>
+            <a:endParaRPr lang="en-US" sz="3000" dirty="0"/>
+          </a:p>
+        </p:txBody>
+      </p:sp>
+      <p:sp>
+        <p:nvSpPr>
+          <p:cNvPr id="5" name="Text 3"/>
+          <p:cNvSpPr/>
+          <p:nvPr/>
+        </p:nvSpPr>
+        <p:spPr>
+          <a:xfrm>
+            <a:off x="365760" y="2240280"/>
+            <a:ext cx="6035040" cy="4160520"/>
+          </a:xfrm>
+          <a:prstGeom prst="rect">
+            <a:avLst/>
+          </a:prstGeom>
+          <a:noFill/>
+          <a:ln/>
+        </p:spPr>
+        <p:txBody>
+          <a:bodyPr wrap="square" lIns="0" tIns="0" rIns="0" bIns="0" rtlCol="0" anchor="t"/>
+          <a:lstStyle/>
+          <a:p>
+            <a:pPr algn="l" indent="0" marL="0">
+              <a:spcAft>
+                <a:spcPts val="800"/>
+              </a:spcAft>
+              <a:buNone/>
+            </a:pPr>
+            <a:r>
+              <a:rPr lang="en-US" sz="2800" i="1" dirty="0">
+                <a:solidFill>
+                  <a:srgbClr val="111111"/>
+                </a:solidFill>
+                <a:latin typeface="Times New Roman" pitchFamily="34" charset="0"/>
+                <a:ea typeface="Times New Roman" pitchFamily="34" charset="-122"/>
+                <a:cs typeface="Times New Roman" pitchFamily="34" charset="-120"/>
+              </a:rPr>
+              <a:t>Sample surveys are carried out as follows:</a:t>
+            </a:r>
+            <a:endParaRPr lang="en-US" sz="2800" dirty="0"/>
+          </a:p>
+          <a:p>
+            <a:pPr algn="l" indent="0" marL="0">
+              <a:spcAft>
+                <a:spcPts val="800"/>
+              </a:spcAft>
+              <a:buNone/>
+            </a:pPr>
+            <a:r>
+              <a:rPr lang="en-US" sz="2800" b="1" dirty="0">
+                <a:solidFill>
+                  <a:srgbClr val="111111"/>
+                </a:solidFill>
+                <a:latin typeface="Times New Roman" pitchFamily="34" charset="0"/>
+                <a:ea typeface="Times New Roman" pitchFamily="34" charset="-122"/>
+                <a:cs typeface="Times New Roman" pitchFamily="34" charset="-120"/>
+              </a:rPr>
+              <a:t>Principle: </a:t>
+            </a:r>
+            <a:pPr algn="l" indent="0" marL="0">
+              <a:spcAft>
+                <a:spcPts val="800"/>
+              </a:spcAft>
+              <a:buNone/>
+            </a:pPr>
+            <a:r>
+              <a:rPr lang="en-US" sz="2800" dirty="0">
+                <a:solidFill>
+                  <a:srgbClr val="111111"/>
+                </a:solidFill>
+                <a:latin typeface="Times New Roman" pitchFamily="34" charset="0"/>
+                <a:ea typeface="Times New Roman" pitchFamily="34" charset="-122"/>
+                <a:cs typeface="Times New Roman" pitchFamily="34" charset="-120"/>
+              </a:rPr>
+              <a:t>Data are collected from a representative part of the population, and the results are extended to the whole. For example, if 30 people in a 10 % sample of 300 are married, about 300 of the 3,000 villagers are married.</a:t>
+            </a:r>
+            <a:endParaRPr lang="en-US" sz="2800" dirty="0"/>
+          </a:p>
+        </p:txBody>
+      </p:sp>
       <p:pic>
         <p:nvPicPr>
-          <p:cNvPr id="3" name="Image 0" descr="/home/claude/f4/img/minesec_sheet.png">    </p:cNvPr>
+          <p:cNvPr id="6" name="Image 0" descr="/home/claude/f4/img/v2/pop2_sample.png">    </p:cNvPr>
           <p:cNvPicPr>
             <a:picLocks noChangeAspect="1"/>
           </p:cNvPicPr>
@@ -17849,8 +18257,8 @@
         </p:blipFill>
         <p:spPr>
           <a:xfrm>
-            <a:off x="0" y="658368"/>
-            <a:ext cx="5120640" cy="5833872"/>
+            <a:off x="6537960" y="2849678"/>
+            <a:ext cx="5470855" cy="2137053"/>
           </a:xfrm>
           <a:prstGeom prst="rect">
             <a:avLst/>
@@ -17859,14 +18267,14 @@
       </p:pic>
       <p:sp>
         <p:nvSpPr>
-          <p:cNvPr id="4" name="Text 1"/>
+          <p:cNvPr id="7" name="Text 4"/>
           <p:cNvSpPr/>
           <p:nvPr/>
         </p:nvSpPr>
         <p:spPr>
           <a:xfrm>
-            <a:off x="5349240" y="1005840"/>
-            <a:ext cx="6522415" cy="731520"/>
+            <a:off x="6537960" y="6089904"/>
+            <a:ext cx="5470855" cy="347472"/>
           </a:xfrm>
           <a:prstGeom prst="rect">
             <a:avLst/>
@@ -17875,85 +18283,24 @@
           <a:ln/>
         </p:spPr>
         <p:txBody>
-          <a:bodyPr wrap="square" lIns="0" tIns="0" rIns="0" bIns="0" rtlCol="0" anchor="ctr">
-            <a:normAutofit/>
-          </a:bodyPr>
+          <a:bodyPr wrap="square" lIns="0" tIns="0" rIns="0" bIns="0" rtlCol="0" anchor="ctr"/>
           <a:lstStyle/>
           <a:p>
             <a:pPr algn="ctr" indent="0" marL="0">
               <a:buNone/>
             </a:pPr>
             <a:r>
-              <a:rPr lang="en-US" sz="3600" b="1" dirty="0">
-                <a:solidFill>
-                  <a:srgbClr val="990011"/>
+              <a:rPr lang="en-US" sz="1600" i="1" dirty="0">
+                <a:solidFill>
+                  <a:srgbClr val="555555"/>
                 </a:solidFill>
                 <a:latin typeface="Times New Roman" pitchFamily="34" charset="0"/>
                 <a:ea typeface="Times New Roman" pitchFamily="34" charset="-122"/>
                 <a:cs typeface="Times New Roman" pitchFamily="34" charset="-120"/>
               </a:rPr>
-              <a:t>2. Sample Surveys</a:t>
-            </a:r>
-            <a:endParaRPr lang="en-US" sz="3600" dirty="0"/>
-          </a:p>
-        </p:txBody>
-      </p:sp>
-      <p:sp>
-        <p:nvSpPr>
-          <p:cNvPr id="5" name="Text 2"/>
-          <p:cNvSpPr/>
-          <p:nvPr/>
-        </p:nvSpPr>
-        <p:spPr>
-          <a:xfrm>
-            <a:off x="5349240" y="1783080"/>
-            <a:ext cx="6522415" cy="4663440"/>
-          </a:xfrm>
-          <a:prstGeom prst="rect">
-            <a:avLst/>
-          </a:prstGeom>
-          <a:noFill/>
-          <a:ln/>
-        </p:spPr>
-        <p:txBody>
-          <a:bodyPr wrap="square" lIns="0" tIns="0" rIns="0" bIns="0" rtlCol="0" anchor="t"/>
-          <a:lstStyle/>
-          <a:p>
-            <a:pPr algn="l" indent="0" marL="0">
-              <a:spcAft>
-                <a:spcPts val="800"/>
-              </a:spcAft>
-              <a:buNone/>
-            </a:pPr>
-            <a:r>
-              <a:rPr lang="en-US" sz="4000" b="1" dirty="0">
-                <a:solidFill>
-                  <a:srgbClr val="111111"/>
-                </a:solidFill>
-                <a:latin typeface="Times New Roman" pitchFamily="34" charset="0"/>
-                <a:ea typeface="Times New Roman" pitchFamily="34" charset="-122"/>
-                <a:cs typeface="Times New Roman" pitchFamily="34" charset="-120"/>
-              </a:rPr>
-              <a:t>Sampling methods: </a:t>
-            </a:r>
-            <a:pPr algn="l" indent="0" marL="0">
-              <a:spcAft>
-                <a:spcPts val="800"/>
-              </a:spcAft>
-              <a:buNone/>
-            </a:pPr>
-            <a:r>
-              <a:rPr lang="en-US" sz="4000" dirty="0">
-                <a:solidFill>
-                  <a:srgbClr val="111111"/>
-                </a:solidFill>
-                <a:latin typeface="Times New Roman" pitchFamily="34" charset="0"/>
-                <a:ea typeface="Times New Roman" pitchFamily="34" charset="-122"/>
-                <a:cs typeface="Times New Roman" pitchFamily="34" charset="-120"/>
-              </a:rPr>
-              <a:t>Random and systematic sampling are used so that every person has a fair chance of being chosen. This makes the sample representative of the whole population.</a:t>
-            </a:r>
-            <a:endParaRPr lang="en-US" sz="4000" dirty="0"/>
+              <a:t>Illustration: a sample survey</a:t>
+            </a:r>
+            <a:endParaRPr lang="en-US" sz="1600" dirty="0"/>
           </a:p>
         </p:txBody>
       </p:sp>
@@ -18086,7 +18433,7 @@
         <p:spPr>
           <a:xfrm>
             <a:off x="0" y="658368"/>
-            <a:ext cx="2468880" cy="5833872"/>
+            <a:ext cx="3840480" cy="5833872"/>
           </a:xfrm>
           <a:prstGeom prst="rect">
             <a:avLst/>
@@ -18101,8 +18448,8 @@
         </p:nvSpPr>
         <p:spPr>
           <a:xfrm>
-            <a:off x="2697480" y="1005840"/>
-            <a:ext cx="9174175" cy="731520"/>
+            <a:off x="4069080" y="1005840"/>
+            <a:ext cx="7802575" cy="731520"/>
           </a:xfrm>
           <a:prstGeom prst="rect">
             <a:avLst/>
@@ -18142,8 +18489,47 @@
         </p:nvSpPr>
         <p:spPr>
           <a:xfrm>
-            <a:off x="2697480" y="1783080"/>
-            <a:ext cx="9174175" cy="4663440"/>
+            <a:off x="4069080" y="1737360"/>
+            <a:ext cx="7802575" cy="457200"/>
+          </a:xfrm>
+          <a:prstGeom prst="rect">
+            <a:avLst/>
+          </a:prstGeom>
+          <a:noFill/>
+          <a:ln/>
+        </p:spPr>
+        <p:txBody>
+          <a:bodyPr wrap="square" lIns="0" tIns="0" rIns="0" bIns="0" rtlCol="0" anchor="ctr"/>
+          <a:lstStyle/>
+          <a:p>
+            <a:pPr algn="l" indent="0" marL="0">
+              <a:buNone/>
+            </a:pPr>
+            <a:r>
+              <a:rPr lang="en-US" sz="3200" b="1" dirty="0">
+                <a:solidFill>
+                  <a:srgbClr val="990011"/>
+                </a:solidFill>
+                <a:latin typeface="Times New Roman" pitchFamily="34" charset="0"/>
+                <a:ea typeface="Times New Roman" pitchFamily="34" charset="-122"/>
+                <a:cs typeface="Times New Roman" pitchFamily="34" charset="-120"/>
+              </a:rPr>
+              <a:t>A) Principle and Examples</a:t>
+            </a:r>
+            <a:endParaRPr lang="en-US" sz="3200" dirty="0"/>
+          </a:p>
+        </p:txBody>
+      </p:sp>
+      <p:sp>
+        <p:nvSpPr>
+          <p:cNvPr id="6" name="Text 3"/>
+          <p:cNvSpPr/>
+          <p:nvPr/>
+        </p:nvSpPr>
+        <p:spPr>
+          <a:xfrm>
+            <a:off x="4069080" y="2240280"/>
+            <a:ext cx="7802575" cy="4206240"/>
           </a:xfrm>
           <a:prstGeom prst="rect">
             <a:avLst/>
@@ -18170,7 +18556,7 @@
                 <a:ea typeface="Times New Roman" pitchFamily="34" charset="-122"/>
                 <a:cs typeface="Times New Roman" pitchFamily="34" charset="-120"/>
               </a:rPr>
-              <a:t>Examples: </a:t>
+              <a:t>Sampling methods: </a:t>
             </a:r>
             <a:pPr algn="l" indent="0" marL="0">
               <a:spcAft>
@@ -18187,7 +18573,7 @@
                 <a:ea typeface="Times New Roman" pitchFamily="34" charset="-122"/>
                 <a:cs typeface="Times New Roman" pitchFamily="34" charset="-120"/>
               </a:rPr>
-              <a:t>In Cameroon, the Demographic and Health Surveys (EDS) and the household surveys of the INS (Institut National de la Statistique) are sample surveys. They give data on fertility, health and poverty between censuses.</a:t>
+              <a:t>Random and systematic sampling are used so that every person has a fair chance of being chosen. This makes the sample representative of the whole population.</a:t>
             </a:r>
             <a:endParaRPr lang="en-US" sz="4000" dirty="0"/>
           </a:p>
@@ -18322,7 +18708,7 @@
         <p:spPr>
           <a:xfrm>
             <a:off x="0" y="658368"/>
-            <a:ext cx="3840480" cy="5833872"/>
+            <a:ext cx="2468880" cy="5833872"/>
           </a:xfrm>
           <a:prstGeom prst="rect">
             <a:avLst/>
@@ -18337,8 +18723,8 @@
         </p:nvSpPr>
         <p:spPr>
           <a:xfrm>
-            <a:off x="4069080" y="1005840"/>
-            <a:ext cx="7802575" cy="731520"/>
+            <a:off x="2697480" y="1005840"/>
+            <a:ext cx="9174175" cy="731520"/>
           </a:xfrm>
           <a:prstGeom prst="rect">
             <a:avLst/>
@@ -18378,8 +18764,47 @@
         </p:nvSpPr>
         <p:spPr>
           <a:xfrm>
-            <a:off x="4069080" y="1783080"/>
-            <a:ext cx="7802575" cy="4663440"/>
+            <a:off x="2697480" y="1737360"/>
+            <a:ext cx="9174175" cy="457200"/>
+          </a:xfrm>
+          <a:prstGeom prst="rect">
+            <a:avLst/>
+          </a:prstGeom>
+          <a:noFill/>
+          <a:ln/>
+        </p:spPr>
+        <p:txBody>
+          <a:bodyPr wrap="square" lIns="0" tIns="0" rIns="0" bIns="0" rtlCol="0" anchor="ctr"/>
+          <a:lstStyle/>
+          <a:p>
+            <a:pPr algn="l" indent="0" marL="0">
+              <a:buNone/>
+            </a:pPr>
+            <a:r>
+              <a:rPr lang="en-US" sz="3200" b="1" dirty="0">
+                <a:solidFill>
+                  <a:srgbClr val="990011"/>
+                </a:solidFill>
+                <a:latin typeface="Times New Roman" pitchFamily="34" charset="0"/>
+                <a:ea typeface="Times New Roman" pitchFamily="34" charset="-122"/>
+                <a:cs typeface="Times New Roman" pitchFamily="34" charset="-120"/>
+              </a:rPr>
+              <a:t>A) Principle and Examples</a:t>
+            </a:r>
+            <a:endParaRPr lang="en-US" sz="3200" dirty="0"/>
+          </a:p>
+        </p:txBody>
+      </p:sp>
+      <p:sp>
+        <p:nvSpPr>
+          <p:cNvPr id="6" name="Text 3"/>
+          <p:cNvSpPr/>
+          <p:nvPr/>
+        </p:nvSpPr>
+        <p:spPr>
+          <a:xfrm>
+            <a:off x="2697480" y="2240280"/>
+            <a:ext cx="9174175" cy="4206240"/>
           </a:xfrm>
           <a:prstGeom prst="rect">
             <a:avLst/>
@@ -18406,7 +18831,7 @@
                 <a:ea typeface="Times New Roman" pitchFamily="34" charset="-122"/>
                 <a:cs typeface="Times New Roman" pitchFamily="34" charset="-120"/>
               </a:rPr>
-              <a:t>Strengths and weaknesses: </a:t>
+              <a:t>Examples in Cameroon: </a:t>
             </a:r>
             <a:pPr algn="l" indent="0" marL="0">
               <a:spcAft>
@@ -18423,7 +18848,7 @@
                 <a:ea typeface="Times New Roman" pitchFamily="34" charset="-122"/>
                 <a:cs typeface="Times New Roman" pitchFamily="34" charset="-120"/>
               </a:rPr>
-              <a:t>Sample surveys are cheaper and faster than a census and can ask more detailed questions. However, a badly chosen sample gives wrong results for the whole population.</a:t>
+              <a:t>The Demographic and Health Surveys (EDS) and the household surveys of the National Institute of Statistics are sample surveys. They give data on fertility, health and poverty between two censuses.</a:t>
             </a:r>
             <a:endParaRPr lang="en-US" sz="4000" dirty="0"/>
           </a:p>
@@ -18541,129 +18966,9 @@
           </a:p>
         </p:txBody>
       </p:sp>
-      <p:sp>
-        <p:nvSpPr>
-          <p:cNvPr id="3" name="Text 1"/>
-          <p:cNvSpPr/>
-          <p:nvPr/>
-        </p:nvSpPr>
-        <p:spPr>
-          <a:xfrm>
-            <a:off x="365760" y="1005840"/>
-            <a:ext cx="11460175" cy="731520"/>
-          </a:xfrm>
-          <a:prstGeom prst="rect">
-            <a:avLst/>
-          </a:prstGeom>
-          <a:noFill/>
-          <a:ln/>
-        </p:spPr>
-        <p:txBody>
-          <a:bodyPr wrap="square" lIns="0" tIns="0" rIns="0" bIns="0" rtlCol="0" anchor="ctr">
-            <a:normAutofit/>
-          </a:bodyPr>
-          <a:lstStyle/>
-          <a:p>
-            <a:pPr algn="ctr" indent="0" marL="0">
-              <a:buNone/>
-            </a:pPr>
-            <a:r>
-              <a:rPr lang="en-US" sz="3600" b="1" dirty="0">
-                <a:solidFill>
-                  <a:srgbClr val="990011"/>
-                </a:solidFill>
-                <a:latin typeface="Times New Roman" pitchFamily="34" charset="0"/>
-                <a:ea typeface="Times New Roman" pitchFamily="34" charset="-122"/>
-                <a:cs typeface="Times New Roman" pitchFamily="34" charset="-120"/>
-              </a:rPr>
-              <a:t>3. Vital Registration and Migration Records</a:t>
-            </a:r>
-            <a:endParaRPr lang="en-US" sz="3600" dirty="0"/>
-          </a:p>
-        </p:txBody>
-      </p:sp>
-      <p:sp>
-        <p:nvSpPr>
-          <p:cNvPr id="4" name="Text 2"/>
-          <p:cNvSpPr/>
-          <p:nvPr/>
-        </p:nvSpPr>
-        <p:spPr>
-          <a:xfrm>
-            <a:off x="365760" y="1783080"/>
-            <a:ext cx="6035040" cy="4617720"/>
-          </a:xfrm>
-          <a:prstGeom prst="rect">
-            <a:avLst/>
-          </a:prstGeom>
-          <a:noFill/>
-          <a:ln/>
-        </p:spPr>
-        <p:txBody>
-          <a:bodyPr wrap="square" lIns="0" tIns="0" rIns="0" bIns="0" rtlCol="0" anchor="t"/>
-          <a:lstStyle/>
-          <a:p>
-            <a:pPr algn="l" indent="0" marL="0">
-              <a:spcAft>
-                <a:spcPts val="800"/>
-              </a:spcAft>
-              <a:buNone/>
-            </a:pPr>
-            <a:r>
-              <a:rPr lang="en-US" sz="2800" i="1" dirty="0">
-                <a:solidFill>
-                  <a:srgbClr val="111111"/>
-                </a:solidFill>
-                <a:latin typeface="Times New Roman" pitchFamily="34" charset="0"/>
-                <a:ea typeface="Times New Roman" pitchFamily="34" charset="-122"/>
-                <a:cs typeface="Times New Roman" pitchFamily="34" charset="-120"/>
-              </a:rPr>
-              <a:t>Population changes are recorded continuously by the following sources:</a:t>
-            </a:r>
-            <a:endParaRPr lang="en-US" sz="2800" dirty="0"/>
-          </a:p>
-          <a:p>
-            <a:pPr algn="l" indent="0" marL="0">
-              <a:spcAft>
-                <a:spcPts val="800"/>
-              </a:spcAft>
-              <a:buNone/>
-            </a:pPr>
-            <a:r>
-              <a:rPr lang="en-US" sz="2800" b="1" dirty="0">
-                <a:solidFill>
-                  <a:srgbClr val="111111"/>
-                </a:solidFill>
-                <a:latin typeface="Times New Roman" pitchFamily="34" charset="0"/>
-                <a:ea typeface="Times New Roman" pitchFamily="34" charset="-122"/>
-                <a:cs typeface="Times New Roman" pitchFamily="34" charset="-120"/>
-              </a:rPr>
-              <a:t>Vital registration: </a:t>
-            </a:r>
-            <a:pPr algn="l" indent="0" marL="0">
-              <a:spcAft>
-                <a:spcPts val="800"/>
-              </a:spcAft>
-              <a:buNone/>
-            </a:pPr>
-            <a:r>
-              <a:rPr lang="en-US" sz="2800" dirty="0">
-                <a:solidFill>
-                  <a:srgbClr val="111111"/>
-                </a:solidFill>
-                <a:latin typeface="Times New Roman" pitchFamily="34" charset="0"/>
-                <a:ea typeface="Times New Roman" pitchFamily="34" charset="-122"/>
-                <a:cs typeface="Times New Roman" pitchFamily="34" charset="-120"/>
-              </a:rPr>
-              <a:t>The civil status office records births, deaths, marriages, divorces and adoptions as they happen, like a film of the population. It shows how the population changes between censuses.</a:t>
-            </a:r>
-            <a:endParaRPr lang="en-US" sz="2800" dirty="0"/>
-          </a:p>
-        </p:txBody>
-      </p:sp>
       <p:pic>
         <p:nvPicPr>
-          <p:cNvPr id="5" name="Image 0" descr="/home/claude/f4/img/v2/usa_newborn.jpg">    </p:cNvPr>
+          <p:cNvPr id="3" name="Image 0" descr="/home/claude/f4/img/minesec_sheet.png">    </p:cNvPr>
           <p:cNvPicPr>
             <a:picLocks noChangeAspect="1"/>
           </p:cNvPicPr>
@@ -18677,8 +18982,8 @@
         </p:blipFill>
         <p:spPr>
           <a:xfrm>
-            <a:off x="6537960" y="2400897"/>
-            <a:ext cx="5470855" cy="3034615"/>
+            <a:off x="0" y="658368"/>
+            <a:ext cx="1463040" cy="5833872"/>
           </a:xfrm>
           <a:prstGeom prst="rect">
             <a:avLst/>
@@ -18687,14 +18992,14 @@
       </p:pic>
       <p:sp>
         <p:nvSpPr>
-          <p:cNvPr id="6" name="Text 3"/>
+          <p:cNvPr id="4" name="Text 1"/>
           <p:cNvSpPr/>
           <p:nvPr/>
         </p:nvSpPr>
         <p:spPr>
           <a:xfrm>
-            <a:off x="6537960" y="6089904"/>
-            <a:ext cx="5470855" cy="347472"/>
+            <a:off x="1691640" y="1005840"/>
+            <a:ext cx="10180015" cy="731520"/>
           </a:xfrm>
           <a:prstGeom prst="rect">
             <a:avLst/>
@@ -18703,24 +19008,144 @@
           <a:ln/>
         </p:spPr>
         <p:txBody>
-          <a:bodyPr wrap="square" lIns="0" tIns="0" rIns="0" bIns="0" rtlCol="0" anchor="ctr"/>
+          <a:bodyPr wrap="square" lIns="0" tIns="0" rIns="0" bIns="0" rtlCol="0" anchor="ctr">
+            <a:normAutofit/>
+          </a:bodyPr>
           <a:lstStyle/>
           <a:p>
             <a:pPr algn="ctr" indent="0" marL="0">
               <a:buNone/>
             </a:pPr>
             <a:r>
-              <a:rPr lang="en-US" sz="1600" i="1" dirty="0">
-                <a:solidFill>
-                  <a:srgbClr val="555555"/>
+              <a:rPr lang="en-US" sz="3600" b="1" dirty="0">
+                <a:solidFill>
+                  <a:srgbClr val="990011"/>
                 </a:solidFill>
                 <a:latin typeface="Times New Roman" pitchFamily="34" charset="0"/>
                 <a:ea typeface="Times New Roman" pitchFamily="34" charset="-122"/>
                 <a:cs typeface="Times New Roman" pitchFamily="34" charset="-120"/>
               </a:rPr>
-              <a:t>Illustration: a newborn baby</a:t>
-            </a:r>
-            <a:endParaRPr lang="en-US" sz="1600" dirty="0"/>
+              <a:t>2. Sample Surveys</a:t>
+            </a:r>
+            <a:endParaRPr lang="en-US" sz="3600" dirty="0"/>
+          </a:p>
+        </p:txBody>
+      </p:sp>
+      <p:sp>
+        <p:nvSpPr>
+          <p:cNvPr id="5" name="Text 2"/>
+          <p:cNvSpPr/>
+          <p:nvPr/>
+        </p:nvSpPr>
+        <p:spPr>
+          <a:xfrm>
+            <a:off x="1691640" y="1737360"/>
+            <a:ext cx="10180015" cy="457200"/>
+          </a:xfrm>
+          <a:prstGeom prst="rect">
+            <a:avLst/>
+          </a:prstGeom>
+          <a:noFill/>
+          <a:ln/>
+        </p:spPr>
+        <p:txBody>
+          <a:bodyPr wrap="square" lIns="0" tIns="0" rIns="0" bIns="0" rtlCol="0" anchor="ctr"/>
+          <a:lstStyle/>
+          <a:p>
+            <a:pPr algn="l" indent="0" marL="0">
+              <a:buNone/>
+            </a:pPr>
+            <a:r>
+              <a:rPr lang="en-US" sz="3200" b="1" dirty="0">
+                <a:solidFill>
+                  <a:srgbClr val="990011"/>
+                </a:solidFill>
+                <a:latin typeface="Times New Roman" pitchFamily="34" charset="0"/>
+                <a:ea typeface="Times New Roman" pitchFamily="34" charset="-122"/>
+                <a:cs typeface="Times New Roman" pitchFamily="34" charset="-120"/>
+              </a:rPr>
+              <a:t>B) Strengths and Weaknesses</a:t>
+            </a:r>
+            <a:endParaRPr lang="en-US" sz="3200" dirty="0"/>
+          </a:p>
+        </p:txBody>
+      </p:sp>
+      <p:sp>
+        <p:nvSpPr>
+          <p:cNvPr id="6" name="Text 3"/>
+          <p:cNvSpPr/>
+          <p:nvPr/>
+        </p:nvSpPr>
+        <p:spPr>
+          <a:xfrm>
+            <a:off x="1691640" y="2240280"/>
+            <a:ext cx="10180015" cy="4206240"/>
+          </a:xfrm>
+          <a:prstGeom prst="rect">
+            <a:avLst/>
+          </a:prstGeom>
+          <a:noFill/>
+          <a:ln/>
+        </p:spPr>
+        <p:txBody>
+          <a:bodyPr wrap="square" lIns="0" tIns="0" rIns="0" bIns="0" rtlCol="0" anchor="t"/>
+          <a:lstStyle/>
+          <a:p>
+            <a:pPr algn="l" indent="0" marL="0">
+              <a:spcAft>
+                <a:spcPts val="800"/>
+              </a:spcAft>
+              <a:buNone/>
+            </a:pPr>
+            <a:r>
+              <a:rPr lang="en-US" sz="4000" i="1" dirty="0">
+                <a:solidFill>
+                  <a:srgbClr val="111111"/>
+                </a:solidFill>
+                <a:latin typeface="Times New Roman" pitchFamily="34" charset="0"/>
+                <a:ea typeface="Times New Roman" pitchFamily="34" charset="-122"/>
+                <a:cs typeface="Times New Roman" pitchFamily="34" charset="-120"/>
+              </a:rPr>
+              <a:t>Sample surveys have the following strengths and weaknesses:</a:t>
+            </a:r>
+            <a:endParaRPr lang="en-US" sz="4000" dirty="0"/>
+          </a:p>
+          <a:p>
+            <a:pPr algn="l" indent="0" marL="0">
+              <a:spcAft>
+                <a:spcPts val="800"/>
+              </a:spcAft>
+              <a:buNone/>
+            </a:pPr>
+            <a:r>
+              <a:rPr lang="en-US" sz="4000" b="1" dirty="0">
+                <a:solidFill>
+                  <a:srgbClr val="111111"/>
+                </a:solidFill>
+                <a:latin typeface="Times New Roman" pitchFamily="34" charset="0"/>
+                <a:ea typeface="Times New Roman" pitchFamily="34" charset="-122"/>
+                <a:cs typeface="Times New Roman" pitchFamily="34" charset="-120"/>
+              </a:rPr>
+              <a:t>Low cost and speed: </a:t>
+            </a:r>
+            <a:pPr algn="l" indent="0" marL="0">
+              <a:spcAft>
+                <a:spcPts val="800"/>
+              </a:spcAft>
+              <a:buNone/>
+            </a:pPr>
+            <a:r>
+              <a:rPr lang="en-US" sz="4000" dirty="0">
+                <a:solidFill>
+                  <a:srgbClr val="111111"/>
+                </a:solidFill>
+                <a:latin typeface="Times New Roman" pitchFamily="34" charset="0"/>
+                <a:ea typeface="Times New Roman" pitchFamily="34" charset="-122"/>
+                <a:cs typeface="Times New Roman" pitchFamily="34" charset="-120"/>
+              </a:rPr>
+              <a:t>Only a small part of the population is interviewed, so a survey costs much less than a census. Its results are also available much faster.</a:t>
+            </a:r>
+            <a:endParaRPr lang="en-US" sz="4000" dirty="0"/>
           </a:p>
         </p:txBody>
       </p:sp>
@@ -18853,7 +19278,7 @@
         <p:spPr>
           <a:xfrm>
             <a:off x="0" y="658368"/>
-            <a:ext cx="2468880" cy="5833872"/>
+            <a:ext cx="3840480" cy="5833872"/>
           </a:xfrm>
           <a:prstGeom prst="rect">
             <a:avLst/>
@@ -18868,8 +19293,8 @@
         </p:nvSpPr>
         <p:spPr>
           <a:xfrm>
-            <a:off x="2697480" y="1005840"/>
-            <a:ext cx="9174175" cy="731520"/>
+            <a:off x="4069080" y="1005840"/>
+            <a:ext cx="7802575" cy="731520"/>
           </a:xfrm>
           <a:prstGeom prst="rect">
             <a:avLst/>
@@ -18895,7 +19320,7 @@
                 <a:ea typeface="Times New Roman" pitchFamily="34" charset="-122"/>
                 <a:cs typeface="Times New Roman" pitchFamily="34" charset="-120"/>
               </a:rPr>
-              <a:t>3. Vital Registration and Migration Records</a:t>
+              <a:t>2. Sample Surveys</a:t>
             </a:r>
             <a:endParaRPr lang="en-US" sz="3600" dirty="0"/>
           </a:p>
@@ -18909,8 +19334,47 @@
         </p:nvSpPr>
         <p:spPr>
           <a:xfrm>
-            <a:off x="2697480" y="1783080"/>
-            <a:ext cx="9174175" cy="4663440"/>
+            <a:off x="4069080" y="1737360"/>
+            <a:ext cx="7802575" cy="457200"/>
+          </a:xfrm>
+          <a:prstGeom prst="rect">
+            <a:avLst/>
+          </a:prstGeom>
+          <a:noFill/>
+          <a:ln/>
+        </p:spPr>
+        <p:txBody>
+          <a:bodyPr wrap="square" lIns="0" tIns="0" rIns="0" bIns="0" rtlCol="0" anchor="ctr"/>
+          <a:lstStyle/>
+          <a:p>
+            <a:pPr algn="l" indent="0" marL="0">
+              <a:buNone/>
+            </a:pPr>
+            <a:r>
+              <a:rPr lang="en-US" sz="3200" b="1" dirty="0">
+                <a:solidFill>
+                  <a:srgbClr val="990011"/>
+                </a:solidFill>
+                <a:latin typeface="Times New Roman" pitchFamily="34" charset="0"/>
+                <a:ea typeface="Times New Roman" pitchFamily="34" charset="-122"/>
+                <a:cs typeface="Times New Roman" pitchFamily="34" charset="-120"/>
+              </a:rPr>
+              <a:t>B) Strengths and Weaknesses</a:t>
+            </a:r>
+            <a:endParaRPr lang="en-US" sz="3200" dirty="0"/>
+          </a:p>
+        </p:txBody>
+      </p:sp>
+      <p:sp>
+        <p:nvSpPr>
+          <p:cNvPr id="6" name="Text 3"/>
+          <p:cNvSpPr/>
+          <p:nvPr/>
+        </p:nvSpPr>
+        <p:spPr>
+          <a:xfrm>
+            <a:off x="4069080" y="2240280"/>
+            <a:ext cx="7802575" cy="4206240"/>
           </a:xfrm>
           <a:prstGeom prst="rect">
             <a:avLst/>
@@ -18937,7 +19401,7 @@
                 <a:ea typeface="Times New Roman" pitchFamily="34" charset="-122"/>
                 <a:cs typeface="Times New Roman" pitchFamily="34" charset="-120"/>
               </a:rPr>
-              <a:t>Reliability of vital registration: </a:t>
+              <a:t>Detailed questions: </a:t>
             </a:r>
             <a:pPr algn="l" indent="0" marL="0">
               <a:spcAft>
@@ -18954,7 +19418,7 @@
                 <a:ea typeface="Times New Roman" pitchFamily="34" charset="-122"/>
                 <a:cs typeface="Times New Roman" pitchFamily="34" charset="-120"/>
               </a:rPr>
-              <a:t>It is complete and accurate in developed countries, where every birth and death must be declared. In Cameroon, many births and deaths in villages are never declared, so the records are incomplete.</a:t>
+              <a:t>Because fewer people are interviewed, each one can be asked many detailed questions. Surveys therefore give rich data on health, income and family life.</a:t>
             </a:r>
             <a:endParaRPr lang="en-US" sz="4000" dirty="0"/>
           </a:p>
@@ -19072,109 +19536,9 @@
           </a:p>
         </p:txBody>
       </p:sp>
-      <p:sp>
-        <p:nvSpPr>
-          <p:cNvPr id="3" name="Text 1"/>
-          <p:cNvSpPr/>
-          <p:nvPr/>
-        </p:nvSpPr>
-        <p:spPr>
-          <a:xfrm>
-            <a:off x="365760" y="1005840"/>
-            <a:ext cx="11460175" cy="731520"/>
-          </a:xfrm>
-          <a:prstGeom prst="rect">
-            <a:avLst/>
-          </a:prstGeom>
-          <a:noFill/>
-          <a:ln/>
-        </p:spPr>
-        <p:txBody>
-          <a:bodyPr wrap="square" lIns="0" tIns="0" rIns="0" bIns="0" rtlCol="0" anchor="ctr">
-            <a:normAutofit/>
-          </a:bodyPr>
-          <a:lstStyle/>
-          <a:p>
-            <a:pPr algn="ctr" indent="0" marL="0">
-              <a:buNone/>
-            </a:pPr>
-            <a:r>
-              <a:rPr lang="en-US" sz="3600" b="1" dirty="0">
-                <a:solidFill>
-                  <a:srgbClr val="990011"/>
-                </a:solidFill>
-                <a:latin typeface="Times New Roman" pitchFamily="34" charset="0"/>
-                <a:ea typeface="Times New Roman" pitchFamily="34" charset="-122"/>
-                <a:cs typeface="Times New Roman" pitchFamily="34" charset="-120"/>
-              </a:rPr>
-              <a:t>3. Vital Registration and Migration Records</a:t>
-            </a:r>
-            <a:endParaRPr lang="en-US" sz="3600" dirty="0"/>
-          </a:p>
-        </p:txBody>
-      </p:sp>
-      <p:sp>
-        <p:nvSpPr>
-          <p:cNvPr id="4" name="Text 2"/>
-          <p:cNvSpPr/>
-          <p:nvPr/>
-        </p:nvSpPr>
-        <p:spPr>
-          <a:xfrm>
-            <a:off x="365760" y="1783080"/>
-            <a:ext cx="6035040" cy="4617720"/>
-          </a:xfrm>
-          <a:prstGeom prst="rect">
-            <a:avLst/>
-          </a:prstGeom>
-          <a:noFill/>
-          <a:ln/>
-        </p:spPr>
-        <p:txBody>
-          <a:bodyPr wrap="square" lIns="0" tIns="0" rIns="0" bIns="0" rtlCol="0" anchor="t"/>
-          <a:lstStyle/>
-          <a:p>
-            <a:pPr algn="l" indent="0" marL="0">
-              <a:spcAft>
-                <a:spcPts val="800"/>
-              </a:spcAft>
-              <a:buNone/>
-            </a:pPr>
-            <a:r>
-              <a:rPr lang="en-US" sz="3600" b="1" dirty="0">
-                <a:solidFill>
-                  <a:srgbClr val="111111"/>
-                </a:solidFill>
-                <a:latin typeface="Times New Roman" pitchFamily="34" charset="0"/>
-                <a:ea typeface="Times New Roman" pitchFamily="34" charset="-122"/>
-                <a:cs typeface="Times New Roman" pitchFamily="34" charset="-120"/>
-              </a:rPr>
-              <a:t>Migration records: </a:t>
-            </a:r>
-            <a:pPr algn="l" indent="0" marL="0">
-              <a:spcAft>
-                <a:spcPts val="800"/>
-              </a:spcAft>
-              <a:buNone/>
-            </a:pPr>
-            <a:r>
-              <a:rPr lang="en-US" sz="3600" dirty="0">
-                <a:solidFill>
-                  <a:srgbClr val="111111"/>
-                </a:solidFill>
-                <a:latin typeface="Times New Roman" pitchFamily="34" charset="0"/>
-                <a:ea typeface="Times New Roman" pitchFamily="34" charset="-122"/>
-                <a:cs typeface="Times New Roman" pitchFamily="34" charset="-120"/>
-              </a:rPr>
-              <a:t>Passports, visas, residence permits, border records and refugee registers show movements into and out of a country. They measure international migration.</a:t>
-            </a:r>
-            <a:endParaRPr lang="en-US" sz="3600" dirty="0"/>
-          </a:p>
-        </p:txBody>
-      </p:sp>
       <p:pic>
         <p:nvPicPr>
-          <p:cNvPr id="5" name="Image 0" descr="/home/claude/f4/img/v2/usa_passport.jpg">    </p:cNvPr>
+          <p:cNvPr id="3" name="Image 0" descr="/home/claude/f4/img/minesec_sheet.png">    </p:cNvPr>
           <p:cNvPicPr>
             <a:picLocks noChangeAspect="1"/>
           </p:cNvPicPr>
@@ -19188,8 +19552,8 @@
         </p:blipFill>
         <p:spPr>
           <a:xfrm>
-            <a:off x="6537960" y="2400897"/>
-            <a:ext cx="5470855" cy="3034615"/>
+            <a:off x="0" y="658368"/>
+            <a:ext cx="5120640" cy="5833872"/>
           </a:xfrm>
           <a:prstGeom prst="rect">
             <a:avLst/>
@@ -19198,14 +19562,14 @@
       </p:pic>
       <p:sp>
         <p:nvSpPr>
-          <p:cNvPr id="6" name="Text 3"/>
+          <p:cNvPr id="4" name="Text 1"/>
           <p:cNvSpPr/>
           <p:nvPr/>
         </p:nvSpPr>
         <p:spPr>
           <a:xfrm>
-            <a:off x="6537960" y="6089904"/>
-            <a:ext cx="5470855" cy="347472"/>
+            <a:off x="5349240" y="1005840"/>
+            <a:ext cx="6522415" cy="731520"/>
           </a:xfrm>
           <a:prstGeom prst="rect">
             <a:avLst/>
@@ -19214,24 +19578,124 @@
           <a:ln/>
         </p:spPr>
         <p:txBody>
-          <a:bodyPr wrap="square" lIns="0" tIns="0" rIns="0" bIns="0" rtlCol="0" anchor="ctr"/>
+          <a:bodyPr wrap="square" lIns="0" tIns="0" rIns="0" bIns="0" rtlCol="0" anchor="ctr">
+            <a:normAutofit/>
+          </a:bodyPr>
           <a:lstStyle/>
           <a:p>
             <a:pPr algn="ctr" indent="0" marL="0">
               <a:buNone/>
             </a:pPr>
             <a:r>
-              <a:rPr lang="en-US" sz="1600" i="1" dirty="0">
-                <a:solidFill>
-                  <a:srgbClr val="555555"/>
+              <a:rPr lang="en-US" sz="3600" b="1" dirty="0">
+                <a:solidFill>
+                  <a:srgbClr val="990011"/>
                 </a:solidFill>
                 <a:latin typeface="Times New Roman" pitchFamily="34" charset="0"/>
                 <a:ea typeface="Times New Roman" pitchFamily="34" charset="-122"/>
                 <a:cs typeface="Times New Roman" pitchFamily="34" charset="-120"/>
               </a:rPr>
-              <a:t>Illustration: a passport</a:t>
-            </a:r>
-            <a:endParaRPr lang="en-US" sz="1600" dirty="0"/>
+              <a:t>2. Sample Surveys</a:t>
+            </a:r>
+            <a:endParaRPr lang="en-US" sz="3600" dirty="0"/>
+          </a:p>
+        </p:txBody>
+      </p:sp>
+      <p:sp>
+        <p:nvSpPr>
+          <p:cNvPr id="5" name="Text 2"/>
+          <p:cNvSpPr/>
+          <p:nvPr/>
+        </p:nvSpPr>
+        <p:spPr>
+          <a:xfrm>
+            <a:off x="5349240" y="1737360"/>
+            <a:ext cx="6522415" cy="457200"/>
+          </a:xfrm>
+          <a:prstGeom prst="rect">
+            <a:avLst/>
+          </a:prstGeom>
+          <a:noFill/>
+          <a:ln/>
+        </p:spPr>
+        <p:txBody>
+          <a:bodyPr wrap="square" lIns="0" tIns="0" rIns="0" bIns="0" rtlCol="0" anchor="ctr"/>
+          <a:lstStyle/>
+          <a:p>
+            <a:pPr algn="l" indent="0" marL="0">
+              <a:buNone/>
+            </a:pPr>
+            <a:r>
+              <a:rPr lang="en-US" sz="3200" b="1" dirty="0">
+                <a:solidFill>
+                  <a:srgbClr val="990011"/>
+                </a:solidFill>
+                <a:latin typeface="Times New Roman" pitchFamily="34" charset="0"/>
+                <a:ea typeface="Times New Roman" pitchFamily="34" charset="-122"/>
+                <a:cs typeface="Times New Roman" pitchFamily="34" charset="-120"/>
+              </a:rPr>
+              <a:t>B) Strengths and Weaknesses</a:t>
+            </a:r>
+            <a:endParaRPr lang="en-US" sz="3200" dirty="0"/>
+          </a:p>
+        </p:txBody>
+      </p:sp>
+      <p:sp>
+        <p:nvSpPr>
+          <p:cNvPr id="6" name="Text 3"/>
+          <p:cNvSpPr/>
+          <p:nvPr/>
+        </p:nvSpPr>
+        <p:spPr>
+          <a:xfrm>
+            <a:off x="5349240" y="2240280"/>
+            <a:ext cx="6522415" cy="4206240"/>
+          </a:xfrm>
+          <a:prstGeom prst="rect">
+            <a:avLst/>
+          </a:prstGeom>
+          <a:noFill/>
+          <a:ln/>
+        </p:spPr>
+        <p:txBody>
+          <a:bodyPr wrap="square" lIns="0" tIns="0" rIns="0" bIns="0" rtlCol="0" anchor="t"/>
+          <a:lstStyle/>
+          <a:p>
+            <a:pPr algn="l" indent="0" marL="0">
+              <a:spcAft>
+                <a:spcPts val="800"/>
+              </a:spcAft>
+              <a:buNone/>
+            </a:pPr>
+            <a:r>
+              <a:rPr lang="en-US" sz="4000" b="1" dirty="0">
+                <a:solidFill>
+                  <a:srgbClr val="111111"/>
+                </a:solidFill>
+                <a:latin typeface="Times New Roman" pitchFamily="34" charset="0"/>
+                <a:ea typeface="Times New Roman" pitchFamily="34" charset="-122"/>
+                <a:cs typeface="Times New Roman" pitchFamily="34" charset="-120"/>
+              </a:rPr>
+              <a:t>Risk of error: </a:t>
+            </a:r>
+            <a:pPr algn="l" indent="0" marL="0">
+              <a:spcAft>
+                <a:spcPts val="800"/>
+              </a:spcAft>
+              <a:buNone/>
+            </a:pPr>
+            <a:r>
+              <a:rPr lang="en-US" sz="4000" dirty="0">
+                <a:solidFill>
+                  <a:srgbClr val="111111"/>
+                </a:solidFill>
+                <a:latin typeface="Times New Roman" pitchFamily="34" charset="0"/>
+                <a:ea typeface="Times New Roman" pitchFamily="34" charset="-122"/>
+                <a:cs typeface="Times New Roman" pitchFamily="34" charset="-120"/>
+              </a:rPr>
+              <a:t>If the sample is badly chosen, it does not represent the whole population. The results extended to the whole country are then wrong.</a:t>
+            </a:r>
+            <a:endParaRPr lang="en-US" sz="4000" dirty="0"/>
           </a:p>
         </p:txBody>
       </p:sp>
@@ -19610,9 +20074,129 @@
           </a:p>
         </p:txBody>
       </p:sp>
+      <p:sp>
+        <p:nvSpPr>
+          <p:cNvPr id="3" name="Text 1"/>
+          <p:cNvSpPr/>
+          <p:nvPr/>
+        </p:nvSpPr>
+        <p:spPr>
+          <a:xfrm>
+            <a:off x="365760" y="1005840"/>
+            <a:ext cx="11460175" cy="731520"/>
+          </a:xfrm>
+          <a:prstGeom prst="rect">
+            <a:avLst/>
+          </a:prstGeom>
+          <a:noFill/>
+          <a:ln/>
+        </p:spPr>
+        <p:txBody>
+          <a:bodyPr wrap="square" lIns="0" tIns="0" rIns="0" bIns="0" rtlCol="0" anchor="ctr">
+            <a:normAutofit/>
+          </a:bodyPr>
+          <a:lstStyle/>
+          <a:p>
+            <a:pPr algn="ctr" indent="0" marL="0">
+              <a:buNone/>
+            </a:pPr>
+            <a:r>
+              <a:rPr lang="en-US" sz="3600" b="1" dirty="0">
+                <a:solidFill>
+                  <a:srgbClr val="990011"/>
+                </a:solidFill>
+                <a:latin typeface="Times New Roman" pitchFamily="34" charset="0"/>
+                <a:ea typeface="Times New Roman" pitchFamily="34" charset="-122"/>
+                <a:cs typeface="Times New Roman" pitchFamily="34" charset="-120"/>
+              </a:rPr>
+              <a:t>3. Vital Registration and Migration Records</a:t>
+            </a:r>
+            <a:endParaRPr lang="en-US" sz="3600" dirty="0"/>
+          </a:p>
+        </p:txBody>
+      </p:sp>
+      <p:sp>
+        <p:nvSpPr>
+          <p:cNvPr id="4" name="Text 2"/>
+          <p:cNvSpPr/>
+          <p:nvPr/>
+        </p:nvSpPr>
+        <p:spPr>
+          <a:xfrm>
+            <a:off x="365760" y="1783080"/>
+            <a:ext cx="6035040" cy="4617720"/>
+          </a:xfrm>
+          <a:prstGeom prst="rect">
+            <a:avLst/>
+          </a:prstGeom>
+          <a:noFill/>
+          <a:ln/>
+        </p:spPr>
+        <p:txBody>
+          <a:bodyPr wrap="square" lIns="0" tIns="0" rIns="0" bIns="0" rtlCol="0" anchor="t"/>
+          <a:lstStyle/>
+          <a:p>
+            <a:pPr algn="l" indent="0" marL="0">
+              <a:spcAft>
+                <a:spcPts val="800"/>
+              </a:spcAft>
+              <a:buNone/>
+            </a:pPr>
+            <a:r>
+              <a:rPr lang="en-US" sz="2800" i="1" dirty="0">
+                <a:solidFill>
+                  <a:srgbClr val="111111"/>
+                </a:solidFill>
+                <a:latin typeface="Times New Roman" pitchFamily="34" charset="0"/>
+                <a:ea typeface="Times New Roman" pitchFamily="34" charset="-122"/>
+                <a:cs typeface="Times New Roman" pitchFamily="34" charset="-120"/>
+              </a:rPr>
+              <a:t>Population changes are recorded continuously by the following sources:</a:t>
+            </a:r>
+            <a:endParaRPr lang="en-US" sz="2800" dirty="0"/>
+          </a:p>
+          <a:p>
+            <a:pPr algn="l" indent="0" marL="0">
+              <a:spcAft>
+                <a:spcPts val="800"/>
+              </a:spcAft>
+              <a:buNone/>
+            </a:pPr>
+            <a:r>
+              <a:rPr lang="en-US" sz="2800" b="1" dirty="0">
+                <a:solidFill>
+                  <a:srgbClr val="111111"/>
+                </a:solidFill>
+                <a:latin typeface="Times New Roman" pitchFamily="34" charset="0"/>
+                <a:ea typeface="Times New Roman" pitchFamily="34" charset="-122"/>
+                <a:cs typeface="Times New Roman" pitchFamily="34" charset="-120"/>
+              </a:rPr>
+              <a:t>Vital registration: </a:t>
+            </a:r>
+            <a:pPr algn="l" indent="0" marL="0">
+              <a:spcAft>
+                <a:spcPts val="800"/>
+              </a:spcAft>
+              <a:buNone/>
+            </a:pPr>
+            <a:r>
+              <a:rPr lang="en-US" sz="2800" dirty="0">
+                <a:solidFill>
+                  <a:srgbClr val="111111"/>
+                </a:solidFill>
+                <a:latin typeface="Times New Roman" pitchFamily="34" charset="0"/>
+                <a:ea typeface="Times New Roman" pitchFamily="34" charset="-122"/>
+                <a:cs typeface="Times New Roman" pitchFamily="34" charset="-120"/>
+              </a:rPr>
+              <a:t>The civil status office records births, deaths, marriages, divorces and adoptions as they happen, like a film of the population. It shows how the population changes between censuses.</a:t>
+            </a:r>
+            <a:endParaRPr lang="en-US" sz="2800" dirty="0"/>
+          </a:p>
+        </p:txBody>
+      </p:sp>
       <p:pic>
         <p:nvPicPr>
-          <p:cNvPr id="3" name="Image 0" descr="/home/claude/f4/img/minesec_sheet.png">    </p:cNvPr>
+          <p:cNvPr id="5" name="Image 0" descr="/home/claude/f4/img/v2/usa_newborn.jpg">    </p:cNvPr>
           <p:cNvPicPr>
             <a:picLocks noChangeAspect="1"/>
           </p:cNvPicPr>
@@ -19626,8 +20210,8 @@
         </p:blipFill>
         <p:spPr>
           <a:xfrm>
-            <a:off x="0" y="658368"/>
-            <a:ext cx="5120640" cy="5833872"/>
+            <a:off x="6537960" y="2400897"/>
+            <a:ext cx="5470855" cy="3034615"/>
           </a:xfrm>
           <a:prstGeom prst="rect">
             <a:avLst/>
@@ -19636,14 +20220,14 @@
       </p:pic>
       <p:sp>
         <p:nvSpPr>
-          <p:cNvPr id="4" name="Text 1"/>
+          <p:cNvPr id="6" name="Text 3"/>
           <p:cNvSpPr/>
           <p:nvPr/>
         </p:nvSpPr>
         <p:spPr>
           <a:xfrm>
-            <a:off x="5349240" y="1005840"/>
-            <a:ext cx="6522415" cy="731520"/>
+            <a:off x="6537960" y="6089904"/>
+            <a:ext cx="5470855" cy="347472"/>
           </a:xfrm>
           <a:prstGeom prst="rect">
             <a:avLst/>
@@ -19652,85 +20236,24 @@
           <a:ln/>
         </p:spPr>
         <p:txBody>
-          <a:bodyPr wrap="square" lIns="0" tIns="0" rIns="0" bIns="0" rtlCol="0" anchor="ctr">
-            <a:normAutofit/>
-          </a:bodyPr>
+          <a:bodyPr wrap="square" lIns="0" tIns="0" rIns="0" bIns="0" rtlCol="0" anchor="ctr"/>
           <a:lstStyle/>
           <a:p>
             <a:pPr algn="ctr" indent="0" marL="0">
               <a:buNone/>
             </a:pPr>
             <a:r>
-              <a:rPr lang="en-US" sz="3600" b="1" dirty="0">
-                <a:solidFill>
-                  <a:srgbClr val="990011"/>
+              <a:rPr lang="en-US" sz="1600" i="1" dirty="0">
+                <a:solidFill>
+                  <a:srgbClr val="555555"/>
                 </a:solidFill>
                 <a:latin typeface="Times New Roman" pitchFamily="34" charset="0"/>
                 <a:ea typeface="Times New Roman" pitchFamily="34" charset="-122"/>
                 <a:cs typeface="Times New Roman" pitchFamily="34" charset="-120"/>
               </a:rPr>
-              <a:t>3. Vital Registration and Migration Records</a:t>
-            </a:r>
-            <a:endParaRPr lang="en-US" sz="3600" dirty="0"/>
-          </a:p>
-        </p:txBody>
-      </p:sp>
-      <p:sp>
-        <p:nvSpPr>
-          <p:cNvPr id="5" name="Text 2"/>
-          <p:cNvSpPr/>
-          <p:nvPr/>
-        </p:nvSpPr>
-        <p:spPr>
-          <a:xfrm>
-            <a:off x="5349240" y="1783080"/>
-            <a:ext cx="6522415" cy="4663440"/>
-          </a:xfrm>
-          <a:prstGeom prst="rect">
-            <a:avLst/>
-          </a:prstGeom>
-          <a:noFill/>
-          <a:ln/>
-        </p:spPr>
-        <p:txBody>
-          <a:bodyPr wrap="square" lIns="0" tIns="0" rIns="0" bIns="0" rtlCol="0" anchor="t"/>
-          <a:lstStyle/>
-          <a:p>
-            <a:pPr algn="l" indent="0" marL="0">
-              <a:spcAft>
-                <a:spcPts val="800"/>
-              </a:spcAft>
-              <a:buNone/>
-            </a:pPr>
-            <a:r>
-              <a:rPr lang="en-US" sz="4000" b="1" dirty="0">
-                <a:solidFill>
-                  <a:srgbClr val="111111"/>
-                </a:solidFill>
-                <a:latin typeface="Times New Roman" pitchFamily="34" charset="0"/>
-                <a:ea typeface="Times New Roman" pitchFamily="34" charset="-122"/>
-                <a:cs typeface="Times New Roman" pitchFamily="34" charset="-120"/>
-              </a:rPr>
-              <a:t>Reliability of migration records: </a:t>
-            </a:r>
-            <a:pPr algn="l" indent="0" marL="0">
-              <a:spcAft>
-                <a:spcPts val="800"/>
-              </a:spcAft>
-              <a:buNone/>
-            </a:pPr>
-            <a:r>
-              <a:rPr lang="en-US" sz="4000" dirty="0">
-                <a:solidFill>
-                  <a:srgbClr val="111111"/>
-                </a:solidFill>
-                <a:latin typeface="Times New Roman" pitchFamily="34" charset="0"/>
-                <a:ea typeface="Times New Roman" pitchFamily="34" charset="-122"/>
-                <a:cs typeface="Times New Roman" pitchFamily="34" charset="-120"/>
-              </a:rPr>
-              <a:t>Internal movements are rarely recorded, and many people cross African borders informally. These records therefore underestimate migration.</a:t>
-            </a:r>
-            <a:endParaRPr lang="en-US" sz="4000" dirty="0"/>
+              <a:t>Illustration: a newborn baby</a:t>
+            </a:r>
+            <a:endParaRPr lang="en-US" sz="1600" dirty="0"/>
           </a:p>
         </p:txBody>
       </p:sp>
@@ -19846,129 +20369,9 @@
           </a:p>
         </p:txBody>
       </p:sp>
-      <p:sp>
-        <p:nvSpPr>
-          <p:cNvPr id="3" name="Text 1"/>
-          <p:cNvSpPr/>
-          <p:nvPr/>
-        </p:nvSpPr>
-        <p:spPr>
-          <a:xfrm>
-            <a:off x="365760" y="1005840"/>
-            <a:ext cx="11460175" cy="731520"/>
-          </a:xfrm>
-          <a:prstGeom prst="rect">
-            <a:avLst/>
-          </a:prstGeom>
-          <a:noFill/>
-          <a:ln/>
-        </p:spPr>
-        <p:txBody>
-          <a:bodyPr wrap="square" lIns="0" tIns="0" rIns="0" bIns="0" rtlCol="0" anchor="ctr">
-            <a:normAutofit/>
-          </a:bodyPr>
-          <a:lstStyle/>
-          <a:p>
-            <a:pPr algn="ctr" indent="0" marL="0">
-              <a:buNone/>
-            </a:pPr>
-            <a:r>
-              <a:rPr lang="en-US" sz="3600" b="1" dirty="0">
-                <a:solidFill>
-                  <a:srgbClr val="990011"/>
-                </a:solidFill>
-                <a:latin typeface="Times New Roman" pitchFamily="34" charset="0"/>
-                <a:ea typeface="Times New Roman" pitchFamily="34" charset="-122"/>
-                <a:cs typeface="Times New Roman" pitchFamily="34" charset="-120"/>
-              </a:rPr>
-              <a:t>4. The Current State of the World Population</a:t>
-            </a:r>
-            <a:endParaRPr lang="en-US" sz="3600" dirty="0"/>
-          </a:p>
-        </p:txBody>
-      </p:sp>
-      <p:sp>
-        <p:nvSpPr>
-          <p:cNvPr id="4" name="Text 2"/>
-          <p:cNvSpPr/>
-          <p:nvPr/>
-        </p:nvSpPr>
-        <p:spPr>
-          <a:xfrm>
-            <a:off x="365760" y="1783080"/>
-            <a:ext cx="6035040" cy="4617720"/>
-          </a:xfrm>
-          <a:prstGeom prst="rect">
-            <a:avLst/>
-          </a:prstGeom>
-          <a:noFill/>
-          <a:ln/>
-        </p:spPr>
-        <p:txBody>
-          <a:bodyPr wrap="square" lIns="0" tIns="0" rIns="0" bIns="0" rtlCol="0" anchor="t"/>
-          <a:lstStyle/>
-          <a:p>
-            <a:pPr algn="l" indent="0" marL="0">
-              <a:spcAft>
-                <a:spcPts val="800"/>
-              </a:spcAft>
-              <a:buNone/>
-            </a:pPr>
-            <a:r>
-              <a:rPr lang="en-US" sz="3600" i="1" dirty="0">
-                <a:solidFill>
-                  <a:srgbClr val="111111"/>
-                </a:solidFill>
-                <a:latin typeface="Times New Roman" pitchFamily="34" charset="0"/>
-                <a:ea typeface="Times New Roman" pitchFamily="34" charset="-122"/>
-                <a:cs typeface="Times New Roman" pitchFamily="34" charset="-120"/>
-              </a:rPr>
-              <a:t>The world population today has the following characteristics:</a:t>
-            </a:r>
-            <a:endParaRPr lang="en-US" sz="3600" dirty="0"/>
-          </a:p>
-          <a:p>
-            <a:pPr algn="l" indent="0" marL="0">
-              <a:spcAft>
-                <a:spcPts val="800"/>
-              </a:spcAft>
-              <a:buNone/>
-            </a:pPr>
-            <a:r>
-              <a:rPr lang="en-US" sz="3600" b="1" dirty="0">
-                <a:solidFill>
-                  <a:srgbClr val="111111"/>
-                </a:solidFill>
-                <a:latin typeface="Times New Roman" pitchFamily="34" charset="0"/>
-                <a:ea typeface="Times New Roman" pitchFamily="34" charset="-122"/>
-                <a:cs typeface="Times New Roman" pitchFamily="34" charset="-120"/>
-              </a:rPr>
-              <a:t>Size: </a:t>
-            </a:r>
-            <a:pPr algn="l" indent="0" marL="0">
-              <a:spcAft>
-                <a:spcPts val="800"/>
-              </a:spcAft>
-              <a:buNone/>
-            </a:pPr>
-            <a:r>
-              <a:rPr lang="en-US" sz="3600" dirty="0">
-                <a:solidFill>
-                  <a:srgbClr val="111111"/>
-                </a:solidFill>
-                <a:latin typeface="Times New Roman" pitchFamily="34" charset="0"/>
-                <a:ea typeface="Times New Roman" pitchFamily="34" charset="-122"/>
-                <a:cs typeface="Times New Roman" pitchFamily="34" charset="-120"/>
-              </a:rPr>
-              <a:t>The world population passed 8 billion in 2022 and is about 8.2 billion today. Asia contains about 60 % of all people.</a:t>
-            </a:r>
-            <a:endParaRPr lang="en-US" sz="3600" dirty="0"/>
-          </a:p>
-        </p:txBody>
-      </p:sp>
       <p:pic>
         <p:nvPicPr>
-          <p:cNvPr id="5" name="Image 0" descr="/home/claude/f4/img/v2/pop2_trends.png">    </p:cNvPr>
+          <p:cNvPr id="3" name="Image 0" descr="/home/claude/f4/img/minesec_sheet.png">    </p:cNvPr>
           <p:cNvPicPr>
             <a:picLocks noChangeAspect="1"/>
           </p:cNvPicPr>
@@ -19982,8 +20385,8 @@
         </p:blipFill>
         <p:spPr>
           <a:xfrm>
-            <a:off x="6537960" y="2849678"/>
-            <a:ext cx="5470855" cy="2137053"/>
+            <a:off x="0" y="658368"/>
+            <a:ext cx="2468880" cy="5833872"/>
           </a:xfrm>
           <a:prstGeom prst="rect">
             <a:avLst/>
@@ -19992,14 +20395,14 @@
       </p:pic>
       <p:sp>
         <p:nvSpPr>
-          <p:cNvPr id="6" name="Text 3"/>
+          <p:cNvPr id="4" name="Text 1"/>
           <p:cNvSpPr/>
           <p:nvPr/>
         </p:nvSpPr>
         <p:spPr>
           <a:xfrm>
-            <a:off x="6537960" y="6089904"/>
-            <a:ext cx="5470855" cy="347472"/>
+            <a:off x="2697480" y="1005840"/>
+            <a:ext cx="9174175" cy="731520"/>
           </a:xfrm>
           <a:prstGeom prst="rect">
             <a:avLst/>
@@ -20008,24 +20411,85 @@
           <a:ln/>
         </p:spPr>
         <p:txBody>
-          <a:bodyPr wrap="square" lIns="0" tIns="0" rIns="0" bIns="0" rtlCol="0" anchor="ctr"/>
+          <a:bodyPr wrap="square" lIns="0" tIns="0" rIns="0" bIns="0" rtlCol="0" anchor="ctr">
+            <a:normAutofit/>
+          </a:bodyPr>
           <a:lstStyle/>
           <a:p>
             <a:pPr algn="ctr" indent="0" marL="0">
               <a:buNone/>
             </a:pPr>
             <a:r>
-              <a:rPr lang="en-US" sz="1600" i="1" dirty="0">
-                <a:solidFill>
-                  <a:srgbClr val="555555"/>
+              <a:rPr lang="en-US" sz="3600" b="1" dirty="0">
+                <a:solidFill>
+                  <a:srgbClr val="990011"/>
                 </a:solidFill>
                 <a:latin typeface="Times New Roman" pitchFamily="34" charset="0"/>
                 <a:ea typeface="Times New Roman" pitchFamily="34" charset="-122"/>
                 <a:cs typeface="Times New Roman" pitchFamily="34" charset="-120"/>
               </a:rPr>
-              <a:t>Illustration: world population trends</a:t>
-            </a:r>
-            <a:endParaRPr lang="en-US" sz="1600" dirty="0"/>
+              <a:t>3. Vital Registration and Migration Records</a:t>
+            </a:r>
+            <a:endParaRPr lang="en-US" sz="3600" dirty="0"/>
+          </a:p>
+        </p:txBody>
+      </p:sp>
+      <p:sp>
+        <p:nvSpPr>
+          <p:cNvPr id="5" name="Text 2"/>
+          <p:cNvSpPr/>
+          <p:nvPr/>
+        </p:nvSpPr>
+        <p:spPr>
+          <a:xfrm>
+            <a:off x="2697480" y="1783080"/>
+            <a:ext cx="9174175" cy="4663440"/>
+          </a:xfrm>
+          <a:prstGeom prst="rect">
+            <a:avLst/>
+          </a:prstGeom>
+          <a:noFill/>
+          <a:ln/>
+        </p:spPr>
+        <p:txBody>
+          <a:bodyPr wrap="square" lIns="0" tIns="0" rIns="0" bIns="0" rtlCol="0" anchor="t"/>
+          <a:lstStyle/>
+          <a:p>
+            <a:pPr algn="l" indent="0" marL="0">
+              <a:spcAft>
+                <a:spcPts val="800"/>
+              </a:spcAft>
+              <a:buNone/>
+            </a:pPr>
+            <a:r>
+              <a:rPr lang="en-US" sz="4000" b="1" dirty="0">
+                <a:solidFill>
+                  <a:srgbClr val="111111"/>
+                </a:solidFill>
+                <a:latin typeface="Times New Roman" pitchFamily="34" charset="0"/>
+                <a:ea typeface="Times New Roman" pitchFamily="34" charset="-122"/>
+                <a:cs typeface="Times New Roman" pitchFamily="34" charset="-120"/>
+              </a:rPr>
+              <a:t>Reliability of vital registration: </a:t>
+            </a:r>
+            <a:pPr algn="l" indent="0" marL="0">
+              <a:spcAft>
+                <a:spcPts val="800"/>
+              </a:spcAft>
+              <a:buNone/>
+            </a:pPr>
+            <a:r>
+              <a:rPr lang="en-US" sz="4000" dirty="0">
+                <a:solidFill>
+                  <a:srgbClr val="111111"/>
+                </a:solidFill>
+                <a:latin typeface="Times New Roman" pitchFamily="34" charset="0"/>
+                <a:ea typeface="Times New Roman" pitchFamily="34" charset="-122"/>
+                <a:cs typeface="Times New Roman" pitchFamily="34" charset="-120"/>
+              </a:rPr>
+              <a:t>It is complete and accurate in developed countries, where every birth and death must be declared. In Cameroon, many births and deaths in villages are never declared, so the records are incomplete.</a:t>
+            </a:r>
+            <a:endParaRPr lang="en-US" sz="4000" dirty="0"/>
           </a:p>
         </p:txBody>
       </p:sp>
@@ -20141,9 +20605,109 @@
           </a:p>
         </p:txBody>
       </p:sp>
+      <p:sp>
+        <p:nvSpPr>
+          <p:cNvPr id="3" name="Text 1"/>
+          <p:cNvSpPr/>
+          <p:nvPr/>
+        </p:nvSpPr>
+        <p:spPr>
+          <a:xfrm>
+            <a:off x="365760" y="1005840"/>
+            <a:ext cx="11460175" cy="731520"/>
+          </a:xfrm>
+          <a:prstGeom prst="rect">
+            <a:avLst/>
+          </a:prstGeom>
+          <a:noFill/>
+          <a:ln/>
+        </p:spPr>
+        <p:txBody>
+          <a:bodyPr wrap="square" lIns="0" tIns="0" rIns="0" bIns="0" rtlCol="0" anchor="ctr">
+            <a:normAutofit/>
+          </a:bodyPr>
+          <a:lstStyle/>
+          <a:p>
+            <a:pPr algn="ctr" indent="0" marL="0">
+              <a:buNone/>
+            </a:pPr>
+            <a:r>
+              <a:rPr lang="en-US" sz="3600" b="1" dirty="0">
+                <a:solidFill>
+                  <a:srgbClr val="990011"/>
+                </a:solidFill>
+                <a:latin typeface="Times New Roman" pitchFamily="34" charset="0"/>
+                <a:ea typeface="Times New Roman" pitchFamily="34" charset="-122"/>
+                <a:cs typeface="Times New Roman" pitchFamily="34" charset="-120"/>
+              </a:rPr>
+              <a:t>3. Vital Registration and Migration Records</a:t>
+            </a:r>
+            <a:endParaRPr lang="en-US" sz="3600" dirty="0"/>
+          </a:p>
+        </p:txBody>
+      </p:sp>
+      <p:sp>
+        <p:nvSpPr>
+          <p:cNvPr id="4" name="Text 2"/>
+          <p:cNvSpPr/>
+          <p:nvPr/>
+        </p:nvSpPr>
+        <p:spPr>
+          <a:xfrm>
+            <a:off x="365760" y="1783080"/>
+            <a:ext cx="6035040" cy="4617720"/>
+          </a:xfrm>
+          <a:prstGeom prst="rect">
+            <a:avLst/>
+          </a:prstGeom>
+          <a:noFill/>
+          <a:ln/>
+        </p:spPr>
+        <p:txBody>
+          <a:bodyPr wrap="square" lIns="0" tIns="0" rIns="0" bIns="0" rtlCol="0" anchor="t"/>
+          <a:lstStyle/>
+          <a:p>
+            <a:pPr algn="l" indent="0" marL="0">
+              <a:spcAft>
+                <a:spcPts val="800"/>
+              </a:spcAft>
+              <a:buNone/>
+            </a:pPr>
+            <a:r>
+              <a:rPr lang="en-US" sz="3600" b="1" dirty="0">
+                <a:solidFill>
+                  <a:srgbClr val="111111"/>
+                </a:solidFill>
+                <a:latin typeface="Times New Roman" pitchFamily="34" charset="0"/>
+                <a:ea typeface="Times New Roman" pitchFamily="34" charset="-122"/>
+                <a:cs typeface="Times New Roman" pitchFamily="34" charset="-120"/>
+              </a:rPr>
+              <a:t>Migration records: </a:t>
+            </a:r>
+            <a:pPr algn="l" indent="0" marL="0">
+              <a:spcAft>
+                <a:spcPts val="800"/>
+              </a:spcAft>
+              <a:buNone/>
+            </a:pPr>
+            <a:r>
+              <a:rPr lang="en-US" sz="3600" dirty="0">
+                <a:solidFill>
+                  <a:srgbClr val="111111"/>
+                </a:solidFill>
+                <a:latin typeface="Times New Roman" pitchFamily="34" charset="0"/>
+                <a:ea typeface="Times New Roman" pitchFamily="34" charset="-122"/>
+                <a:cs typeface="Times New Roman" pitchFamily="34" charset="-120"/>
+              </a:rPr>
+              <a:t>Passports, visas, residence permits, border records and refugee registers show movements into and out of a country. They measure international migration.</a:t>
+            </a:r>
+            <a:endParaRPr lang="en-US" sz="3600" dirty="0"/>
+          </a:p>
+        </p:txBody>
+      </p:sp>
       <p:pic>
         <p:nvPicPr>
-          <p:cNvPr id="3" name="Image 0" descr="/home/claude/f4/img/minesec_sheet.png">    </p:cNvPr>
+          <p:cNvPr id="5" name="Image 0" descr="/home/claude/f4/img/v2/usa_passport.jpg">    </p:cNvPr>
           <p:cNvPicPr>
             <a:picLocks noChangeAspect="1"/>
           </p:cNvPicPr>
@@ -20157,8 +20721,8 @@
         </p:blipFill>
         <p:spPr>
           <a:xfrm>
-            <a:off x="0" y="658368"/>
-            <a:ext cx="5120640" cy="5833872"/>
+            <a:off x="6537960" y="2400897"/>
+            <a:ext cx="5470855" cy="3034615"/>
           </a:xfrm>
           <a:prstGeom prst="rect">
             <a:avLst/>
@@ -20167,14 +20731,14 @@
       </p:pic>
       <p:sp>
         <p:nvSpPr>
-          <p:cNvPr id="4" name="Text 1"/>
+          <p:cNvPr id="6" name="Text 3"/>
           <p:cNvSpPr/>
           <p:nvPr/>
         </p:nvSpPr>
         <p:spPr>
           <a:xfrm>
-            <a:off x="5349240" y="1005840"/>
-            <a:ext cx="6522415" cy="731520"/>
+            <a:off x="6537960" y="6089904"/>
+            <a:ext cx="5470855" cy="347472"/>
           </a:xfrm>
           <a:prstGeom prst="rect">
             <a:avLst/>
@@ -20183,85 +20747,24 @@
           <a:ln/>
         </p:spPr>
         <p:txBody>
-          <a:bodyPr wrap="square" lIns="0" tIns="0" rIns="0" bIns="0" rtlCol="0" anchor="ctr">
-            <a:normAutofit/>
-          </a:bodyPr>
+          <a:bodyPr wrap="square" lIns="0" tIns="0" rIns="0" bIns="0" rtlCol="0" anchor="ctr"/>
           <a:lstStyle/>
           <a:p>
             <a:pPr algn="ctr" indent="0" marL="0">
               <a:buNone/>
             </a:pPr>
             <a:r>
-              <a:rPr lang="en-US" sz="3600" b="1" dirty="0">
-                <a:solidFill>
-                  <a:srgbClr val="990011"/>
+              <a:rPr lang="en-US" sz="1600" i="1" dirty="0">
+                <a:solidFill>
+                  <a:srgbClr val="555555"/>
                 </a:solidFill>
                 <a:latin typeface="Times New Roman" pitchFamily="34" charset="0"/>
                 <a:ea typeface="Times New Roman" pitchFamily="34" charset="-122"/>
                 <a:cs typeface="Times New Roman" pitchFamily="34" charset="-120"/>
               </a:rPr>
-              <a:t>4. The Current State of the World Population</a:t>
-            </a:r>
-            <a:endParaRPr lang="en-US" sz="3600" dirty="0"/>
-          </a:p>
-        </p:txBody>
-      </p:sp>
-      <p:sp>
-        <p:nvSpPr>
-          <p:cNvPr id="5" name="Text 2"/>
-          <p:cNvSpPr/>
-          <p:nvPr/>
-        </p:nvSpPr>
-        <p:spPr>
-          <a:xfrm>
-            <a:off x="5349240" y="1783080"/>
-            <a:ext cx="6522415" cy="4663440"/>
-          </a:xfrm>
-          <a:prstGeom prst="rect">
-            <a:avLst/>
-          </a:prstGeom>
-          <a:noFill/>
-          <a:ln/>
-        </p:spPr>
-        <p:txBody>
-          <a:bodyPr wrap="square" lIns="0" tIns="0" rIns="0" bIns="0" rtlCol="0" anchor="t"/>
-          <a:lstStyle/>
-          <a:p>
-            <a:pPr algn="l" indent="0" marL="0">
-              <a:spcAft>
-                <a:spcPts val="800"/>
-              </a:spcAft>
-              <a:buNone/>
-            </a:pPr>
-            <a:r>
-              <a:rPr lang="en-US" sz="4000" b="1" dirty="0">
-                <a:solidFill>
-                  <a:srgbClr val="111111"/>
-                </a:solidFill>
-                <a:latin typeface="Times New Roman" pitchFamily="34" charset="0"/>
-                <a:ea typeface="Times New Roman" pitchFamily="34" charset="-122"/>
-                <a:cs typeface="Times New Roman" pitchFamily="34" charset="-120"/>
-              </a:rPr>
-              <a:t>Slower growth: </a:t>
-            </a:r>
-            <a:pPr algn="l" indent="0" marL="0">
-              <a:spcAft>
-                <a:spcPts val="800"/>
-              </a:spcAft>
-              <a:buNone/>
-            </a:pPr>
-            <a:r>
-              <a:rPr lang="en-US" sz="4000" dirty="0">
-                <a:solidFill>
-                  <a:srgbClr val="111111"/>
-                </a:solidFill>
-                <a:latin typeface="Times New Roman" pitchFamily="34" charset="0"/>
-                <a:ea typeface="Times New Roman" pitchFamily="34" charset="-122"/>
-                <a:cs typeface="Times New Roman" pitchFamily="34" charset="-120"/>
-              </a:rPr>
-              <a:t>The population still grows by about 70 million people a year, but the growth rate is falling. It is expected to stop growing in the second half of this century.</a:t>
-            </a:r>
-            <a:endParaRPr lang="en-US" sz="4000" dirty="0"/>
+              <a:t>Illustration: a passport</a:t>
+            </a:r>
+            <a:endParaRPr lang="en-US" sz="1600" dirty="0"/>
           </a:p>
         </p:txBody>
       </p:sp>
@@ -20377,109 +20880,9 @@
           </a:p>
         </p:txBody>
       </p:sp>
-      <p:sp>
-        <p:nvSpPr>
-          <p:cNvPr id="3" name="Text 1"/>
-          <p:cNvSpPr/>
-          <p:nvPr/>
-        </p:nvSpPr>
-        <p:spPr>
-          <a:xfrm>
-            <a:off x="365760" y="1005840"/>
-            <a:ext cx="11460175" cy="731520"/>
-          </a:xfrm>
-          <a:prstGeom prst="rect">
-            <a:avLst/>
-          </a:prstGeom>
-          <a:noFill/>
-          <a:ln/>
-        </p:spPr>
-        <p:txBody>
-          <a:bodyPr wrap="square" lIns="0" tIns="0" rIns="0" bIns="0" rtlCol="0" anchor="ctr">
-            <a:normAutofit/>
-          </a:bodyPr>
-          <a:lstStyle/>
-          <a:p>
-            <a:pPr algn="ctr" indent="0" marL="0">
-              <a:buNone/>
-            </a:pPr>
-            <a:r>
-              <a:rPr lang="en-US" sz="3600" b="1" dirty="0">
-                <a:solidFill>
-                  <a:srgbClr val="990011"/>
-                </a:solidFill>
-                <a:latin typeface="Times New Roman" pitchFamily="34" charset="0"/>
-                <a:ea typeface="Times New Roman" pitchFamily="34" charset="-122"/>
-                <a:cs typeface="Times New Roman" pitchFamily="34" charset="-120"/>
-              </a:rPr>
-              <a:t>4. The Current State of the World Population</a:t>
-            </a:r>
-            <a:endParaRPr lang="en-US" sz="3600" dirty="0"/>
-          </a:p>
-        </p:txBody>
-      </p:sp>
-      <p:sp>
-        <p:nvSpPr>
-          <p:cNvPr id="4" name="Text 2"/>
-          <p:cNvSpPr/>
-          <p:nvPr/>
-        </p:nvSpPr>
-        <p:spPr>
-          <a:xfrm>
-            <a:off x="365760" y="1783080"/>
-            <a:ext cx="6035040" cy="4617720"/>
-          </a:xfrm>
-          <a:prstGeom prst="rect">
-            <a:avLst/>
-          </a:prstGeom>
-          <a:noFill/>
-          <a:ln/>
-        </p:spPr>
-        <p:txBody>
-          <a:bodyPr wrap="square" lIns="0" tIns="0" rIns="0" bIns="0" rtlCol="0" anchor="t"/>
-          <a:lstStyle/>
-          <a:p>
-            <a:pPr algn="l" indent="0" marL="0">
-              <a:spcAft>
-                <a:spcPts val="800"/>
-              </a:spcAft>
-              <a:buNone/>
-            </a:pPr>
-            <a:r>
-              <a:rPr lang="en-US" sz="3600" b="1" dirty="0">
-                <a:solidFill>
-                  <a:srgbClr val="111111"/>
-                </a:solidFill>
-                <a:latin typeface="Times New Roman" pitchFamily="34" charset="0"/>
-                <a:ea typeface="Times New Roman" pitchFamily="34" charset="-122"/>
-                <a:cs typeface="Times New Roman" pitchFamily="34" charset="-120"/>
-              </a:rPr>
-              <a:t>Contrasts: </a:t>
-            </a:r>
-            <a:pPr algn="l" indent="0" marL="0">
-              <a:spcAft>
-                <a:spcPts val="800"/>
-              </a:spcAft>
-              <a:buNone/>
-            </a:pPr>
-            <a:r>
-              <a:rPr lang="en-US" sz="3600" dirty="0">
-                <a:solidFill>
-                  <a:srgbClr val="111111"/>
-                </a:solidFill>
-                <a:latin typeface="Times New Roman" pitchFamily="34" charset="0"/>
-                <a:ea typeface="Times New Roman" pitchFamily="34" charset="-122"/>
-                <a:cs typeface="Times New Roman" pitchFamily="34" charset="-120"/>
-              </a:rPr>
-              <a:t>Developed countries have low birth rates and ageing populations. Developing countries, especially in Africa, have high birth rates and young populations.</a:t>
-            </a:r>
-            <a:endParaRPr lang="en-US" sz="3600" dirty="0"/>
-          </a:p>
-        </p:txBody>
-      </p:sp>
       <p:pic>
         <p:nvPicPr>
-          <p:cNvPr id="5" name="Image 0" descr="/home/claude/f4/img/v2/world_pop_big.png">    </p:cNvPr>
+          <p:cNvPr id="3" name="Image 0" descr="/home/claude/f4/img/minesec_sheet.png">    </p:cNvPr>
           <p:cNvPicPr>
             <a:picLocks noChangeAspect="1"/>
           </p:cNvPicPr>
@@ -20493,8 +20896,8 @@
         </p:blipFill>
         <p:spPr>
           <a:xfrm>
-            <a:off x="6537960" y="2721454"/>
-            <a:ext cx="5470855" cy="2393499"/>
+            <a:off x="0" y="658368"/>
+            <a:ext cx="5120640" cy="5833872"/>
           </a:xfrm>
           <a:prstGeom prst="rect">
             <a:avLst/>
@@ -20503,14 +20906,14 @@
       </p:pic>
       <p:sp>
         <p:nvSpPr>
-          <p:cNvPr id="6" name="Text 3"/>
+          <p:cNvPr id="4" name="Text 1"/>
           <p:cNvSpPr/>
           <p:nvPr/>
         </p:nvSpPr>
         <p:spPr>
           <a:xfrm>
-            <a:off x="6537960" y="6089904"/>
-            <a:ext cx="5470855" cy="347472"/>
+            <a:off x="5349240" y="1005840"/>
+            <a:ext cx="6522415" cy="731520"/>
           </a:xfrm>
           <a:prstGeom prst="rect">
             <a:avLst/>
@@ -20519,24 +20922,85 @@
           <a:ln/>
         </p:spPr>
         <p:txBody>
-          <a:bodyPr wrap="square" lIns="0" tIns="0" rIns="0" bIns="0" rtlCol="0" anchor="ctr"/>
+          <a:bodyPr wrap="square" lIns="0" tIns="0" rIns="0" bIns="0" rtlCol="0" anchor="ctr">
+            <a:normAutofit/>
+          </a:bodyPr>
           <a:lstStyle/>
           <a:p>
             <a:pPr algn="ctr" indent="0" marL="0">
               <a:buNone/>
             </a:pPr>
             <a:r>
-              <a:rPr lang="en-US" sz="1600" i="1" dirty="0">
-                <a:solidFill>
-                  <a:srgbClr val="555555"/>
+              <a:rPr lang="en-US" sz="3600" b="1" dirty="0">
+                <a:solidFill>
+                  <a:srgbClr val="990011"/>
                 </a:solidFill>
                 <a:latin typeface="Times New Roman" pitchFamily="34" charset="0"/>
                 <a:ea typeface="Times New Roman" pitchFamily="34" charset="-122"/>
                 <a:cs typeface="Times New Roman" pitchFamily="34" charset="-120"/>
               </a:rPr>
-              <a:t>Illustration: world population</a:t>
-            </a:r>
-            <a:endParaRPr lang="en-US" sz="1600" dirty="0"/>
+              <a:t>3. Vital Registration and Migration Records</a:t>
+            </a:r>
+            <a:endParaRPr lang="en-US" sz="3600" dirty="0"/>
+          </a:p>
+        </p:txBody>
+      </p:sp>
+      <p:sp>
+        <p:nvSpPr>
+          <p:cNvPr id="5" name="Text 2"/>
+          <p:cNvSpPr/>
+          <p:nvPr/>
+        </p:nvSpPr>
+        <p:spPr>
+          <a:xfrm>
+            <a:off x="5349240" y="1783080"/>
+            <a:ext cx="6522415" cy="4663440"/>
+          </a:xfrm>
+          <a:prstGeom prst="rect">
+            <a:avLst/>
+          </a:prstGeom>
+          <a:noFill/>
+          <a:ln/>
+        </p:spPr>
+        <p:txBody>
+          <a:bodyPr wrap="square" lIns="0" tIns="0" rIns="0" bIns="0" rtlCol="0" anchor="t"/>
+          <a:lstStyle/>
+          <a:p>
+            <a:pPr algn="l" indent="0" marL="0">
+              <a:spcAft>
+                <a:spcPts val="800"/>
+              </a:spcAft>
+              <a:buNone/>
+            </a:pPr>
+            <a:r>
+              <a:rPr lang="en-US" sz="4000" b="1" dirty="0">
+                <a:solidFill>
+                  <a:srgbClr val="111111"/>
+                </a:solidFill>
+                <a:latin typeface="Times New Roman" pitchFamily="34" charset="0"/>
+                <a:ea typeface="Times New Roman" pitchFamily="34" charset="-122"/>
+                <a:cs typeface="Times New Roman" pitchFamily="34" charset="-120"/>
+              </a:rPr>
+              <a:t>Reliability of migration records: </a:t>
+            </a:r>
+            <a:pPr algn="l" indent="0" marL="0">
+              <a:spcAft>
+                <a:spcPts val="800"/>
+              </a:spcAft>
+              <a:buNone/>
+            </a:pPr>
+            <a:r>
+              <a:rPr lang="en-US" sz="4000" dirty="0">
+                <a:solidFill>
+                  <a:srgbClr val="111111"/>
+                </a:solidFill>
+                <a:latin typeface="Times New Roman" pitchFamily="34" charset="0"/>
+                <a:ea typeface="Times New Roman" pitchFamily="34" charset="-122"/>
+                <a:cs typeface="Times New Roman" pitchFamily="34" charset="-120"/>
+              </a:rPr>
+              <a:t>Internal movements are rarely recorded, and many people cross African borders informally. These records therefore underestimate migration.</a:t>
+            </a:r>
+            <a:endParaRPr lang="en-US" sz="4000" dirty="0"/>
           </a:p>
         </p:txBody>
       </p:sp>
@@ -20652,9 +21116,129 @@
           </a:p>
         </p:txBody>
       </p:sp>
+      <p:sp>
+        <p:nvSpPr>
+          <p:cNvPr id="3" name="Text 1"/>
+          <p:cNvSpPr/>
+          <p:nvPr/>
+        </p:nvSpPr>
+        <p:spPr>
+          <a:xfrm>
+            <a:off x="365760" y="1005840"/>
+            <a:ext cx="11460175" cy="731520"/>
+          </a:xfrm>
+          <a:prstGeom prst="rect">
+            <a:avLst/>
+          </a:prstGeom>
+          <a:noFill/>
+          <a:ln/>
+        </p:spPr>
+        <p:txBody>
+          <a:bodyPr wrap="square" lIns="0" tIns="0" rIns="0" bIns="0" rtlCol="0" anchor="ctr">
+            <a:normAutofit/>
+          </a:bodyPr>
+          <a:lstStyle/>
+          <a:p>
+            <a:pPr algn="ctr" indent="0" marL="0">
+              <a:buNone/>
+            </a:pPr>
+            <a:r>
+              <a:rPr lang="en-US" sz="3600" b="1" dirty="0">
+                <a:solidFill>
+                  <a:srgbClr val="990011"/>
+                </a:solidFill>
+                <a:latin typeface="Times New Roman" pitchFamily="34" charset="0"/>
+                <a:ea typeface="Times New Roman" pitchFamily="34" charset="-122"/>
+                <a:cs typeface="Times New Roman" pitchFamily="34" charset="-120"/>
+              </a:rPr>
+              <a:t>4. The Current State of the World Population</a:t>
+            </a:r>
+            <a:endParaRPr lang="en-US" sz="3600" dirty="0"/>
+          </a:p>
+        </p:txBody>
+      </p:sp>
+      <p:sp>
+        <p:nvSpPr>
+          <p:cNvPr id="4" name="Text 2"/>
+          <p:cNvSpPr/>
+          <p:nvPr/>
+        </p:nvSpPr>
+        <p:spPr>
+          <a:xfrm>
+            <a:off x="365760" y="1783080"/>
+            <a:ext cx="6035040" cy="4617720"/>
+          </a:xfrm>
+          <a:prstGeom prst="rect">
+            <a:avLst/>
+          </a:prstGeom>
+          <a:noFill/>
+          <a:ln/>
+        </p:spPr>
+        <p:txBody>
+          <a:bodyPr wrap="square" lIns="0" tIns="0" rIns="0" bIns="0" rtlCol="0" anchor="t"/>
+          <a:lstStyle/>
+          <a:p>
+            <a:pPr algn="l" indent="0" marL="0">
+              <a:spcAft>
+                <a:spcPts val="800"/>
+              </a:spcAft>
+              <a:buNone/>
+            </a:pPr>
+            <a:r>
+              <a:rPr lang="en-US" sz="3600" i="1" dirty="0">
+                <a:solidFill>
+                  <a:srgbClr val="111111"/>
+                </a:solidFill>
+                <a:latin typeface="Times New Roman" pitchFamily="34" charset="0"/>
+                <a:ea typeface="Times New Roman" pitchFamily="34" charset="-122"/>
+                <a:cs typeface="Times New Roman" pitchFamily="34" charset="-120"/>
+              </a:rPr>
+              <a:t>The world population today has the following characteristics:</a:t>
+            </a:r>
+            <a:endParaRPr lang="en-US" sz="3600" dirty="0"/>
+          </a:p>
+          <a:p>
+            <a:pPr algn="l" indent="0" marL="0">
+              <a:spcAft>
+                <a:spcPts val="800"/>
+              </a:spcAft>
+              <a:buNone/>
+            </a:pPr>
+            <a:r>
+              <a:rPr lang="en-US" sz="3600" b="1" dirty="0">
+                <a:solidFill>
+                  <a:srgbClr val="111111"/>
+                </a:solidFill>
+                <a:latin typeface="Times New Roman" pitchFamily="34" charset="0"/>
+                <a:ea typeface="Times New Roman" pitchFamily="34" charset="-122"/>
+                <a:cs typeface="Times New Roman" pitchFamily="34" charset="-120"/>
+              </a:rPr>
+              <a:t>Size: </a:t>
+            </a:r>
+            <a:pPr algn="l" indent="0" marL="0">
+              <a:spcAft>
+                <a:spcPts val="800"/>
+              </a:spcAft>
+              <a:buNone/>
+            </a:pPr>
+            <a:r>
+              <a:rPr lang="en-US" sz="3600" dirty="0">
+                <a:solidFill>
+                  <a:srgbClr val="111111"/>
+                </a:solidFill>
+                <a:latin typeface="Times New Roman" pitchFamily="34" charset="0"/>
+                <a:ea typeface="Times New Roman" pitchFamily="34" charset="-122"/>
+                <a:cs typeface="Times New Roman" pitchFamily="34" charset="-120"/>
+              </a:rPr>
+              <a:t>The world population passed 8 billion in 2022 and is about 8.2 billion today. Asia contains about 60 % of all people.</a:t>
+            </a:r>
+            <a:endParaRPr lang="en-US" sz="3600" dirty="0"/>
+          </a:p>
+        </p:txBody>
+      </p:sp>
       <p:pic>
         <p:nvPicPr>
-          <p:cNvPr id="3" name="Image 0" descr="/home/claude/f4/img/minesec_sheet.png">    </p:cNvPr>
+          <p:cNvPr id="5" name="Image 0" descr="/home/claude/f4/img/v2/pop2_trends.png">    </p:cNvPr>
           <p:cNvPicPr>
             <a:picLocks noChangeAspect="1"/>
           </p:cNvPicPr>
@@ -20668,8 +21252,8 @@
         </p:blipFill>
         <p:spPr>
           <a:xfrm>
-            <a:off x="0" y="658368"/>
-            <a:ext cx="2468880" cy="5833872"/>
+            <a:off x="6537960" y="2849678"/>
+            <a:ext cx="5470855" cy="2137053"/>
           </a:xfrm>
           <a:prstGeom prst="rect">
             <a:avLst/>
@@ -20678,14 +21262,14 @@
       </p:pic>
       <p:sp>
         <p:nvSpPr>
-          <p:cNvPr id="4" name="Text 1"/>
+          <p:cNvPr id="6" name="Text 3"/>
           <p:cNvSpPr/>
           <p:nvPr/>
         </p:nvSpPr>
         <p:spPr>
           <a:xfrm>
-            <a:off x="2697480" y="1005840"/>
-            <a:ext cx="9174175" cy="731520"/>
+            <a:off x="6537960" y="6089904"/>
+            <a:ext cx="5470855" cy="347472"/>
           </a:xfrm>
           <a:prstGeom prst="rect">
             <a:avLst/>
@@ -20694,85 +21278,24 @@
           <a:ln/>
         </p:spPr>
         <p:txBody>
-          <a:bodyPr wrap="square" lIns="0" tIns="0" rIns="0" bIns="0" rtlCol="0" anchor="ctr">
-            <a:normAutofit/>
-          </a:bodyPr>
+          <a:bodyPr wrap="square" lIns="0" tIns="0" rIns="0" bIns="0" rtlCol="0" anchor="ctr"/>
           <a:lstStyle/>
           <a:p>
             <a:pPr algn="ctr" indent="0" marL="0">
               <a:buNone/>
             </a:pPr>
             <a:r>
-              <a:rPr lang="en-US" sz="3600" b="1" dirty="0">
-                <a:solidFill>
-                  <a:srgbClr val="990011"/>
+              <a:rPr lang="en-US" sz="1600" i="1" dirty="0">
+                <a:solidFill>
+                  <a:srgbClr val="555555"/>
                 </a:solidFill>
                 <a:latin typeface="Times New Roman" pitchFamily="34" charset="0"/>
                 <a:ea typeface="Times New Roman" pitchFamily="34" charset="-122"/>
                 <a:cs typeface="Times New Roman" pitchFamily="34" charset="-120"/>
               </a:rPr>
-              <a:t>4. The Current State of the World Population</a:t>
-            </a:r>
-            <a:endParaRPr lang="en-US" sz="3600" dirty="0"/>
-          </a:p>
-        </p:txBody>
-      </p:sp>
-      <p:sp>
-        <p:nvSpPr>
-          <p:cNvPr id="5" name="Text 2"/>
-          <p:cNvSpPr/>
-          <p:nvPr/>
-        </p:nvSpPr>
-        <p:spPr>
-          <a:xfrm>
-            <a:off x="2697480" y="1783080"/>
-            <a:ext cx="9174175" cy="4663440"/>
-          </a:xfrm>
-          <a:prstGeom prst="rect">
-            <a:avLst/>
-          </a:prstGeom>
-          <a:noFill/>
-          <a:ln/>
-        </p:spPr>
-        <p:txBody>
-          <a:bodyPr wrap="square" lIns="0" tIns="0" rIns="0" bIns="0" rtlCol="0" anchor="t"/>
-          <a:lstStyle/>
-          <a:p>
-            <a:pPr algn="l" indent="0" marL="0">
-              <a:spcAft>
-                <a:spcPts val="800"/>
-              </a:spcAft>
-              <a:buNone/>
-            </a:pPr>
-            <a:r>
-              <a:rPr lang="en-US" sz="4000" b="1" dirty="0">
-                <a:solidFill>
-                  <a:srgbClr val="111111"/>
-                </a:solidFill>
-                <a:latin typeface="Times New Roman" pitchFamily="34" charset="0"/>
-                <a:ea typeface="Times New Roman" pitchFamily="34" charset="-122"/>
-                <a:cs typeface="Times New Roman" pitchFamily="34" charset="-120"/>
-              </a:rPr>
-              <a:t>Urbanisation and migration: </a:t>
-            </a:r>
-            <a:pPr algn="l" indent="0" marL="0">
-              <a:spcAft>
-                <a:spcPts val="800"/>
-              </a:spcAft>
-              <a:buNone/>
-            </a:pPr>
-            <a:r>
-              <a:rPr lang="en-US" sz="4000" dirty="0">
-                <a:solidFill>
-                  <a:srgbClr val="111111"/>
-                </a:solidFill>
-                <a:latin typeface="Times New Roman" pitchFamily="34" charset="0"/>
-                <a:ea typeface="Times New Roman" pitchFamily="34" charset="-122"/>
-                <a:cs typeface="Times New Roman" pitchFamily="34" charset="-120"/>
-              </a:rPr>
-              <a:t>About 57 % of the world population lives in towns, and cities grow fastest in Asia and Africa. Migration increases the population of receiving countries such as the USA and Germany and reduces that of sending countries.</a:t>
-            </a:r>
-            <a:endParaRPr lang="en-US" sz="4000" dirty="0"/>
+              <a:t>Illustration: world population trends</a:t>
+            </a:r>
+            <a:endParaRPr lang="en-US" sz="1600" dirty="0"/>
           </a:p>
         </p:txBody>
       </p:sp>
@@ -20882,7 +21405,7 @@
                 <a:ea typeface="Calibri" pitchFamily="34" charset="-122"/>
                 <a:cs typeface="Calibri" pitchFamily="34" charset="-120"/>
               </a:rPr>
-              <a:t>FORMATIVE EVALUATION</a:t>
+              <a:t>BOARD SUMMARY</a:t>
             </a:r>
             <a:endParaRPr lang="en-US" sz="1400" dirty="0"/>
           </a:p>
@@ -20947,7 +21470,7 @@
                 <a:ea typeface="Times New Roman" pitchFamily="34" charset="-122"/>
                 <a:cs typeface="Times New Roman" pitchFamily="34" charset="-120"/>
               </a:rPr>
-              <a:t>Evaluation 1</a:t>
+              <a:t>4. The Current State of the World Population</a:t>
             </a:r>
             <a:endParaRPr lang="en-US" sz="3600" dirty="0"/>
           </a:p>
@@ -20981,7 +21504,7 @@
               <a:buNone/>
             </a:pPr>
             <a:r>
-              <a:rPr lang="en-US" sz="4000" dirty="0">
+              <a:rPr lang="en-US" sz="4000" b="1" dirty="0">
                 <a:solidFill>
                   <a:srgbClr val="111111"/>
                 </a:solidFill>
@@ -20989,7 +21512,24 @@
                 <a:ea typeface="Times New Roman" pitchFamily="34" charset="-122"/>
                 <a:cs typeface="Times New Roman" pitchFamily="34" charset="-120"/>
               </a:rPr>
-              <a:t>Distinguish between the de facto and the de jure methods of census.</a:t>
+              <a:t>Slower growth: </a:t>
+            </a:r>
+            <a:pPr algn="l" indent="0" marL="0">
+              <a:spcAft>
+                <a:spcPts val="800"/>
+              </a:spcAft>
+              <a:buNone/>
+            </a:pPr>
+            <a:r>
+              <a:rPr lang="en-US" sz="4000" dirty="0">
+                <a:solidFill>
+                  <a:srgbClr val="111111"/>
+                </a:solidFill>
+                <a:latin typeface="Times New Roman" pitchFamily="34" charset="0"/>
+                <a:ea typeface="Times New Roman" pitchFamily="34" charset="-122"/>
+                <a:cs typeface="Times New Roman" pitchFamily="34" charset="-120"/>
+              </a:rPr>
+              <a:t>The population still grows by about 70 million people a year, but the growth rate is falling. It is expected to stop growing in the second half of this century.</a:t>
             </a:r>
             <a:endParaRPr lang="en-US" sz="4000" dirty="0"/>
           </a:p>
@@ -21101,15 +21641,115 @@
                 <a:ea typeface="Calibri" pitchFamily="34" charset="-122"/>
                 <a:cs typeface="Calibri" pitchFamily="34" charset="-120"/>
               </a:rPr>
-              <a:t>FORMATIVE EVALUATION</a:t>
+              <a:t>BOARD SUMMARY</a:t>
             </a:r>
             <a:endParaRPr lang="en-US" sz="1400" dirty="0"/>
+          </a:p>
+        </p:txBody>
+      </p:sp>
+      <p:sp>
+        <p:nvSpPr>
+          <p:cNvPr id="3" name="Text 1"/>
+          <p:cNvSpPr/>
+          <p:nvPr/>
+        </p:nvSpPr>
+        <p:spPr>
+          <a:xfrm>
+            <a:off x="365760" y="1005840"/>
+            <a:ext cx="11460175" cy="731520"/>
+          </a:xfrm>
+          <a:prstGeom prst="rect">
+            <a:avLst/>
+          </a:prstGeom>
+          <a:noFill/>
+          <a:ln/>
+        </p:spPr>
+        <p:txBody>
+          <a:bodyPr wrap="square" lIns="0" tIns="0" rIns="0" bIns="0" rtlCol="0" anchor="ctr">
+            <a:normAutofit/>
+          </a:bodyPr>
+          <a:lstStyle/>
+          <a:p>
+            <a:pPr algn="ctr" indent="0" marL="0">
+              <a:buNone/>
+            </a:pPr>
+            <a:r>
+              <a:rPr lang="en-US" sz="3600" b="1" dirty="0">
+                <a:solidFill>
+                  <a:srgbClr val="990011"/>
+                </a:solidFill>
+                <a:latin typeface="Times New Roman" pitchFamily="34" charset="0"/>
+                <a:ea typeface="Times New Roman" pitchFamily="34" charset="-122"/>
+                <a:cs typeface="Times New Roman" pitchFamily="34" charset="-120"/>
+              </a:rPr>
+              <a:t>4. The Current State of the World Population</a:t>
+            </a:r>
+            <a:endParaRPr lang="en-US" sz="3600" dirty="0"/>
+          </a:p>
+        </p:txBody>
+      </p:sp>
+      <p:sp>
+        <p:nvSpPr>
+          <p:cNvPr id="4" name="Text 2"/>
+          <p:cNvSpPr/>
+          <p:nvPr/>
+        </p:nvSpPr>
+        <p:spPr>
+          <a:xfrm>
+            <a:off x="365760" y="1783080"/>
+            <a:ext cx="6035040" cy="4617720"/>
+          </a:xfrm>
+          <a:prstGeom prst="rect">
+            <a:avLst/>
+          </a:prstGeom>
+          <a:noFill/>
+          <a:ln/>
+        </p:spPr>
+        <p:txBody>
+          <a:bodyPr wrap="square" lIns="0" tIns="0" rIns="0" bIns="0" rtlCol="0" anchor="t"/>
+          <a:lstStyle/>
+          <a:p>
+            <a:pPr algn="l" indent="0" marL="0">
+              <a:spcAft>
+                <a:spcPts val="800"/>
+              </a:spcAft>
+              <a:buNone/>
+            </a:pPr>
+            <a:r>
+              <a:rPr lang="en-US" sz="3600" b="1" dirty="0">
+                <a:solidFill>
+                  <a:srgbClr val="111111"/>
+                </a:solidFill>
+                <a:latin typeface="Times New Roman" pitchFamily="34" charset="0"/>
+                <a:ea typeface="Times New Roman" pitchFamily="34" charset="-122"/>
+                <a:cs typeface="Times New Roman" pitchFamily="34" charset="-120"/>
+              </a:rPr>
+              <a:t>Contrasts: </a:t>
+            </a:r>
+            <a:pPr algn="l" indent="0" marL="0">
+              <a:spcAft>
+                <a:spcPts val="800"/>
+              </a:spcAft>
+              <a:buNone/>
+            </a:pPr>
+            <a:r>
+              <a:rPr lang="en-US" sz="3600" dirty="0">
+                <a:solidFill>
+                  <a:srgbClr val="111111"/>
+                </a:solidFill>
+                <a:latin typeface="Times New Roman" pitchFamily="34" charset="0"/>
+                <a:ea typeface="Times New Roman" pitchFamily="34" charset="-122"/>
+                <a:cs typeface="Times New Roman" pitchFamily="34" charset="-120"/>
+              </a:rPr>
+              <a:t>Developed countries have low birth rates and ageing populations. Developing countries, especially in Africa, have high birth rates and young populations.</a:t>
+            </a:r>
+            <a:endParaRPr lang="en-US" sz="3600" dirty="0"/>
           </a:p>
         </p:txBody>
       </p:sp>
       <p:pic>
         <p:nvPicPr>
-          <p:cNvPr id="3" name="Image 0" descr="/home/claude/f4/img/minesec_sheet.png">    </p:cNvPr>
+          <p:cNvPr id="5" name="Image 0" descr="/home/claude/f4/img/v2/world_pop_big.png">    </p:cNvPr>
           <p:cNvPicPr>
             <a:picLocks noChangeAspect="1"/>
           </p:cNvPicPr>
@@ -21123,8 +21763,8 @@
         </p:blipFill>
         <p:spPr>
           <a:xfrm>
-            <a:off x="0" y="658368"/>
-            <a:ext cx="5120640" cy="5833872"/>
+            <a:off x="6537960" y="2721454"/>
+            <a:ext cx="5470855" cy="2393499"/>
           </a:xfrm>
           <a:prstGeom prst="rect">
             <a:avLst/>
@@ -21133,14 +21773,14 @@
       </p:pic>
       <p:sp>
         <p:nvSpPr>
-          <p:cNvPr id="4" name="Text 1"/>
+          <p:cNvPr id="6" name="Text 3"/>
           <p:cNvSpPr/>
           <p:nvPr/>
         </p:nvSpPr>
         <p:spPr>
           <a:xfrm>
-            <a:off x="5349240" y="1005840"/>
-            <a:ext cx="6522415" cy="731520"/>
+            <a:off x="6537960" y="6089904"/>
+            <a:ext cx="5470855" cy="347472"/>
           </a:xfrm>
           <a:prstGeom prst="rect">
             <a:avLst/>
@@ -21149,68 +21789,24 @@
           <a:ln/>
         </p:spPr>
         <p:txBody>
-          <a:bodyPr wrap="square" lIns="0" tIns="0" rIns="0" bIns="0" rtlCol="0" anchor="ctr">
-            <a:normAutofit/>
-          </a:bodyPr>
+          <a:bodyPr wrap="square" lIns="0" tIns="0" rIns="0" bIns="0" rtlCol="0" anchor="ctr"/>
           <a:lstStyle/>
           <a:p>
             <a:pPr algn="ctr" indent="0" marL="0">
               <a:buNone/>
             </a:pPr>
             <a:r>
-              <a:rPr lang="en-US" sz="3600" b="1" dirty="0">
-                <a:solidFill>
-                  <a:srgbClr val="990011"/>
+              <a:rPr lang="en-US" sz="1600" i="1" dirty="0">
+                <a:solidFill>
+                  <a:srgbClr val="555555"/>
                 </a:solidFill>
                 <a:latin typeface="Times New Roman" pitchFamily="34" charset="0"/>
                 <a:ea typeface="Times New Roman" pitchFamily="34" charset="-122"/>
                 <a:cs typeface="Times New Roman" pitchFamily="34" charset="-120"/>
               </a:rPr>
-              <a:t>Expected Answer</a:t>
-            </a:r>
-            <a:endParaRPr lang="en-US" sz="3600" dirty="0"/>
-          </a:p>
-        </p:txBody>
-      </p:sp>
-      <p:sp>
-        <p:nvSpPr>
-          <p:cNvPr id="5" name="Text 2"/>
-          <p:cNvSpPr/>
-          <p:nvPr/>
-        </p:nvSpPr>
-        <p:spPr>
-          <a:xfrm>
-            <a:off x="5349240" y="1783080"/>
-            <a:ext cx="6522415" cy="4663440"/>
-          </a:xfrm>
-          <a:prstGeom prst="rect">
-            <a:avLst/>
-          </a:prstGeom>
-          <a:noFill/>
-          <a:ln/>
-        </p:spPr>
-        <p:txBody>
-          <a:bodyPr wrap="square" lIns="0" tIns="0" rIns="0" bIns="0" rtlCol="0" anchor="t"/>
-          <a:lstStyle/>
-          <a:p>
-            <a:pPr algn="l" indent="0" marL="0">
-              <a:spcAft>
-                <a:spcPts val="800"/>
-              </a:spcAft>
-              <a:buNone/>
-            </a:pPr>
-            <a:r>
-              <a:rPr lang="en-US" sz="4000" dirty="0">
-                <a:solidFill>
-                  <a:srgbClr val="111111"/>
-                </a:solidFill>
-                <a:latin typeface="Times New Roman" pitchFamily="34" charset="0"/>
-                <a:ea typeface="Times New Roman" pitchFamily="34" charset="-122"/>
-                <a:cs typeface="Times New Roman" pitchFamily="34" charset="-120"/>
-              </a:rPr>
-              <a:t>The de facto method counts people where they are on census night; the de jure method counts them at their usual residence.</a:t>
-            </a:r>
-            <a:endParaRPr lang="en-US" sz="4000" dirty="0"/>
+              <a:t>Illustration: world population</a:t>
+            </a:r>
+            <a:endParaRPr lang="en-US" sz="1600" dirty="0"/>
           </a:p>
         </p:txBody>
       </p:sp>
@@ -21320,7 +21916,7 @@
                 <a:ea typeface="Calibri" pitchFamily="34" charset="-122"/>
                 <a:cs typeface="Calibri" pitchFamily="34" charset="-120"/>
               </a:rPr>
-              <a:t>FORMATIVE EVALUATION</a:t>
+              <a:t>BOARD SUMMARY</a:t>
             </a:r>
             <a:endParaRPr lang="en-US" sz="1400" dirty="0"/>
           </a:p>
@@ -21343,7 +21939,7 @@
         <p:spPr>
           <a:xfrm>
             <a:off x="0" y="658368"/>
-            <a:ext cx="5120640" cy="5833872"/>
+            <a:ext cx="2468880" cy="5833872"/>
           </a:xfrm>
           <a:prstGeom prst="rect">
             <a:avLst/>
@@ -21358,8 +21954,8 @@
         </p:nvSpPr>
         <p:spPr>
           <a:xfrm>
-            <a:off x="5349240" y="1005840"/>
-            <a:ext cx="6522415" cy="731520"/>
+            <a:off x="2697480" y="1005840"/>
+            <a:ext cx="9174175" cy="731520"/>
           </a:xfrm>
           <a:prstGeom prst="rect">
             <a:avLst/>
@@ -21385,7 +21981,7 @@
                 <a:ea typeface="Times New Roman" pitchFamily="34" charset="-122"/>
                 <a:cs typeface="Times New Roman" pitchFamily="34" charset="-120"/>
               </a:rPr>
-              <a:t>Evaluation 2</a:t>
+              <a:t>4. The Current State of the World Population</a:t>
             </a:r>
             <a:endParaRPr lang="en-US" sz="3600" dirty="0"/>
           </a:p>
@@ -21399,8 +21995,8 @@
         </p:nvSpPr>
         <p:spPr>
           <a:xfrm>
-            <a:off x="5349240" y="1783080"/>
-            <a:ext cx="6522415" cy="4663440"/>
+            <a:off x="2697480" y="1783080"/>
+            <a:ext cx="9174175" cy="4663440"/>
           </a:xfrm>
           <a:prstGeom prst="rect">
             <a:avLst/>
@@ -21419,7 +22015,7 @@
               <a:buNone/>
             </a:pPr>
             <a:r>
-              <a:rPr lang="en-US" sz="4000" dirty="0">
+              <a:rPr lang="en-US" sz="4000" b="1" dirty="0">
                 <a:solidFill>
                   <a:srgbClr val="111111"/>
                 </a:solidFill>
@@ -21427,7 +22023,24 @@
                 <a:ea typeface="Times New Roman" pitchFamily="34" charset="-122"/>
                 <a:cs typeface="Times New Roman" pitchFamily="34" charset="-120"/>
               </a:rPr>
-              <a:t>Give two reasons why vital registration is incomplete in Cameroon.</a:t>
+              <a:t>Urbanisation and migration: </a:t>
+            </a:r>
+            <a:pPr algn="l" indent="0" marL="0">
+              <a:spcAft>
+                <a:spcPts val="800"/>
+              </a:spcAft>
+              <a:buNone/>
+            </a:pPr>
+            <a:r>
+              <a:rPr lang="en-US" sz="4000" dirty="0">
+                <a:solidFill>
+                  <a:srgbClr val="111111"/>
+                </a:solidFill>
+                <a:latin typeface="Times New Roman" pitchFamily="34" charset="0"/>
+                <a:ea typeface="Times New Roman" pitchFamily="34" charset="-122"/>
+                <a:cs typeface="Times New Roman" pitchFamily="34" charset="-120"/>
+              </a:rPr>
+              <a:t>About 57 % of the world population lives in towns, and cities grow fastest in Asia and Africa. Migration increases the population of receiving countries such as the USA and Germany and reduces that of sending countries.</a:t>
             </a:r>
             <a:endParaRPr lang="en-US" sz="4000" dirty="0"/>
           </a:p>
@@ -21604,7 +22217,7 @@
                 <a:ea typeface="Times New Roman" pitchFamily="34" charset="-122"/>
                 <a:cs typeface="Times New Roman" pitchFamily="34" charset="-120"/>
               </a:rPr>
-              <a:t>Expected Answer</a:t>
+              <a:t>Evaluation 1</a:t>
             </a:r>
             <a:endParaRPr lang="en-US" sz="3600" dirty="0"/>
           </a:p>
@@ -21646,7 +22259,7 @@
                 <a:ea typeface="Times New Roman" pitchFamily="34" charset="-122"/>
                 <a:cs typeface="Times New Roman" pitchFamily="34" charset="-120"/>
               </a:rPr>
-              <a:t>Many births take place at home far from civil status offices, and many people do not know the importance of declaring births and deaths.</a:t>
+              <a:t>Distinguish between the de facto and the de jure methods of census.</a:t>
             </a:r>
             <a:endParaRPr lang="en-US" sz="4000" dirty="0"/>
           </a:p>
@@ -21758,7 +22371,7 @@
                 <a:ea typeface="Calibri" pitchFamily="34" charset="-122"/>
                 <a:cs typeface="Calibri" pitchFamily="34" charset="-120"/>
               </a:rPr>
-              <a:t>REMEDIATION</a:t>
+              <a:t>FORMATIVE EVALUATION</a:t>
             </a:r>
             <a:endParaRPr lang="en-US" sz="1400" dirty="0"/>
           </a:p>
@@ -21823,7 +22436,7 @@
                 <a:ea typeface="Times New Roman" pitchFamily="34" charset="-122"/>
                 <a:cs typeface="Times New Roman" pitchFamily="34" charset="-120"/>
               </a:rPr>
-              <a:t>Remediation</a:t>
+              <a:t>Expected Answer</a:t>
             </a:r>
             <a:endParaRPr lang="en-US" sz="3600" dirty="0"/>
           </a:p>
@@ -21857,7 +22470,7 @@
               <a:buNone/>
             </a:pPr>
             <a:r>
-              <a:rPr lang="en-US" sz="4000" b="1" dirty="0">
+              <a:rPr lang="en-US" sz="4000" dirty="0">
                 <a:solidFill>
                   <a:srgbClr val="111111"/>
                 </a:solidFill>
@@ -21865,51 +22478,7 @@
                 <a:ea typeface="Times New Roman" pitchFamily="34" charset="-122"/>
                 <a:cs typeface="Times New Roman" pitchFamily="34" charset="-120"/>
               </a:rPr>
-              <a:t>Fill in the blanks:</a:t>
-            </a:r>
-            <a:endParaRPr lang="en-US" sz="4000" dirty="0"/>
-          </a:p>
-          <a:p>
-            <a:pPr algn="l" marL="342900" indent="-342900">
-              <a:spcAft>
-                <a:spcPts val="800"/>
-              </a:spcAft>
-              <a:buSzPct val="100000"/>
-              <a:buFont typeface="+mj-lt"/>
-              <a:buAutoNum type="arabicPeriod" startAt="1"/>
-            </a:pPr>
-            <a:r>
-              <a:rPr lang="en-US" sz="4000" dirty="0">
-                <a:solidFill>
-                  <a:srgbClr val="111111"/>
-                </a:solidFill>
-                <a:latin typeface="Times New Roman" pitchFamily="34" charset="0"/>
-                <a:ea typeface="Times New Roman" pitchFamily="34" charset="-122"/>
-                <a:cs typeface="Times New Roman" pitchFamily="34" charset="-120"/>
-              </a:rPr>
-              <a:t>A ______ counts every person of a country at a given time.</a:t>
-            </a:r>
-            <a:endParaRPr lang="en-US" sz="4000" dirty="0"/>
-          </a:p>
-          <a:p>
-            <a:pPr algn="l" marL="342900" indent="-342900">
-              <a:spcAft>
-                <a:spcPts val="800"/>
-              </a:spcAft>
-              <a:buSzPct val="100000"/>
-              <a:buFont typeface="+mj-lt"/>
-              <a:buAutoNum type="arabicPeriod" startAt="1"/>
-            </a:pPr>
-            <a:r>
-              <a:rPr lang="en-US" sz="4000" dirty="0">
-                <a:solidFill>
-                  <a:srgbClr val="111111"/>
-                </a:solidFill>
-                <a:latin typeface="Times New Roman" pitchFamily="34" charset="0"/>
-                <a:ea typeface="Times New Roman" pitchFamily="34" charset="-122"/>
-                <a:cs typeface="Times New Roman" pitchFamily="34" charset="-120"/>
-              </a:rPr>
-              <a:t>Births and deaths are recorded by ______ registration.</a:t>
+              <a:t>The de facto method counts people where they are on census night; the de jure method counts them at their usual residence.</a:t>
             </a:r>
             <a:endParaRPr lang="en-US" sz="4000" dirty="0"/>
           </a:p>
@@ -22286,7 +22855,7 @@
                 <a:ea typeface="Calibri" pitchFamily="34" charset="-122"/>
                 <a:cs typeface="Calibri" pitchFamily="34" charset="-120"/>
               </a:rPr>
-              <a:t>REMEDIATION</a:t>
+              <a:t>FORMATIVE EVALUATION</a:t>
             </a:r>
             <a:endParaRPr lang="en-US" sz="1400" dirty="0"/>
           </a:p>
@@ -22351,7 +22920,7 @@
                 <a:ea typeface="Times New Roman" pitchFamily="34" charset="-122"/>
                 <a:cs typeface="Times New Roman" pitchFamily="34" charset="-120"/>
               </a:rPr>
-              <a:t>Remediation (continued)</a:t>
+              <a:t>Evaluation 2</a:t>
             </a:r>
             <a:endParaRPr lang="en-US" sz="3600" dirty="0"/>
           </a:p>
@@ -22378,13 +22947,11 @@
           <a:bodyPr wrap="square" lIns="0" tIns="0" rIns="0" bIns="0" rtlCol="0" anchor="t"/>
           <a:lstStyle/>
           <a:p>
-            <a:pPr algn="l" marL="342900" indent="-342900">
+            <a:pPr algn="l" indent="0" marL="0">
               <a:spcAft>
                 <a:spcPts val="800"/>
               </a:spcAft>
-              <a:buSzPct val="100000"/>
-              <a:buFont typeface="+mj-lt"/>
-              <a:buAutoNum type="arabicPeriod" startAt="1"/>
+              <a:buNone/>
             </a:pPr>
             <a:r>
               <a:rPr lang="en-US" sz="4000" dirty="0">
@@ -22395,7 +22962,7 @@
                 <a:ea typeface="Times New Roman" pitchFamily="34" charset="-122"/>
                 <a:cs typeface="Times New Roman" pitchFamily="34" charset="-120"/>
               </a:rPr>
-              <a:t>The last census of Cameroon took place in ______.</a:t>
+              <a:t>Give two reasons why vital registration is incomplete in Cameroon.</a:t>
             </a:r>
             <a:endParaRPr lang="en-US" sz="4000" dirty="0"/>
           </a:p>
@@ -22507,7 +23074,7 @@
                 <a:ea typeface="Calibri" pitchFamily="34" charset="-122"/>
                 <a:cs typeface="Calibri" pitchFamily="34" charset="-120"/>
               </a:rPr>
-              <a:t>HOMEWORK</a:t>
+              <a:t>FORMATIVE EVALUATION</a:t>
             </a:r>
             <a:endParaRPr lang="en-US" sz="1400" dirty="0"/>
           </a:p>
@@ -22572,7 +23139,7 @@
                 <a:ea typeface="Times New Roman" pitchFamily="34" charset="-122"/>
                 <a:cs typeface="Times New Roman" pitchFamily="34" charset="-120"/>
               </a:rPr>
-              <a:t>Homework</a:t>
+              <a:t>Expected Answer</a:t>
             </a:r>
             <a:endParaRPr lang="en-US" sz="3600" dirty="0"/>
           </a:p>
@@ -22614,7 +23181,7 @@
                 <a:ea typeface="Times New Roman" pitchFamily="34" charset="-122"/>
                 <a:cs typeface="Times New Roman" pitchFamily="34" charset="-120"/>
               </a:rPr>
-              <a:t>Define population density.</a:t>
+              <a:t>Many births take place at home far from civil status offices, and many people do not know the importance of declaring births and deaths.</a:t>
             </a:r>
             <a:endParaRPr lang="en-US" sz="4000" dirty="0"/>
           </a:p>
@@ -22726,7 +23293,7 @@
                 <a:ea typeface="Calibri" pitchFamily="34" charset="-122"/>
                 <a:cs typeface="Calibri" pitchFamily="34" charset="-120"/>
               </a:rPr>
-              <a:t>NEXT LESSON</a:t>
+              <a:t>REMEDIATION</a:t>
             </a:r>
             <a:endParaRPr lang="en-US" sz="1400" dirty="0"/>
           </a:p>
@@ -22791,7 +23358,7 @@
                 <a:ea typeface="Times New Roman" pitchFamily="34" charset="-122"/>
                 <a:cs typeface="Times New Roman" pitchFamily="34" charset="-120"/>
               </a:rPr>
-              <a:t>Next Lesson</a:t>
+              <a:t>Remediation</a:t>
             </a:r>
             <a:endParaRPr lang="en-US" sz="3600" dirty="0"/>
           </a:p>
@@ -22815,10 +23382,10 @@
           <a:ln/>
         </p:spPr>
         <p:txBody>
-          <a:bodyPr wrap="square" lIns="0" tIns="0" rIns="0" bIns="0" rtlCol="0" anchor="ctr"/>
-          <a:lstStyle/>
-          <a:p>
-            <a:pPr algn="ctr" indent="0" marL="0">
+          <a:bodyPr wrap="square" lIns="0" tIns="0" rIns="0" bIns="0" rtlCol="0" anchor="t"/>
+          <a:lstStyle/>
+          <a:p>
+            <a:pPr algn="l" indent="0" marL="0">
               <a:spcAft>
                 <a:spcPts val="800"/>
               </a:spcAft>
@@ -22833,27 +23400,51 @@
                 <a:ea typeface="Times New Roman" pitchFamily="34" charset="-122"/>
                 <a:cs typeface="Times New Roman" pitchFamily="34" charset="-120"/>
               </a:rPr>
-              <a:t>Our next lesson will be on:</a:t>
+              <a:t>Fill in the blanks:</a:t>
             </a:r>
             <a:endParaRPr lang="en-US" sz="4000" dirty="0"/>
           </a:p>
           <a:p>
-            <a:pPr algn="ctr" indent="0" marL="0">
+            <a:pPr algn="l" marL="342900" indent="-342900">
               <a:spcAft>
                 <a:spcPts val="800"/>
               </a:spcAft>
-              <a:buNone/>
-            </a:pPr>
-            <a:r>
-              <a:rPr lang="en-US" sz="4000" b="1" dirty="0">
-                <a:solidFill>
-                  <a:srgbClr val="990011"/>
+              <a:buSzPct val="100000"/>
+              <a:buFont typeface="+mj-lt"/>
+              <a:buAutoNum type="arabicPeriod" startAt="1"/>
+            </a:pPr>
+            <a:r>
+              <a:rPr lang="en-US" sz="4000" dirty="0">
+                <a:solidFill>
+                  <a:srgbClr val="111111"/>
                 </a:solidFill>
                 <a:latin typeface="Times New Roman" pitchFamily="34" charset="0"/>
                 <a:ea typeface="Times New Roman" pitchFamily="34" charset="-122"/>
                 <a:cs typeface="Times New Roman" pitchFamily="34" charset="-120"/>
               </a:rPr>
-              <a:t>Lesson 2: Population Distribution and Density</a:t>
+              <a:t>A ______ counts every person of a country at a given time.</a:t>
+            </a:r>
+            <a:endParaRPr lang="en-US" sz="4000" dirty="0"/>
+          </a:p>
+          <a:p>
+            <a:pPr algn="l" marL="342900" indent="-342900">
+              <a:spcAft>
+                <a:spcPts val="800"/>
+              </a:spcAft>
+              <a:buSzPct val="100000"/>
+              <a:buFont typeface="+mj-lt"/>
+              <a:buAutoNum type="arabicPeriod" startAt="1"/>
+            </a:pPr>
+            <a:r>
+              <a:rPr lang="en-US" sz="4000" dirty="0">
+                <a:solidFill>
+                  <a:srgbClr val="111111"/>
+                </a:solidFill>
+                <a:latin typeface="Times New Roman" pitchFamily="34" charset="0"/>
+                <a:ea typeface="Times New Roman" pitchFamily="34" charset="-122"/>
+                <a:cs typeface="Times New Roman" pitchFamily="34" charset="-120"/>
+              </a:rPr>
+              <a:t>Births and deaths are recorded by ______ registration.</a:t>
             </a:r>
             <a:endParaRPr lang="en-US" sz="4000" dirty="0"/>
           </a:p>
@@ -22965,22 +23556,46 @@
                 <a:ea typeface="Calibri" pitchFamily="34" charset="-122"/>
                 <a:cs typeface="Calibri" pitchFamily="34" charset="-120"/>
               </a:rPr>
-              <a:t>BILINGUAL GAME</a:t>
+              <a:t>REMEDIATION</a:t>
             </a:r>
             <a:endParaRPr lang="en-US" sz="1400" dirty="0"/>
           </a:p>
         </p:txBody>
       </p:sp>
-      <p:sp>
-        <p:nvSpPr>
-          <p:cNvPr id="3" name="Text 1"/>
+      <p:pic>
+        <p:nvPicPr>
+          <p:cNvPr id="3" name="Image 0" descr="/home/claude/f4/img/minesec_sheet.png">    </p:cNvPr>
+          <p:cNvPicPr>
+            <a:picLocks noChangeAspect="1"/>
+          </p:cNvPicPr>
+          <p:nvPr/>
+        </p:nvPicPr>
+        <p:blipFill>
+          <a:blip r:embed="rId1"/>
+          <a:stretch>
+            <a:fillRect/>
+          </a:stretch>
+        </p:blipFill>
+        <p:spPr>
+          <a:xfrm>
+            <a:off x="0" y="658368"/>
+            <a:ext cx="5120640" cy="5833872"/>
+          </a:xfrm>
+          <a:prstGeom prst="rect">
+            <a:avLst/>
+          </a:prstGeom>
+        </p:spPr>
+      </p:pic>
+      <p:sp>
+        <p:nvSpPr>
+          <p:cNvPr id="4" name="Text 1"/>
           <p:cNvSpPr/>
           <p:nvPr/>
         </p:nvSpPr>
         <p:spPr>
           <a:xfrm>
-            <a:off x="457200" y="1005840"/>
-            <a:ext cx="11277295" cy="731520"/>
+            <a:off x="5349240" y="1005840"/>
+            <a:ext cx="6522415" cy="731520"/>
           </a:xfrm>
           <a:prstGeom prst="rect">
             <a:avLst/>
@@ -22989,7 +23604,9 @@
           <a:ln/>
         </p:spPr>
         <p:txBody>
-          <a:bodyPr wrap="square" lIns="0" tIns="0" rIns="0" bIns="0" rtlCol="0" anchor="ctr"/>
+          <a:bodyPr wrap="square" lIns="0" tIns="0" rIns="0" bIns="0" rtlCol="0" anchor="ctr">
+            <a:normAutofit/>
+          </a:bodyPr>
           <a:lstStyle/>
           <a:p>
             <a:pPr algn="ctr" indent="0" marL="0">
@@ -23004,6 +23621,659 @@
                 <a:ea typeface="Times New Roman" pitchFamily="34" charset="-122"/>
                 <a:cs typeface="Times New Roman" pitchFamily="34" charset="-120"/>
               </a:rPr>
+              <a:t>Remediation (continued)</a:t>
+            </a:r>
+            <a:endParaRPr lang="en-US" sz="3600" dirty="0"/>
+          </a:p>
+        </p:txBody>
+      </p:sp>
+      <p:sp>
+        <p:nvSpPr>
+          <p:cNvPr id="5" name="Text 2"/>
+          <p:cNvSpPr/>
+          <p:nvPr/>
+        </p:nvSpPr>
+        <p:spPr>
+          <a:xfrm>
+            <a:off x="5349240" y="1783080"/>
+            <a:ext cx="6522415" cy="4663440"/>
+          </a:xfrm>
+          <a:prstGeom prst="rect">
+            <a:avLst/>
+          </a:prstGeom>
+          <a:noFill/>
+          <a:ln/>
+        </p:spPr>
+        <p:txBody>
+          <a:bodyPr wrap="square" lIns="0" tIns="0" rIns="0" bIns="0" rtlCol="0" anchor="t"/>
+          <a:lstStyle/>
+          <a:p>
+            <a:pPr algn="l" marL="342900" indent="-342900">
+              <a:spcAft>
+                <a:spcPts val="800"/>
+              </a:spcAft>
+              <a:buSzPct val="100000"/>
+              <a:buFont typeface="+mj-lt"/>
+              <a:buAutoNum type="arabicPeriod" startAt="1"/>
+            </a:pPr>
+            <a:r>
+              <a:rPr lang="en-US" sz="4000" dirty="0">
+                <a:solidFill>
+                  <a:srgbClr val="111111"/>
+                </a:solidFill>
+                <a:latin typeface="Times New Roman" pitchFamily="34" charset="0"/>
+                <a:ea typeface="Times New Roman" pitchFamily="34" charset="-122"/>
+                <a:cs typeface="Times New Roman" pitchFamily="34" charset="-120"/>
+              </a:rPr>
+              <a:t>The last census of Cameroon took place in ______.</a:t>
+            </a:r>
+            <a:endParaRPr lang="en-US" sz="4000" dirty="0"/>
+          </a:p>
+        </p:txBody>
+      </p:sp>
+      <p:sp>
+        <p:nvSpPr>
+          <p:cNvPr id="25" name="Slide Number Placeholder 0"/>
+          <p:cNvSpPr>
+            <a:spLocks noGrp="1"/>
+          </p:cNvSpPr>
+          <p:nvPr>
+            <p:ph type="sldNum" sz="quarter" idx="4294967295"/>
+          </p:nvPr>
+        </p:nvSpPr>
+        <p:spPr>
+          <a:xfrm>
+            <a:off x="27432" y="91440"/>
+            <a:ext cx="585216" cy="475488"/>
+          </a:xfrm>
+          <a:prstGeom prst="rect">
+            <a:avLst/>
+          </a:prstGeom>
+          <a:extLst>
+            <a:ext uri="{C572A759-6A51-4108-AA02-DFA0A04FC94B}">
+              <ma14:wrappingTextBoxFlag xmlns:ma14="http://schemas.microsoft.com/office/mac/drawingml/2011/main" val="0"/>
+            </a:ext>
+          </a:extLst>
+        </p:spPr>
+        <p:txBody>
+          <a:bodyPr/>
+          <a:lstStyle>
+            <a:lvl1pPr>
+              <a:defRPr sz="2000">
+                <a:solidFill>
+                  <a:srgbClr val="FFFFFF"/>
+                </a:solidFill>
+                <a:latin typeface="Calibri"/>
+                <a:ea typeface="Calibri"/>
+                <a:cs typeface="Calibri"/>
+              </a:defRPr>
+            </a:lvl1pPr>
+          </a:lstStyle>
+          <a:p>
+            <a:pPr algn="ctr"/>
+            <a:fld id="{F7021451-1387-4CA6-816F-3879F97B5CBC}" type="slidenum">
+              <a:rPr b="1" lang="en-US"/>
+              <a:t>63</a:t>
+            </a:fld>
+            <a:endParaRPr lang="en-US"/>
+          </a:p>
+        </p:txBody>
+      </p:sp>
+    </p:spTree>
+  </p:cSld>
+  <p:clrMapOvr>
+    <a:masterClrMapping/>
+  </p:clrMapOvr>
+</p:sld>
+</file>
+
+<file path=ppt/slides/slide64.xml><?xml version="1.0" encoding="utf-8"?>
+<p:sld xmlns:a="http://schemas.openxmlformats.org/drawingml/2006/main" xmlns:r="http://schemas.openxmlformats.org/officeDocument/2006/relationships" xmlns:p="http://schemas.openxmlformats.org/presentationml/2006/main">
+  <p:cSld name="Slide 64">
+    <p:spTree>
+      <p:nvGrpSpPr>
+        <p:cNvPr id="1" name=""/>
+        <p:cNvGrpSpPr/>
+        <p:nvPr/>
+      </p:nvGrpSpPr>
+      <p:grpSpPr>
+        <a:xfrm>
+          <a:off x="0" y="0"/>
+          <a:ext cx="0" cy="0"/>
+          <a:chOff x="0" y="0"/>
+          <a:chExt cx="0" cy="0"/>
+        </a:xfrm>
+      </p:grpSpPr>
+      <p:sp>
+        <p:nvSpPr>
+          <p:cNvPr id="2" name="Text 0"/>
+          <p:cNvSpPr/>
+          <p:nvPr/>
+        </p:nvSpPr>
+        <p:spPr>
+          <a:xfrm>
+            <a:off x="457200" y="713232"/>
+            <a:ext cx="11368735" cy="274320"/>
+          </a:xfrm>
+          <a:prstGeom prst="rect">
+            <a:avLst/>
+          </a:prstGeom>
+          <a:noFill/>
+          <a:ln/>
+        </p:spPr>
+        <p:txBody>
+          <a:bodyPr wrap="square" lIns="0" tIns="0" rIns="0" bIns="0" rtlCol="0" anchor="ctr"/>
+          <a:lstStyle/>
+          <a:p>
+            <a:pPr algn="r" indent="0" marL="0">
+              <a:buNone/>
+            </a:pPr>
+            <a:r>
+              <a:rPr lang="en-US" sz="1400" b="1" dirty="0">
+                <a:solidFill>
+                  <a:srgbClr val="1C3F6E"/>
+                </a:solidFill>
+                <a:latin typeface="Calibri" pitchFamily="34" charset="0"/>
+                <a:ea typeface="Calibri" pitchFamily="34" charset="-122"/>
+                <a:cs typeface="Calibri" pitchFamily="34" charset="-120"/>
+              </a:rPr>
+              <a:t>HOMEWORK</a:t>
+            </a:r>
+            <a:endParaRPr lang="en-US" sz="1400" dirty="0"/>
+          </a:p>
+        </p:txBody>
+      </p:sp>
+      <p:pic>
+        <p:nvPicPr>
+          <p:cNvPr id="3" name="Image 0" descr="/home/claude/f4/img/minesec_sheet.png">    </p:cNvPr>
+          <p:cNvPicPr>
+            <a:picLocks noChangeAspect="1"/>
+          </p:cNvPicPr>
+          <p:nvPr/>
+        </p:nvPicPr>
+        <p:blipFill>
+          <a:blip r:embed="rId1"/>
+          <a:stretch>
+            <a:fillRect/>
+          </a:stretch>
+        </p:blipFill>
+        <p:spPr>
+          <a:xfrm>
+            <a:off x="0" y="658368"/>
+            <a:ext cx="5120640" cy="5833872"/>
+          </a:xfrm>
+          <a:prstGeom prst="rect">
+            <a:avLst/>
+          </a:prstGeom>
+        </p:spPr>
+      </p:pic>
+      <p:sp>
+        <p:nvSpPr>
+          <p:cNvPr id="4" name="Text 1"/>
+          <p:cNvSpPr/>
+          <p:nvPr/>
+        </p:nvSpPr>
+        <p:spPr>
+          <a:xfrm>
+            <a:off x="5349240" y="1005840"/>
+            <a:ext cx="6522415" cy="731520"/>
+          </a:xfrm>
+          <a:prstGeom prst="rect">
+            <a:avLst/>
+          </a:prstGeom>
+          <a:noFill/>
+          <a:ln/>
+        </p:spPr>
+        <p:txBody>
+          <a:bodyPr wrap="square" lIns="0" tIns="0" rIns="0" bIns="0" rtlCol="0" anchor="ctr">
+            <a:normAutofit/>
+          </a:bodyPr>
+          <a:lstStyle/>
+          <a:p>
+            <a:pPr algn="ctr" indent="0" marL="0">
+              <a:buNone/>
+            </a:pPr>
+            <a:r>
+              <a:rPr lang="en-US" sz="3600" b="1" dirty="0">
+                <a:solidFill>
+                  <a:srgbClr val="990011"/>
+                </a:solidFill>
+                <a:latin typeface="Times New Roman" pitchFamily="34" charset="0"/>
+                <a:ea typeface="Times New Roman" pitchFamily="34" charset="-122"/>
+                <a:cs typeface="Times New Roman" pitchFamily="34" charset="-120"/>
+              </a:rPr>
+              <a:t>Homework</a:t>
+            </a:r>
+            <a:endParaRPr lang="en-US" sz="3600" dirty="0"/>
+          </a:p>
+        </p:txBody>
+      </p:sp>
+      <p:sp>
+        <p:nvSpPr>
+          <p:cNvPr id="5" name="Text 2"/>
+          <p:cNvSpPr/>
+          <p:nvPr/>
+        </p:nvSpPr>
+        <p:spPr>
+          <a:xfrm>
+            <a:off x="5349240" y="1783080"/>
+            <a:ext cx="6522415" cy="4663440"/>
+          </a:xfrm>
+          <a:prstGeom prst="rect">
+            <a:avLst/>
+          </a:prstGeom>
+          <a:noFill/>
+          <a:ln/>
+        </p:spPr>
+        <p:txBody>
+          <a:bodyPr wrap="square" lIns="0" tIns="0" rIns="0" bIns="0" rtlCol="0" anchor="t"/>
+          <a:lstStyle/>
+          <a:p>
+            <a:pPr algn="l" indent="0" marL="0">
+              <a:spcAft>
+                <a:spcPts val="800"/>
+              </a:spcAft>
+              <a:buNone/>
+            </a:pPr>
+            <a:r>
+              <a:rPr lang="en-US" sz="4000" dirty="0">
+                <a:solidFill>
+                  <a:srgbClr val="111111"/>
+                </a:solidFill>
+                <a:latin typeface="Times New Roman" pitchFamily="34" charset="0"/>
+                <a:ea typeface="Times New Roman" pitchFamily="34" charset="-122"/>
+                <a:cs typeface="Times New Roman" pitchFamily="34" charset="-120"/>
+              </a:rPr>
+              <a:t>Define population density.</a:t>
+            </a:r>
+            <a:endParaRPr lang="en-US" sz="4000" dirty="0"/>
+          </a:p>
+        </p:txBody>
+      </p:sp>
+      <p:sp>
+        <p:nvSpPr>
+          <p:cNvPr id="25" name="Slide Number Placeholder 0"/>
+          <p:cNvSpPr>
+            <a:spLocks noGrp="1"/>
+          </p:cNvSpPr>
+          <p:nvPr>
+            <p:ph type="sldNum" sz="quarter" idx="4294967295"/>
+          </p:nvPr>
+        </p:nvSpPr>
+        <p:spPr>
+          <a:xfrm>
+            <a:off x="27432" y="91440"/>
+            <a:ext cx="585216" cy="475488"/>
+          </a:xfrm>
+          <a:prstGeom prst="rect">
+            <a:avLst/>
+          </a:prstGeom>
+          <a:extLst>
+            <a:ext uri="{C572A759-6A51-4108-AA02-DFA0A04FC94B}">
+              <ma14:wrappingTextBoxFlag xmlns:ma14="http://schemas.microsoft.com/office/mac/drawingml/2011/main" val="0"/>
+            </a:ext>
+          </a:extLst>
+        </p:spPr>
+        <p:txBody>
+          <a:bodyPr/>
+          <a:lstStyle>
+            <a:lvl1pPr>
+              <a:defRPr sz="2000">
+                <a:solidFill>
+                  <a:srgbClr val="FFFFFF"/>
+                </a:solidFill>
+                <a:latin typeface="Calibri"/>
+                <a:ea typeface="Calibri"/>
+                <a:cs typeface="Calibri"/>
+              </a:defRPr>
+            </a:lvl1pPr>
+          </a:lstStyle>
+          <a:p>
+            <a:pPr algn="ctr"/>
+            <a:fld id="{F7021451-1387-4CA6-816F-3879F97B5CBC}" type="slidenum">
+              <a:rPr b="1" lang="en-US"/>
+              <a:t>64</a:t>
+            </a:fld>
+            <a:endParaRPr lang="en-US"/>
+          </a:p>
+        </p:txBody>
+      </p:sp>
+    </p:spTree>
+  </p:cSld>
+  <p:clrMapOvr>
+    <a:masterClrMapping/>
+  </p:clrMapOvr>
+</p:sld>
+</file>
+
+<file path=ppt/slides/slide65.xml><?xml version="1.0" encoding="utf-8"?>
+<p:sld xmlns:a="http://schemas.openxmlformats.org/drawingml/2006/main" xmlns:r="http://schemas.openxmlformats.org/officeDocument/2006/relationships" xmlns:p="http://schemas.openxmlformats.org/presentationml/2006/main">
+  <p:cSld name="Slide 65">
+    <p:spTree>
+      <p:nvGrpSpPr>
+        <p:cNvPr id="1" name=""/>
+        <p:cNvGrpSpPr/>
+        <p:nvPr/>
+      </p:nvGrpSpPr>
+      <p:grpSpPr>
+        <a:xfrm>
+          <a:off x="0" y="0"/>
+          <a:ext cx="0" cy="0"/>
+          <a:chOff x="0" y="0"/>
+          <a:chExt cx="0" cy="0"/>
+        </a:xfrm>
+      </p:grpSpPr>
+      <p:sp>
+        <p:nvSpPr>
+          <p:cNvPr id="2" name="Text 0"/>
+          <p:cNvSpPr/>
+          <p:nvPr/>
+        </p:nvSpPr>
+        <p:spPr>
+          <a:xfrm>
+            <a:off x="457200" y="713232"/>
+            <a:ext cx="11368735" cy="274320"/>
+          </a:xfrm>
+          <a:prstGeom prst="rect">
+            <a:avLst/>
+          </a:prstGeom>
+          <a:noFill/>
+          <a:ln/>
+        </p:spPr>
+        <p:txBody>
+          <a:bodyPr wrap="square" lIns="0" tIns="0" rIns="0" bIns="0" rtlCol="0" anchor="ctr"/>
+          <a:lstStyle/>
+          <a:p>
+            <a:pPr algn="r" indent="0" marL="0">
+              <a:buNone/>
+            </a:pPr>
+            <a:r>
+              <a:rPr lang="en-US" sz="1400" b="1" dirty="0">
+                <a:solidFill>
+                  <a:srgbClr val="1C3F6E"/>
+                </a:solidFill>
+                <a:latin typeface="Calibri" pitchFamily="34" charset="0"/>
+                <a:ea typeface="Calibri" pitchFamily="34" charset="-122"/>
+                <a:cs typeface="Calibri" pitchFamily="34" charset="-120"/>
+              </a:rPr>
+              <a:t>NEXT LESSON</a:t>
+            </a:r>
+            <a:endParaRPr lang="en-US" sz="1400" dirty="0"/>
+          </a:p>
+        </p:txBody>
+      </p:sp>
+      <p:pic>
+        <p:nvPicPr>
+          <p:cNvPr id="3" name="Image 0" descr="/home/claude/f4/img/minesec_sheet.png">    </p:cNvPr>
+          <p:cNvPicPr>
+            <a:picLocks noChangeAspect="1"/>
+          </p:cNvPicPr>
+          <p:nvPr/>
+        </p:nvPicPr>
+        <p:blipFill>
+          <a:blip r:embed="rId1"/>
+          <a:stretch>
+            <a:fillRect/>
+          </a:stretch>
+        </p:blipFill>
+        <p:spPr>
+          <a:xfrm>
+            <a:off x="0" y="658368"/>
+            <a:ext cx="5120640" cy="5833872"/>
+          </a:xfrm>
+          <a:prstGeom prst="rect">
+            <a:avLst/>
+          </a:prstGeom>
+        </p:spPr>
+      </p:pic>
+      <p:sp>
+        <p:nvSpPr>
+          <p:cNvPr id="4" name="Text 1"/>
+          <p:cNvSpPr/>
+          <p:nvPr/>
+        </p:nvSpPr>
+        <p:spPr>
+          <a:xfrm>
+            <a:off x="5349240" y="1005840"/>
+            <a:ext cx="6522415" cy="731520"/>
+          </a:xfrm>
+          <a:prstGeom prst="rect">
+            <a:avLst/>
+          </a:prstGeom>
+          <a:noFill/>
+          <a:ln/>
+        </p:spPr>
+        <p:txBody>
+          <a:bodyPr wrap="square" lIns="0" tIns="0" rIns="0" bIns="0" rtlCol="0" anchor="ctr">
+            <a:normAutofit/>
+          </a:bodyPr>
+          <a:lstStyle/>
+          <a:p>
+            <a:pPr algn="ctr" indent="0" marL="0">
+              <a:buNone/>
+            </a:pPr>
+            <a:r>
+              <a:rPr lang="en-US" sz="3600" b="1" dirty="0">
+                <a:solidFill>
+                  <a:srgbClr val="990011"/>
+                </a:solidFill>
+                <a:latin typeface="Times New Roman" pitchFamily="34" charset="0"/>
+                <a:ea typeface="Times New Roman" pitchFamily="34" charset="-122"/>
+                <a:cs typeface="Times New Roman" pitchFamily="34" charset="-120"/>
+              </a:rPr>
+              <a:t>Next Lesson</a:t>
+            </a:r>
+            <a:endParaRPr lang="en-US" sz="3600" dirty="0"/>
+          </a:p>
+        </p:txBody>
+      </p:sp>
+      <p:sp>
+        <p:nvSpPr>
+          <p:cNvPr id="5" name="Text 2"/>
+          <p:cNvSpPr/>
+          <p:nvPr/>
+        </p:nvSpPr>
+        <p:spPr>
+          <a:xfrm>
+            <a:off x="5349240" y="1783080"/>
+            <a:ext cx="6522415" cy="4663440"/>
+          </a:xfrm>
+          <a:prstGeom prst="rect">
+            <a:avLst/>
+          </a:prstGeom>
+          <a:noFill/>
+          <a:ln/>
+        </p:spPr>
+        <p:txBody>
+          <a:bodyPr wrap="square" lIns="0" tIns="0" rIns="0" bIns="0" rtlCol="0" anchor="ctr"/>
+          <a:lstStyle/>
+          <a:p>
+            <a:pPr algn="ctr" indent="0" marL="0">
+              <a:spcAft>
+                <a:spcPts val="800"/>
+              </a:spcAft>
+              <a:buNone/>
+            </a:pPr>
+            <a:r>
+              <a:rPr lang="en-US" sz="4000" b="1" dirty="0">
+                <a:solidFill>
+                  <a:srgbClr val="111111"/>
+                </a:solidFill>
+                <a:latin typeface="Times New Roman" pitchFamily="34" charset="0"/>
+                <a:ea typeface="Times New Roman" pitchFamily="34" charset="-122"/>
+                <a:cs typeface="Times New Roman" pitchFamily="34" charset="-120"/>
+              </a:rPr>
+              <a:t>Our next lesson will be on:</a:t>
+            </a:r>
+            <a:endParaRPr lang="en-US" sz="4000" dirty="0"/>
+          </a:p>
+          <a:p>
+            <a:pPr algn="ctr" indent="0" marL="0">
+              <a:spcAft>
+                <a:spcPts val="800"/>
+              </a:spcAft>
+              <a:buNone/>
+            </a:pPr>
+            <a:r>
+              <a:rPr lang="en-US" sz="4000" b="1" dirty="0">
+                <a:solidFill>
+                  <a:srgbClr val="990011"/>
+                </a:solidFill>
+                <a:latin typeface="Times New Roman" pitchFamily="34" charset="0"/>
+                <a:ea typeface="Times New Roman" pitchFamily="34" charset="-122"/>
+                <a:cs typeface="Times New Roman" pitchFamily="34" charset="-120"/>
+              </a:rPr>
+              <a:t>Lesson 2: Population Distribution and Density</a:t>
+            </a:r>
+            <a:endParaRPr lang="en-US" sz="4000" dirty="0"/>
+          </a:p>
+        </p:txBody>
+      </p:sp>
+      <p:sp>
+        <p:nvSpPr>
+          <p:cNvPr id="25" name="Slide Number Placeholder 0"/>
+          <p:cNvSpPr>
+            <a:spLocks noGrp="1"/>
+          </p:cNvSpPr>
+          <p:nvPr>
+            <p:ph type="sldNum" sz="quarter" idx="4294967295"/>
+          </p:nvPr>
+        </p:nvSpPr>
+        <p:spPr>
+          <a:xfrm>
+            <a:off x="27432" y="91440"/>
+            <a:ext cx="585216" cy="475488"/>
+          </a:xfrm>
+          <a:prstGeom prst="rect">
+            <a:avLst/>
+          </a:prstGeom>
+          <a:extLst>
+            <a:ext uri="{C572A759-6A51-4108-AA02-DFA0A04FC94B}">
+              <ma14:wrappingTextBoxFlag xmlns:ma14="http://schemas.microsoft.com/office/mac/drawingml/2011/main" val="0"/>
+            </a:ext>
+          </a:extLst>
+        </p:spPr>
+        <p:txBody>
+          <a:bodyPr/>
+          <a:lstStyle>
+            <a:lvl1pPr>
+              <a:defRPr sz="2000">
+                <a:solidFill>
+                  <a:srgbClr val="FFFFFF"/>
+                </a:solidFill>
+                <a:latin typeface="Calibri"/>
+                <a:ea typeface="Calibri"/>
+                <a:cs typeface="Calibri"/>
+              </a:defRPr>
+            </a:lvl1pPr>
+          </a:lstStyle>
+          <a:p>
+            <a:pPr algn="ctr"/>
+            <a:fld id="{F7021451-1387-4CA6-816F-3879F97B5CBC}" type="slidenum">
+              <a:rPr b="1" lang="en-US"/>
+              <a:t>65</a:t>
+            </a:fld>
+            <a:endParaRPr lang="en-US"/>
+          </a:p>
+        </p:txBody>
+      </p:sp>
+    </p:spTree>
+  </p:cSld>
+  <p:clrMapOvr>
+    <a:masterClrMapping/>
+  </p:clrMapOvr>
+</p:sld>
+</file>
+
+<file path=ppt/slides/slide66.xml><?xml version="1.0" encoding="utf-8"?>
+<p:sld xmlns:a="http://schemas.openxmlformats.org/drawingml/2006/main" xmlns:r="http://schemas.openxmlformats.org/officeDocument/2006/relationships" xmlns:p="http://schemas.openxmlformats.org/presentationml/2006/main">
+  <p:cSld name="Slide 66">
+    <p:spTree>
+      <p:nvGrpSpPr>
+        <p:cNvPr id="1" name=""/>
+        <p:cNvGrpSpPr/>
+        <p:nvPr/>
+      </p:nvGrpSpPr>
+      <p:grpSpPr>
+        <a:xfrm>
+          <a:off x="0" y="0"/>
+          <a:ext cx="0" cy="0"/>
+          <a:chOff x="0" y="0"/>
+          <a:chExt cx="0" cy="0"/>
+        </a:xfrm>
+      </p:grpSpPr>
+      <p:sp>
+        <p:nvSpPr>
+          <p:cNvPr id="2" name="Text 0"/>
+          <p:cNvSpPr/>
+          <p:nvPr/>
+        </p:nvSpPr>
+        <p:spPr>
+          <a:xfrm>
+            <a:off x="457200" y="713232"/>
+            <a:ext cx="11368735" cy="274320"/>
+          </a:xfrm>
+          <a:prstGeom prst="rect">
+            <a:avLst/>
+          </a:prstGeom>
+          <a:noFill/>
+          <a:ln/>
+        </p:spPr>
+        <p:txBody>
+          <a:bodyPr wrap="square" lIns="0" tIns="0" rIns="0" bIns="0" rtlCol="0" anchor="ctr"/>
+          <a:lstStyle/>
+          <a:p>
+            <a:pPr algn="r" indent="0" marL="0">
+              <a:buNone/>
+            </a:pPr>
+            <a:r>
+              <a:rPr lang="en-US" sz="1400" b="1" dirty="0">
+                <a:solidFill>
+                  <a:srgbClr val="1C3F6E"/>
+                </a:solidFill>
+                <a:latin typeface="Calibri" pitchFamily="34" charset="0"/>
+                <a:ea typeface="Calibri" pitchFamily="34" charset="-122"/>
+                <a:cs typeface="Calibri" pitchFamily="34" charset="-120"/>
+              </a:rPr>
+              <a:t>BILINGUAL GAME</a:t>
+            </a:r>
+            <a:endParaRPr lang="en-US" sz="1400" dirty="0"/>
+          </a:p>
+        </p:txBody>
+      </p:sp>
+      <p:sp>
+        <p:nvSpPr>
+          <p:cNvPr id="3" name="Text 1"/>
+          <p:cNvSpPr/>
+          <p:nvPr/>
+        </p:nvSpPr>
+        <p:spPr>
+          <a:xfrm>
+            <a:off x="457200" y="1005840"/>
+            <a:ext cx="11277295" cy="731520"/>
+          </a:xfrm>
+          <a:prstGeom prst="rect">
+            <a:avLst/>
+          </a:prstGeom>
+          <a:noFill/>
+          <a:ln/>
+        </p:spPr>
+        <p:txBody>
+          <a:bodyPr wrap="square" lIns="0" tIns="0" rIns="0" bIns="0" rtlCol="0" anchor="ctr"/>
+          <a:lstStyle/>
+          <a:p>
+            <a:pPr algn="ctr" indent="0" marL="0">
+              <a:buNone/>
+            </a:pPr>
+            <a:r>
+              <a:rPr lang="en-US" sz="3600" b="1" dirty="0">
+                <a:solidFill>
+                  <a:srgbClr val="990011"/>
+                </a:solidFill>
+                <a:latin typeface="Times New Roman" pitchFamily="34" charset="0"/>
+                <a:ea typeface="Times New Roman" pitchFamily="34" charset="-122"/>
+                <a:cs typeface="Times New Roman" pitchFamily="34" charset="-120"/>
+              </a:rPr>
               <a:t>Bilingual Game (Jeu Bilingue)</a:t>
             </a:r>
             <a:endParaRPr lang="en-US" sz="3600" dirty="0"/>
@@ -23012,7 +24282,7 @@
       </p:sp>
       <p:graphicFrame>
         <p:nvGraphicFramePr>
-          <p:cNvPr id="64" name="Table 0"/>
+          <p:cNvPr id="67" name="Table 0"/>
           <p:cNvGraphicFramePr>
             <a:graphicFrameLocks noGrp="1"/>
           </p:cNvGraphicFramePr>
@@ -24048,7 +25318,7 @@
             <a:pPr algn="ctr"/>
             <a:fld id="{F7021451-1387-4CA6-816F-3879F97B5CBC}" type="slidenum">
               <a:rPr b="1" lang="en-US"/>
-              <a:t>63</a:t>
+              <a:t>66</a:t>
             </a:fld>
             <a:endParaRPr lang="en-US"/>
           </a:p>
@@ -24062,9 +25332,9 @@
 </p:sld>
 </file>
 
-<file path=ppt/slides/slide64.xml><?xml version="1.0" encoding="utf-8"?>
+<file path=ppt/slides/slide67.xml><?xml version="1.0" encoding="utf-8"?>
 <p:sld xmlns:a="http://schemas.openxmlformats.org/drawingml/2006/main" xmlns:r="http://schemas.openxmlformats.org/officeDocument/2006/relationships" xmlns:p="http://schemas.openxmlformats.org/presentationml/2006/main">
-  <p:cSld name="Slide 64">
+  <p:cSld name="Slide 67">
     <p:spTree>
       <p:nvGrpSpPr>
         <p:cNvPr id="1" name=""/>
@@ -24159,7 +25429,7 @@
       </p:sp>
       <p:graphicFrame>
         <p:nvGraphicFramePr>
-          <p:cNvPr id="65" name="Table 0"/>
+          <p:cNvPr id="68" name="Table 0"/>
           <p:cNvGraphicFramePr>
             <a:graphicFrameLocks noGrp="1"/>
           </p:cNvGraphicFramePr>
@@ -24781,7 +26051,7 @@
             <a:pPr algn="ctr"/>
             <a:fld id="{F7021451-1387-4CA6-816F-3879F97B5CBC}" type="slidenum">
               <a:rPr b="1" lang="en-US"/>
-              <a:t>64</a:t>
+              <a:t>67</a:t>
             </a:fld>
             <a:endParaRPr lang="en-US"/>
           </a:p>
@@ -24795,9 +26065,9 @@
 </p:sld>
 </file>
 
-<file path=ppt/slides/slide65.xml><?xml version="1.0" encoding="utf-8"?>
+<file path=ppt/slides/slide68.xml><?xml version="1.0" encoding="utf-8"?>
 <p:sld xmlns:a="http://schemas.openxmlformats.org/drawingml/2006/main" xmlns:r="http://schemas.openxmlformats.org/officeDocument/2006/relationships" xmlns:p="http://schemas.openxmlformats.org/presentationml/2006/main">
-  <p:cSld name="Slide 65">
+  <p:cSld name="Slide 68">
     <p:spTree>
       <p:nvGrpSpPr>
         <p:cNvPr id="1" name=""/>
@@ -24892,7 +26162,7 @@
       </p:sp>
       <p:graphicFrame>
         <p:nvGraphicFramePr>
-          <p:cNvPr id="66" name="Table 0"/>
+          <p:cNvPr id="69" name="Table 0"/>
           <p:cNvGraphicFramePr>
             <a:graphicFrameLocks noGrp="1"/>
           </p:cNvGraphicFramePr>
@@ -25002,7 +26272,7 @@
                           <a:ea typeface="Calibri" pitchFamily="34" charset="-122"/>
                           <a:cs typeface="Calibri" pitchFamily="34" charset="-120"/>
                         </a:rPr>
-                        <a:t>DEFINITIONS; The Census; De Facto and De Jure Censuses; Sample Surveys; Vital Registration and Migration Records; The Current State of the World Population.</a:t>
+                        <a:t>DEFINITIONS; The Census; De Facto and De Jure Censuses; Principle and Examples; Strengths and Weaknesses; Vital Registration and Migration Records; The Current State of the World Population.</a:t>
                       </a:r>
                       <a:endParaRPr lang="en-US" sz="1600" dirty="0">
                         <a:latin typeface="Calibri" charset="0"/>
@@ -25652,7 +26922,7 @@
             <a:pPr algn="ctr"/>
             <a:fld id="{F7021451-1387-4CA6-816F-3879F97B5CBC}" type="slidenum">
               <a:rPr b="1" lang="en-US"/>
-              <a:t>65</a:t>
+              <a:t>68</a:t>
             </a:fld>
             <a:endParaRPr lang="en-US"/>
           </a:p>
@@ -25666,9 +26936,9 @@
 </p:sld>
 </file>
 
-<file path=ppt/slides/slide66.xml><?xml version="1.0" encoding="utf-8"?>
+<file path=ppt/slides/slide69.xml><?xml version="1.0" encoding="utf-8"?>
 <p:sld xmlns:a="http://schemas.openxmlformats.org/drawingml/2006/main" xmlns:r="http://schemas.openxmlformats.org/officeDocument/2006/relationships" xmlns:p="http://schemas.openxmlformats.org/presentationml/2006/main">
-  <p:cSld name="Slide 66">
+  <p:cSld name="Slide 69">
     <p:spTree>
       <p:nvGrpSpPr>
         <p:cNvPr id="1" name=""/>
@@ -25977,353 +27247,7 @@
             <a:pPr algn="ctr"/>
             <a:fld id="{F7021451-1387-4CA6-816F-3879F97B5CBC}" type="slidenum">
               <a:rPr b="1" lang="en-US"/>
-              <a:t>66</a:t>
-            </a:fld>
-            <a:endParaRPr lang="en-US"/>
-          </a:p>
-        </p:txBody>
-      </p:sp>
-    </p:spTree>
-  </p:cSld>
-  <p:clrMapOvr>
-    <a:masterClrMapping/>
-  </p:clrMapOvr>
-</p:sld>
-</file>
-
-<file path=ppt/slides/slide67.xml><?xml version="1.0" encoding="utf-8"?>
-<p:sld xmlns:a="http://schemas.openxmlformats.org/drawingml/2006/main" xmlns:r="http://schemas.openxmlformats.org/officeDocument/2006/relationships" xmlns:p="http://schemas.openxmlformats.org/presentationml/2006/main">
-  <p:cSld name="Slide 67">
-    <p:spTree>
-      <p:nvGrpSpPr>
-        <p:cNvPr id="1" name=""/>
-        <p:cNvGrpSpPr/>
-        <p:nvPr/>
-      </p:nvGrpSpPr>
-      <p:grpSpPr>
-        <a:xfrm>
-          <a:off x="0" y="0"/>
-          <a:ext cx="0" cy="0"/>
-          <a:chOff x="0" y="0"/>
-          <a:chExt cx="0" cy="0"/>
-        </a:xfrm>
-      </p:grpSpPr>
-      <p:sp>
-        <p:nvSpPr>
-          <p:cNvPr id="2" name="Text 0"/>
-          <p:cNvSpPr/>
-          <p:nvPr/>
-        </p:nvSpPr>
-        <p:spPr>
-          <a:xfrm>
-            <a:off x="457200" y="713232"/>
-            <a:ext cx="11368735" cy="274320"/>
-          </a:xfrm>
-          <a:prstGeom prst="rect">
-            <a:avLst/>
-          </a:prstGeom>
-          <a:noFill/>
-          <a:ln/>
-        </p:spPr>
-        <p:txBody>
-          <a:bodyPr wrap="square" lIns="0" tIns="0" rIns="0" bIns="0" rtlCol="0" anchor="ctr"/>
-          <a:lstStyle/>
-          <a:p>
-            <a:pPr algn="r" indent="0" marL="0">
-              <a:buNone/>
-            </a:pPr>
-            <a:r>
-              <a:rPr lang="en-US" sz="1400" b="1" dirty="0">
-                <a:solidFill>
-                  <a:srgbClr val="1C3F6E"/>
-                </a:solidFill>
-                <a:latin typeface="Calibri" pitchFamily="34" charset="0"/>
-                <a:ea typeface="Calibri" pitchFamily="34" charset="-122"/>
-                <a:cs typeface="Calibri" pitchFamily="34" charset="-120"/>
-              </a:rPr>
-              <a:t>REFERENCES</a:t>
-            </a:r>
-            <a:endParaRPr lang="en-US" sz="1400" dirty="0"/>
-          </a:p>
-        </p:txBody>
-      </p:sp>
-      <p:pic>
-        <p:nvPicPr>
-          <p:cNvPr id="3" name="Image 0" descr="/home/claude/f4/img/minesec_sheet.png">    </p:cNvPr>
-          <p:cNvPicPr>
-            <a:picLocks noChangeAspect="1"/>
-          </p:cNvPicPr>
-          <p:nvPr/>
-        </p:nvPicPr>
-        <p:blipFill>
-          <a:blip r:embed="rId1"/>
-          <a:stretch>
-            <a:fillRect/>
-          </a:stretch>
-        </p:blipFill>
-        <p:spPr>
-          <a:xfrm>
-            <a:off x="0" y="658368"/>
-            <a:ext cx="3840480" cy="5833872"/>
-          </a:xfrm>
-          <a:prstGeom prst="rect">
-            <a:avLst/>
-          </a:prstGeom>
-        </p:spPr>
-      </p:pic>
-      <p:sp>
-        <p:nvSpPr>
-          <p:cNvPr id="4" name="Text 1"/>
-          <p:cNvSpPr/>
-          <p:nvPr/>
-        </p:nvSpPr>
-        <p:spPr>
-          <a:xfrm>
-            <a:off x="4069080" y="1005840"/>
-            <a:ext cx="7802575" cy="731520"/>
-          </a:xfrm>
-          <a:prstGeom prst="rect">
-            <a:avLst/>
-          </a:prstGeom>
-          <a:noFill/>
-          <a:ln/>
-        </p:spPr>
-        <p:txBody>
-          <a:bodyPr wrap="square" lIns="0" tIns="0" rIns="0" bIns="0" rtlCol="0" anchor="ctr">
-            <a:normAutofit/>
-          </a:bodyPr>
-          <a:lstStyle/>
-          <a:p>
-            <a:pPr algn="ctr" indent="0" marL="0">
-              <a:buNone/>
-            </a:pPr>
-            <a:r>
-              <a:rPr lang="en-US" sz="3600" b="1" dirty="0">
-                <a:solidFill>
-                  <a:srgbClr val="990011"/>
-                </a:solidFill>
-                <a:latin typeface="Times New Roman" pitchFamily="34" charset="0"/>
-                <a:ea typeface="Times New Roman" pitchFamily="34" charset="-122"/>
-                <a:cs typeface="Times New Roman" pitchFamily="34" charset="-120"/>
-              </a:rPr>
-              <a:t>References</a:t>
-            </a:r>
-            <a:endParaRPr lang="en-US" sz="3600" dirty="0"/>
-          </a:p>
-        </p:txBody>
-      </p:sp>
-      <p:sp>
-        <p:nvSpPr>
-          <p:cNvPr id="5" name="Text 2"/>
-          <p:cNvSpPr/>
-          <p:nvPr/>
-        </p:nvSpPr>
-        <p:spPr>
-          <a:xfrm>
-            <a:off x="4069080" y="1783080"/>
-            <a:ext cx="7802575" cy="4663440"/>
-          </a:xfrm>
-          <a:prstGeom prst="rect">
-            <a:avLst/>
-          </a:prstGeom>
-          <a:noFill/>
-          <a:ln/>
-        </p:spPr>
-        <p:txBody>
-          <a:bodyPr wrap="square" lIns="0" tIns="0" rIns="0" bIns="0" rtlCol="0" anchor="t"/>
-          <a:lstStyle/>
-          <a:p>
-            <a:pPr algn="l" marL="342900" indent="-342900">
-              <a:spcAft>
-                <a:spcPts val="800"/>
-              </a:spcAft>
-              <a:buSzPct val="100000"/>
-              <a:buChar char="•"/>
-            </a:pPr>
-            <a:r>
-              <a:rPr lang="en-US" sz="1800" dirty="0">
-                <a:solidFill>
-                  <a:srgbClr val="111111"/>
-                </a:solidFill>
-                <a:latin typeface="Calibri" pitchFamily="34" charset="0"/>
-                <a:ea typeface="Calibri" pitchFamily="34" charset="-122"/>
-                <a:cs typeface="Calibri" pitchFamily="34" charset="-120"/>
-              </a:rPr>
-              <a:t>Geography Syllabus for Sixth Forms (Lower and Upper Sixth), MINESEC, 2019 — Module 4 (Population Geography).</a:t>
-            </a:r>
-            <a:endParaRPr lang="en-US" sz="1800" dirty="0"/>
-          </a:p>
-          <a:p>
-            <a:pPr algn="l" marL="342900" indent="-342900">
-              <a:spcAft>
-                <a:spcPts val="800"/>
-              </a:spcAft>
-              <a:buSzPct val="100000"/>
-              <a:buChar char="•"/>
-            </a:pPr>
-            <a:r>
-              <a:rPr lang="en-US" sz="1800" dirty="0">
-                <a:solidFill>
-                  <a:srgbClr val="111111"/>
-                </a:solidFill>
-                <a:latin typeface="Calibri" pitchFamily="34" charset="0"/>
-                <a:ea typeface="Calibri" pitchFamily="34" charset="-122"/>
-                <a:cs typeface="Calibri" pitchFamily="34" charset="-120"/>
-              </a:rPr>
-              <a:t>Teacher's course notes: Mr KAMDEM E., Population Geography (USA), GBHS Garoua, 2026.</a:t>
-            </a:r>
-            <a:endParaRPr lang="en-US" sz="1800" dirty="0"/>
-          </a:p>
-          <a:p>
-            <a:pPr algn="l" marL="342900" indent="-342900">
-              <a:spcAft>
-                <a:spcPts val="800"/>
-              </a:spcAft>
-              <a:buSzPct val="100000"/>
-              <a:buChar char="•"/>
-            </a:pPr>
-            <a:r>
-              <a:rPr lang="en-US" sz="1800" dirty="0">
-                <a:solidFill>
-                  <a:srgbClr val="111111"/>
-                </a:solidFill>
-                <a:latin typeface="Calibri" pitchFamily="34" charset="0"/>
-                <a:ea typeface="Calibri" pitchFamily="34" charset="-122"/>
-                <a:cs typeface="Calibri" pitchFamily="34" charset="-120"/>
-              </a:rPr>
-              <a:t>United Nations, World Population Prospects 2024.</a:t>
-            </a:r>
-            <a:endParaRPr lang="en-US" sz="1800" dirty="0"/>
-          </a:p>
-          <a:p>
-            <a:pPr algn="l" marL="342900" indent="-342900">
-              <a:spcAft>
-                <a:spcPts val="800"/>
-              </a:spcAft>
-              <a:buSzPct val="100000"/>
-              <a:buChar char="•"/>
-            </a:pPr>
-            <a:r>
-              <a:rPr lang="en-US" sz="1800" dirty="0">
-                <a:solidFill>
-                  <a:srgbClr val="111111"/>
-                </a:solidFill>
-                <a:latin typeface="Calibri" pitchFamily="34" charset="0"/>
-                <a:ea typeface="Calibri" pitchFamily="34" charset="-122"/>
-                <a:cs typeface="Calibri" pitchFamily="34" charset="-120"/>
-              </a:rPr>
-              <a:t>Photo, Activity 3: “Newborn baby rests” by World Bank Photo Collection, CC BY-NC-ND 2.0, via Flickr (https://www.flickr.com/photos/10816734@N03/19845580540)</a:t>
-            </a:r>
-            <a:endParaRPr lang="en-US" sz="1800" dirty="0"/>
-          </a:p>
-          <a:p>
-            <a:pPr algn="l" marL="342900" indent="-342900">
-              <a:spcAft>
-                <a:spcPts val="800"/>
-              </a:spcAft>
-              <a:buSzPct val="100000"/>
-              <a:buChar char="•"/>
-            </a:pPr>
-            <a:r>
-              <a:rPr lang="en-US" sz="1800" dirty="0">
-                <a:solidFill>
-                  <a:srgbClr val="111111"/>
-                </a:solidFill>
-                <a:latin typeface="Calibri" pitchFamily="34" charset="0"/>
-                <a:ea typeface="Calibri" pitchFamily="34" charset="-122"/>
-                <a:cs typeface="Calibri" pitchFamily="34" charset="-120"/>
-              </a:rPr>
-              <a:t>Photo, Activity 4: “London Heathrow T4 arrivals” by markhillary, CC BY 2.0, via Flickr (https://www.flickr.com/photos/56087830@N00/1568955656)</a:t>
-            </a:r>
-            <a:endParaRPr lang="en-US" sz="1800" dirty="0"/>
-          </a:p>
-          <a:p>
-            <a:pPr algn="l" marL="342900" indent="-342900">
-              <a:spcAft>
-                <a:spcPts val="800"/>
-              </a:spcAft>
-              <a:buSzPct val="100000"/>
-              <a:buChar char="•"/>
-            </a:pPr>
-            <a:r>
-              <a:rPr lang="en-US" sz="1800" dirty="0">
-                <a:solidFill>
-                  <a:srgbClr val="111111"/>
-                </a:solidFill>
-                <a:latin typeface="Calibri" pitchFamily="34" charset="0"/>
-                <a:ea typeface="Calibri" pitchFamily="34" charset="-122"/>
-                <a:cs typeface="Calibri" pitchFamily="34" charset="-120"/>
-              </a:rPr>
-              <a:t>Photo, board summary (Frequency): “Wax market” by zouzouwizman, CC BY 2.0, via Flickr (https://www.flickr.com/photos/61111202@N00/12129001)</a:t>
-            </a:r>
-            <a:endParaRPr lang="en-US" sz="1800" dirty="0"/>
-          </a:p>
-          <a:p>
-            <a:pPr algn="l" marL="342900" indent="-342900">
-              <a:spcAft>
-                <a:spcPts val="800"/>
-              </a:spcAft>
-              <a:buSzPct val="100000"/>
-              <a:buChar char="•"/>
-            </a:pPr>
-            <a:r>
-              <a:rPr lang="en-US" sz="1800" dirty="0">
-                <a:solidFill>
-                  <a:srgbClr val="111111"/>
-                </a:solidFill>
-                <a:latin typeface="Calibri" pitchFamily="34" charset="0"/>
-                <a:ea typeface="Calibri" pitchFamily="34" charset="-122"/>
-                <a:cs typeface="Calibri" pitchFamily="34" charset="-120"/>
-              </a:rPr>
-              <a:t>Diagrams and animations: drawn for this lesson (Geography Department).</a:t>
-            </a:r>
-            <a:endParaRPr lang="en-US" sz="1800" dirty="0"/>
-          </a:p>
-        </p:txBody>
-      </p:sp>
-      <p:sp>
-        <p:nvSpPr>
-          <p:cNvPr id="25" name="Slide Number Placeholder 0"/>
-          <p:cNvSpPr>
-            <a:spLocks noGrp="1"/>
-          </p:cNvSpPr>
-          <p:nvPr>
-            <p:ph type="sldNum" sz="quarter" idx="4294967295"/>
-          </p:nvPr>
-        </p:nvSpPr>
-        <p:spPr>
-          <a:xfrm>
-            <a:off x="27432" y="91440"/>
-            <a:ext cx="585216" cy="475488"/>
-          </a:xfrm>
-          <a:prstGeom prst="rect">
-            <a:avLst/>
-          </a:prstGeom>
-          <a:extLst>
-            <a:ext uri="{C572A759-6A51-4108-AA02-DFA0A04FC94B}">
-              <ma14:wrappingTextBoxFlag xmlns:ma14="http://schemas.microsoft.com/office/mac/drawingml/2011/main" val="0"/>
-            </a:ext>
-          </a:extLst>
-        </p:spPr>
-        <p:txBody>
-          <a:bodyPr/>
-          <a:lstStyle>
-            <a:lvl1pPr>
-              <a:defRPr sz="2000">
-                <a:solidFill>
-                  <a:srgbClr val="FFFFFF"/>
-                </a:solidFill>
-                <a:latin typeface="Calibri"/>
-                <a:ea typeface="Calibri"/>
-                <a:cs typeface="Calibri"/>
-              </a:defRPr>
-            </a:lvl1pPr>
-          </a:lstStyle>
-          <a:p>
-            <a:pPr algn="ctr"/>
-            <a:fld id="{F7021451-1387-4CA6-816F-3879F97B5CBC}" type="slidenum">
-              <a:rPr b="1" lang="en-US"/>
-              <a:t>67</a:t>
+              <a:t>69</a:t>
             </a:fld>
             <a:endParaRPr lang="en-US"/>
           </a:p>
@@ -26586,6 +27510,352 @@
             <a:fld id="{F7021451-1387-4CA6-816F-3879F97B5CBC}" type="slidenum">
               <a:rPr b="1" lang="en-US"/>
               <a:t>7</a:t>
+            </a:fld>
+            <a:endParaRPr lang="en-US"/>
+          </a:p>
+        </p:txBody>
+      </p:sp>
+    </p:spTree>
+  </p:cSld>
+  <p:clrMapOvr>
+    <a:masterClrMapping/>
+  </p:clrMapOvr>
+</p:sld>
+</file>
+
+<file path=ppt/slides/slide70.xml><?xml version="1.0" encoding="utf-8"?>
+<p:sld xmlns:a="http://schemas.openxmlformats.org/drawingml/2006/main" xmlns:r="http://schemas.openxmlformats.org/officeDocument/2006/relationships" xmlns:p="http://schemas.openxmlformats.org/presentationml/2006/main">
+  <p:cSld name="Slide 70">
+    <p:spTree>
+      <p:nvGrpSpPr>
+        <p:cNvPr id="1" name=""/>
+        <p:cNvGrpSpPr/>
+        <p:nvPr/>
+      </p:nvGrpSpPr>
+      <p:grpSpPr>
+        <a:xfrm>
+          <a:off x="0" y="0"/>
+          <a:ext cx="0" cy="0"/>
+          <a:chOff x="0" y="0"/>
+          <a:chExt cx="0" cy="0"/>
+        </a:xfrm>
+      </p:grpSpPr>
+      <p:sp>
+        <p:nvSpPr>
+          <p:cNvPr id="2" name="Text 0"/>
+          <p:cNvSpPr/>
+          <p:nvPr/>
+        </p:nvSpPr>
+        <p:spPr>
+          <a:xfrm>
+            <a:off x="457200" y="713232"/>
+            <a:ext cx="11368735" cy="274320"/>
+          </a:xfrm>
+          <a:prstGeom prst="rect">
+            <a:avLst/>
+          </a:prstGeom>
+          <a:noFill/>
+          <a:ln/>
+        </p:spPr>
+        <p:txBody>
+          <a:bodyPr wrap="square" lIns="0" tIns="0" rIns="0" bIns="0" rtlCol="0" anchor="ctr"/>
+          <a:lstStyle/>
+          <a:p>
+            <a:pPr algn="r" indent="0" marL="0">
+              <a:buNone/>
+            </a:pPr>
+            <a:r>
+              <a:rPr lang="en-US" sz="1400" b="1" dirty="0">
+                <a:solidFill>
+                  <a:srgbClr val="1C3F6E"/>
+                </a:solidFill>
+                <a:latin typeface="Calibri" pitchFamily="34" charset="0"/>
+                <a:ea typeface="Calibri" pitchFamily="34" charset="-122"/>
+                <a:cs typeface="Calibri" pitchFamily="34" charset="-120"/>
+              </a:rPr>
+              <a:t>REFERENCES</a:t>
+            </a:r>
+            <a:endParaRPr lang="en-US" sz="1400" dirty="0"/>
+          </a:p>
+        </p:txBody>
+      </p:sp>
+      <p:pic>
+        <p:nvPicPr>
+          <p:cNvPr id="3" name="Image 0" descr="/home/claude/f4/img/minesec_sheet.png">    </p:cNvPr>
+          <p:cNvPicPr>
+            <a:picLocks noChangeAspect="1"/>
+          </p:cNvPicPr>
+          <p:nvPr/>
+        </p:nvPicPr>
+        <p:blipFill>
+          <a:blip r:embed="rId1"/>
+          <a:stretch>
+            <a:fillRect/>
+          </a:stretch>
+        </p:blipFill>
+        <p:spPr>
+          <a:xfrm>
+            <a:off x="0" y="658368"/>
+            <a:ext cx="3840480" cy="5833872"/>
+          </a:xfrm>
+          <a:prstGeom prst="rect">
+            <a:avLst/>
+          </a:prstGeom>
+        </p:spPr>
+      </p:pic>
+      <p:sp>
+        <p:nvSpPr>
+          <p:cNvPr id="4" name="Text 1"/>
+          <p:cNvSpPr/>
+          <p:nvPr/>
+        </p:nvSpPr>
+        <p:spPr>
+          <a:xfrm>
+            <a:off x="4069080" y="1005840"/>
+            <a:ext cx="7802575" cy="731520"/>
+          </a:xfrm>
+          <a:prstGeom prst="rect">
+            <a:avLst/>
+          </a:prstGeom>
+          <a:noFill/>
+          <a:ln/>
+        </p:spPr>
+        <p:txBody>
+          <a:bodyPr wrap="square" lIns="0" tIns="0" rIns="0" bIns="0" rtlCol="0" anchor="ctr">
+            <a:normAutofit/>
+          </a:bodyPr>
+          <a:lstStyle/>
+          <a:p>
+            <a:pPr algn="ctr" indent="0" marL="0">
+              <a:buNone/>
+            </a:pPr>
+            <a:r>
+              <a:rPr lang="en-US" sz="3600" b="1" dirty="0">
+                <a:solidFill>
+                  <a:srgbClr val="990011"/>
+                </a:solidFill>
+                <a:latin typeface="Times New Roman" pitchFamily="34" charset="0"/>
+                <a:ea typeface="Times New Roman" pitchFamily="34" charset="-122"/>
+                <a:cs typeface="Times New Roman" pitchFamily="34" charset="-120"/>
+              </a:rPr>
+              <a:t>References</a:t>
+            </a:r>
+            <a:endParaRPr lang="en-US" sz="3600" dirty="0"/>
+          </a:p>
+        </p:txBody>
+      </p:sp>
+      <p:sp>
+        <p:nvSpPr>
+          <p:cNvPr id="5" name="Text 2"/>
+          <p:cNvSpPr/>
+          <p:nvPr/>
+        </p:nvSpPr>
+        <p:spPr>
+          <a:xfrm>
+            <a:off x="4069080" y="1783080"/>
+            <a:ext cx="7802575" cy="4663440"/>
+          </a:xfrm>
+          <a:prstGeom prst="rect">
+            <a:avLst/>
+          </a:prstGeom>
+          <a:noFill/>
+          <a:ln/>
+        </p:spPr>
+        <p:txBody>
+          <a:bodyPr wrap="square" lIns="0" tIns="0" rIns="0" bIns="0" rtlCol="0" anchor="t"/>
+          <a:lstStyle/>
+          <a:p>
+            <a:pPr algn="l" marL="342900" indent="-342900">
+              <a:spcAft>
+                <a:spcPts val="800"/>
+              </a:spcAft>
+              <a:buSzPct val="100000"/>
+              <a:buChar char="•"/>
+            </a:pPr>
+            <a:r>
+              <a:rPr lang="en-US" sz="1800" dirty="0">
+                <a:solidFill>
+                  <a:srgbClr val="111111"/>
+                </a:solidFill>
+                <a:latin typeface="Calibri" pitchFamily="34" charset="0"/>
+                <a:ea typeface="Calibri" pitchFamily="34" charset="-122"/>
+                <a:cs typeface="Calibri" pitchFamily="34" charset="-120"/>
+              </a:rPr>
+              <a:t>Geography Syllabus for Sixth Forms (Lower and Upper Sixth), MINESEC, 2019 — Module 4 (Population Geography).</a:t>
+            </a:r>
+            <a:endParaRPr lang="en-US" sz="1800" dirty="0"/>
+          </a:p>
+          <a:p>
+            <a:pPr algn="l" marL="342900" indent="-342900">
+              <a:spcAft>
+                <a:spcPts val="800"/>
+              </a:spcAft>
+              <a:buSzPct val="100000"/>
+              <a:buChar char="•"/>
+            </a:pPr>
+            <a:r>
+              <a:rPr lang="en-US" sz="1800" dirty="0">
+                <a:solidFill>
+                  <a:srgbClr val="111111"/>
+                </a:solidFill>
+                <a:latin typeface="Calibri" pitchFamily="34" charset="0"/>
+                <a:ea typeface="Calibri" pitchFamily="34" charset="-122"/>
+                <a:cs typeface="Calibri" pitchFamily="34" charset="-120"/>
+              </a:rPr>
+              <a:t>Teacher's course notes: Mr KAMDEM E., Population Geography (USA), GBHS Garoua, 2026.</a:t>
+            </a:r>
+            <a:endParaRPr lang="en-US" sz="1800" dirty="0"/>
+          </a:p>
+          <a:p>
+            <a:pPr algn="l" marL="342900" indent="-342900">
+              <a:spcAft>
+                <a:spcPts val="800"/>
+              </a:spcAft>
+              <a:buSzPct val="100000"/>
+              <a:buChar char="•"/>
+            </a:pPr>
+            <a:r>
+              <a:rPr lang="en-US" sz="1800" dirty="0">
+                <a:solidFill>
+                  <a:srgbClr val="111111"/>
+                </a:solidFill>
+                <a:latin typeface="Calibri" pitchFamily="34" charset="0"/>
+                <a:ea typeface="Calibri" pitchFamily="34" charset="-122"/>
+                <a:cs typeface="Calibri" pitchFamily="34" charset="-120"/>
+              </a:rPr>
+              <a:t>United Nations, World Population Prospects 2024.</a:t>
+            </a:r>
+            <a:endParaRPr lang="en-US" sz="1800" dirty="0"/>
+          </a:p>
+          <a:p>
+            <a:pPr algn="l" marL="342900" indent="-342900">
+              <a:spcAft>
+                <a:spcPts val="800"/>
+              </a:spcAft>
+              <a:buSzPct val="100000"/>
+              <a:buChar char="•"/>
+            </a:pPr>
+            <a:r>
+              <a:rPr lang="en-US" sz="1800" dirty="0">
+                <a:solidFill>
+                  <a:srgbClr val="111111"/>
+                </a:solidFill>
+                <a:latin typeface="Calibri" pitchFamily="34" charset="0"/>
+                <a:ea typeface="Calibri" pitchFamily="34" charset="-122"/>
+                <a:cs typeface="Calibri" pitchFamily="34" charset="-120"/>
+              </a:rPr>
+              <a:t>Photo, Activity 3: “Newborn baby rests” by World Bank Photo Collection, CC BY-NC-ND 2.0, via Flickr (https://www.flickr.com/photos/10816734@N03/19845580540)</a:t>
+            </a:r>
+            <a:endParaRPr lang="en-US" sz="1800" dirty="0"/>
+          </a:p>
+          <a:p>
+            <a:pPr algn="l" marL="342900" indent="-342900">
+              <a:spcAft>
+                <a:spcPts val="800"/>
+              </a:spcAft>
+              <a:buSzPct val="100000"/>
+              <a:buChar char="•"/>
+            </a:pPr>
+            <a:r>
+              <a:rPr lang="en-US" sz="1800" dirty="0">
+                <a:solidFill>
+                  <a:srgbClr val="111111"/>
+                </a:solidFill>
+                <a:latin typeface="Calibri" pitchFamily="34" charset="0"/>
+                <a:ea typeface="Calibri" pitchFamily="34" charset="-122"/>
+                <a:cs typeface="Calibri" pitchFamily="34" charset="-120"/>
+              </a:rPr>
+              <a:t>Photo, Activity 4: “London Heathrow T4 arrivals” by markhillary, CC BY 2.0, via Flickr (https://www.flickr.com/photos/56087830@N00/1568955656)</a:t>
+            </a:r>
+            <a:endParaRPr lang="en-US" sz="1800" dirty="0"/>
+          </a:p>
+          <a:p>
+            <a:pPr algn="l" marL="342900" indent="-342900">
+              <a:spcAft>
+                <a:spcPts val="800"/>
+              </a:spcAft>
+              <a:buSzPct val="100000"/>
+              <a:buChar char="•"/>
+            </a:pPr>
+            <a:r>
+              <a:rPr lang="en-US" sz="1800" dirty="0">
+                <a:solidFill>
+                  <a:srgbClr val="111111"/>
+                </a:solidFill>
+                <a:latin typeface="Calibri" pitchFamily="34" charset="0"/>
+                <a:ea typeface="Calibri" pitchFamily="34" charset="-122"/>
+                <a:cs typeface="Calibri" pitchFamily="34" charset="-120"/>
+              </a:rPr>
+              <a:t>Photo, board summary (Frequency): “Wax market” by zouzouwizman, CC BY 2.0, via Flickr (https://www.flickr.com/photos/61111202@N00/12129001)</a:t>
+            </a:r>
+            <a:endParaRPr lang="en-US" sz="1800" dirty="0"/>
+          </a:p>
+          <a:p>
+            <a:pPr algn="l" marL="342900" indent="-342900">
+              <a:spcAft>
+                <a:spcPts val="800"/>
+              </a:spcAft>
+              <a:buSzPct val="100000"/>
+              <a:buChar char="•"/>
+            </a:pPr>
+            <a:r>
+              <a:rPr lang="en-US" sz="1800" dirty="0">
+                <a:solidFill>
+                  <a:srgbClr val="111111"/>
+                </a:solidFill>
+                <a:latin typeface="Calibri" pitchFamily="34" charset="0"/>
+                <a:ea typeface="Calibri" pitchFamily="34" charset="-122"/>
+                <a:cs typeface="Calibri" pitchFamily="34" charset="-120"/>
+              </a:rPr>
+              <a:t>Diagrams and animations: drawn for this lesson (Geography Department).</a:t>
+            </a:r>
+            <a:endParaRPr lang="en-US" sz="1800" dirty="0"/>
+          </a:p>
+        </p:txBody>
+      </p:sp>
+      <p:sp>
+        <p:nvSpPr>
+          <p:cNvPr id="25" name="Slide Number Placeholder 0"/>
+          <p:cNvSpPr>
+            <a:spLocks noGrp="1"/>
+          </p:cNvSpPr>
+          <p:nvPr>
+            <p:ph type="sldNum" sz="quarter" idx="4294967295"/>
+          </p:nvPr>
+        </p:nvSpPr>
+        <p:spPr>
+          <a:xfrm>
+            <a:off x="27432" y="91440"/>
+            <a:ext cx="585216" cy="475488"/>
+          </a:xfrm>
+          <a:prstGeom prst="rect">
+            <a:avLst/>
+          </a:prstGeom>
+          <a:extLst>
+            <a:ext uri="{C572A759-6A51-4108-AA02-DFA0A04FC94B}">
+              <ma14:wrappingTextBoxFlag xmlns:ma14="http://schemas.microsoft.com/office/mac/drawingml/2011/main" val="0"/>
+            </a:ext>
+          </a:extLst>
+        </p:spPr>
+        <p:txBody>
+          <a:bodyPr/>
+          <a:lstStyle>
+            <a:lvl1pPr>
+              <a:defRPr sz="2000">
+                <a:solidFill>
+                  <a:srgbClr val="FFFFFF"/>
+                </a:solidFill>
+                <a:latin typeface="Calibri"/>
+                <a:ea typeface="Calibri"/>
+                <a:cs typeface="Calibri"/>
+              </a:defRPr>
+            </a:lvl1pPr>
+          </a:lstStyle>
+          <a:p>
+            <a:pPr algn="ctr"/>
+            <a:fld id="{F7021451-1387-4CA6-816F-3879F97B5CBC}" type="slidenum">
+              <a:rPr b="1" lang="en-US"/>
+              <a:t>70</a:t>
             </a:fld>
             <a:endParaRPr lang="en-US"/>
           </a:p>
